--- a/lecons/F3/14_FORM4_LESSON11_Volcanoes.pptx
+++ b/lecons/F3/14_FORM4_LESSON11_Volcanoes.pptx
@@ -54,9 +54,16 @@
     <p:sldId id="302" r:id="rId48"/>
     <p:sldId id="303" r:id="rId49"/>
     <p:sldId id="304" r:id="rId50"/>
+    <p:sldId id="305" r:id="rId51"/>
+    <p:sldId id="306" r:id="rId52"/>
+    <p:sldId id="307" r:id="rId53"/>
+    <p:sldId id="308" r:id="rId54"/>
+    <p:sldId id="309" r:id="rId55"/>
+    <p:sldId id="310" r:id="rId56"/>
+    <p:sldId id="311" r:id="rId57"/>
   </p:sldIdLst>
   <p:notesMasterIdLst>
-    <p:notesMasterId r:id="rId51"/>
+    <p:notesMasterId r:id="rId58"/>
   </p:notesMasterIdLst>
   <p:sldSz cx="12192000" cy="6858000"/>
   <p:notesSz cx="6858000" cy="12192000"/>
@@ -726,7 +733,7 @@
           <a:p>
             <a:r>
               <a:rPr lang="en-US" dirty="0"/>
-              <a:t>Good. People live near an active volcano.</a:t>
+              <a:t>Good. The pupils do not know what a volcano is or how it is built.</a:t>
             </a:r>
             <a:endParaRPr lang="en-US" dirty="0"/>
           </a:p>
@@ -990,7 +997,7 @@
           <a:p>
             <a:r>
               <a:rPr lang="en-US" dirty="0"/>
-              <a:t>Question 3: Why do people still live there? Think for a moment, then raise your hand to answer.</a:t>
+              <a:t>Question 3: Is Mount Cameroon active, dormant or extinct? Think for a moment, then raise your hand to answer.</a:t>
             </a:r>
             <a:endParaRPr lang="en-US" dirty="0"/>
           </a:p>
@@ -1078,7 +1085,7 @@
           <a:p>
             <a:r>
               <a:rPr lang="en-US" dirty="0"/>
-              <a:t>Good. The volcanic soils are very fertile.</a:t>
+              <a:t>Good. Active: it has erupted recently.</a:t>
             </a:r>
             <a:endParaRPr lang="en-US" dirty="0"/>
           </a:p>
@@ -1430,7 +1437,7 @@
           <a:p>
             <a:r>
               <a:rPr lang="en-US" dirty="0"/>
-              <a:t>Here is the question for Activity 1: What is a volcano, and where does its magma come from? Take one minute to think and write your answer in your rough notebook.</a:t>
+              <a:t>Here is the question for Activity 1: What comes out of a volcano during an eruption? Take one minute to think and write your answer in your rough notebook.</a:t>
             </a:r>
             <a:endParaRPr lang="en-US" dirty="0"/>
           </a:p>
@@ -1606,7 +1613,7 @@
           <a:p>
             <a:r>
               <a:rPr lang="en-US" dirty="0"/>
-              <a:t>Let us check the answer together. It is an opening in the crust where magma, gases and ash come out; magma rises from the hot mantle at plate margins and hot spots.</a:t>
+              <a:t>Let us check the answer together. Lava, gases and ash.</a:t>
             </a:r>
             <a:endParaRPr lang="en-US" dirty="0"/>
           </a:p>
@@ -1782,7 +1789,7 @@
           <a:p>
             <a:r>
               <a:rPr lang="en-US" dirty="0"/>
-              <a:t>Here is the question for Activity 2: Name three types of volcanoes by shape and three by activity. Take one minute to think and write your answer in your rough notebook.</a:t>
+              <a:t>Here is the question for Activity 2: Which type of volcano has gentle slopes made of runny lava? Take one minute to think and write your answer in your rough notebook.</a:t>
             </a:r>
             <a:endParaRPr lang="en-US" dirty="0"/>
           </a:p>
@@ -1870,7 +1877,7 @@
           <a:p>
             <a:r>
               <a:rPr lang="en-US" dirty="0"/>
-              <a:t>Let us check the answer together. By shape: shield, composite and ash cone. By activity: active, dormant and extinct.</a:t>
+              <a:t>Let us check the answer together. The shield volcano.</a:t>
             </a:r>
             <a:endParaRPr lang="en-US" dirty="0"/>
           </a:p>
@@ -2046,7 +2053,7 @@
           <a:p>
             <a:r>
               <a:rPr lang="en-US" dirty="0"/>
-              <a:t>Here is the question for Activity 3: Name the parts of a volcano from the bottom to the top. Take one minute to think and write your answer in your rough notebook.</a:t>
+              <a:t>Here is the question for Activity 3: Where is magma stored under a volcano? Take one minute to think and write your answer in your rough notebook.</a:t>
             </a:r>
             <a:endParaRPr lang="en-US" dirty="0"/>
           </a:p>
@@ -2134,7 +2141,7 @@
           <a:p>
             <a:r>
               <a:rPr lang="en-US" dirty="0"/>
-              <a:t>Let us check the answer together. Magma chamber, vent (pipe), cone and crater.</a:t>
+              <a:t>Let us check the answer together. In the magma chamber.</a:t>
             </a:r>
             <a:endParaRPr lang="en-US" dirty="0"/>
           </a:p>
@@ -2222,7 +2229,7 @@
           <a:p>
             <a:r>
               <a:rPr lang="en-US" dirty="0"/>
-              <a:t>Now we are going to copy the board summary. Write the title and the headings neatly in your notebooks. I will give you enough time for each slide, so do not rush.</a:t>
+              <a:t>Here is the next question: Through which part does it rise? Take one minute to think and write your answer in your rough notebook.</a:t>
             </a:r>
             <a:endParaRPr lang="en-US" dirty="0"/>
           </a:p>
@@ -2310,7 +2317,7 @@
           <a:p>
             <a:r>
               <a:rPr lang="en-US" dirty="0"/>
-              <a:t>Let us copy Definition and Origin. Volcanoes are defined and explained as follows. On this slide we have Volcano and Volcanicity. Write each point on a new line, with the key term first, and explain it in your own words when we revise. When you finish, we go to the next slide.</a:t>
+              <a:t>Let us check the answer together. Through the vent (pipe).</a:t>
             </a:r>
             <a:endParaRPr lang="en-US" dirty="0"/>
           </a:p>
@@ -2398,7 +2405,7 @@
           <a:p>
             <a:r>
               <a:rPr lang="en-US" dirty="0"/>
-              <a:t>We continue with Definition and Origin. On this slide we have Origin and Cameroon. Write each point on a new line, with the key term first, and explain it in your own words when we revise.</a:t>
+              <a:t>Now we are going to copy the board summary. Write the title and the headings neatly in your notebooks. I will give you enough time for each slide, so do not rush.</a:t>
             </a:r>
             <a:endParaRPr lang="en-US" dirty="0"/>
           </a:p>
@@ -2574,7 +2581,7 @@
           <a:p>
             <a:r>
               <a:rPr lang="en-US" dirty="0"/>
-              <a:t>Let us copy Types of Volcanoes. Volcanoes are classified as follows. On this slide we have Active volcano and Dormant volcano. Write each point on a new line, with the key term first, and explain it in your own words when we revise. When you finish, we go to the next slide.</a:t>
+              <a:t>Let us copy the definitions. The key terms of this lesson are defined as follows. On this slide we have Volcano. Write each point on a new line, with the key term first, and explain it in your own words when we revise. When you finish, we go to the next slide.</a:t>
             </a:r>
             <a:endParaRPr lang="en-US" dirty="0"/>
           </a:p>
@@ -2662,7 +2669,7 @@
           <a:p>
             <a:r>
               <a:rPr lang="en-US" dirty="0"/>
-              <a:t>We continue with Types of Volcanoes. On this slide we have Extinct volcano and By shape. Write each point on a new line, with the key term first, and explain it in your own words when we revise.</a:t>
+              <a:t>We continue with the definitions. On this slide we have Volcanicity, Magma and Lava. Write each point on a new line, with the key term first, and explain it in your own words when we revise.</a:t>
             </a:r>
             <a:endParaRPr lang="en-US" dirty="0"/>
           </a:p>
@@ -2750,7 +2757,7 @@
           <a:p>
             <a:r>
               <a:rPr lang="en-US" dirty="0"/>
-              <a:t>Now draw this illustration in your notebook: types of volcanoes by shape. Give it a title and label it clearly.</a:t>
+              <a:t>Let us copy Origin of Volcanoes. Volcanoes are found in the following places. On this slide we have Constructive plate margins and Destructive plate margins. Write each point on a new line, with the key term first, and explain it in your own words when we revise. When you finish, we go to the next slide.</a:t>
             </a:r>
             <a:endParaRPr lang="en-US" dirty="0"/>
           </a:p>
@@ -2838,7 +2845,7 @@
           <a:p>
             <a:r>
               <a:rPr lang="en-US" dirty="0"/>
-              <a:t>Let us copy Processes of Volcanicity. Magma moves in two ways. On this slide we have Intrusion and Extrusion. Write each point on a new line, with the key term first, and explain it in your own words when we revise.</a:t>
+              <a:t>We continue with Origin of Volcanoes. On this slide we have Hot spots. Write each point on a new line, with the key term first, and explain it in your own words when we revise.</a:t>
             </a:r>
             <a:endParaRPr lang="en-US" dirty="0"/>
           </a:p>
@@ -2926,7 +2933,7 @@
           <a:p>
             <a:r>
               <a:rPr lang="en-US" dirty="0"/>
-              <a:t>Now draw this illustration in your notebook: intrusive and extrusive features. Give it a title and label it clearly.</a:t>
+              <a:t>Copy the point on Lines of weakness on the left, then draw the diagram on the right: volcanoes of Cameroon. Give it a title and label it clearly.</a:t>
             </a:r>
             <a:endParaRPr lang="en-US" dirty="0"/>
           </a:p>
@@ -3014,7 +3021,7 @@
           <a:p>
             <a:r>
               <a:rPr lang="en-US" dirty="0"/>
-              <a:t>Let us copy General Structure of a Volcano. A volcano has the following parts. On this slide we have Magma chamber and Vent. Write each point on a new line, with the key term first, and explain it in your own words when we revise. When you finish, we go to the next slide.</a:t>
+              <a:t>Let us copy According to Activity. Volcanoes are classified according to their activity as follows. Copy the point on Active volcano on the left, then draw the diagram on the right: mount Cameroon. Give it a title and label it clearly.</a:t>
             </a:r>
             <a:endParaRPr lang="en-US" dirty="0"/>
           </a:p>
@@ -3102,7 +3109,7 @@
           <a:p>
             <a:r>
               <a:rPr lang="en-US" dirty="0"/>
-              <a:t>We continue with General Structure of a Volcano. On this slide we have Cone and crater. Write each point on a new line, with the key term first, and explain it in your own words when we revise.</a:t>
+              <a:t>We continue with According to Activity. On this slide we have Dormant volcano and Extinct volcano. Write each point on a new line, with the key term first, and explain it in your own words when we revise.</a:t>
             </a:r>
             <a:endParaRPr lang="en-US" dirty="0"/>
           </a:p>
@@ -3190,7 +3197,7 @@
           <a:p>
             <a:r>
               <a:rPr lang="en-US" dirty="0"/>
-              <a:t>Now draw this illustration in your notebook: the structure of a volcano. Give it a title and label it clearly.</a:t>
+              <a:t>Let us copy According to Shape. Volcanoes are classified according to their shape as follows. Copy the point on Shield volcano on the left, then draw the diagram on the right: types of volcanoes by shape. Give it a title and label it clearly.</a:t>
             </a:r>
             <a:endParaRPr lang="en-US" dirty="0"/>
           </a:p>
@@ -3278,7 +3285,7 @@
           <a:p>
             <a:r>
               <a:rPr lang="en-US" dirty="0"/>
-              <a:t>Now let us check what you have understood. Question 1: What is a volcano? Answer in your exercise book.</a:t>
+              <a:t>We continue with According to Shape. On this slide we have Composite cone and Ash and cinder cone. Write each point on a new line, with the key term first, and explain it in your own words when we revise.</a:t>
             </a:r>
             <a:endParaRPr lang="en-US" dirty="0"/>
           </a:p>
@@ -3366,7 +3373,7 @@
           <a:p>
             <a:r>
               <a:rPr lang="en-US" dirty="0"/>
-              <a:t>The expected answer is: an opening in the crust where magma comes out. If you got it right, well done.</a:t>
+              <a:t>Let us copy Processes of Volcanicity. Magma moves by two processes. Copy the point on Intrusion on the left, then draw the diagram on the right: intrusive and extrusive features. Give it a title and label it clearly.</a:t>
             </a:r>
             <a:endParaRPr lang="en-US" dirty="0"/>
           </a:p>
@@ -3542,7 +3549,7 @@
           <a:p>
             <a:r>
               <a:rPr lang="en-US" dirty="0"/>
-              <a:t>Now let us check what you have understood. Question 2: Is Mount Cameroon active, dormant or extinct? Answer in your exercise book.</a:t>
+              <a:t>We continue with Processes of Volcanicity. On this slide we have Extrusion. Write each point on a new line, with the key term first, and explain it in your own words when we revise.</a:t>
             </a:r>
             <a:endParaRPr lang="en-US" dirty="0"/>
           </a:p>
@@ -3630,7 +3637,7 @@
           <a:p>
             <a:r>
               <a:rPr lang="en-US" dirty="0"/>
-              <a:t>The expected answer is: active: it erupted in 1999 and 2000. If you got it right, well done.</a:t>
+              <a:t>Let us copy General Structure of a Volcano. A volcano has the following parts. Copy the point on Magma chamber on the left, then draw the diagram on the right: the structure of a volcano. Give it a title and label it clearly.</a:t>
             </a:r>
             <a:endParaRPr lang="en-US" dirty="0"/>
           </a:p>
@@ -3718,7 +3725,7 @@
           <a:p>
             <a:r>
               <a:rPr lang="en-US" dirty="0"/>
-              <a:t>For those who need more practice, fill in the blanks in your exercise book. The answers are: number 1, lava; number 2, vent; number 3, active.</a:t>
+              <a:t>We continue with General Structure of a Volcano. On this slide we have Vent (pipe) and Cone. Write each point on a new line, with the key term first, and explain it in your own words when we revise.</a:t>
             </a:r>
             <a:endParaRPr lang="en-US" dirty="0"/>
           </a:p>
@@ -3806,7 +3813,7 @@
           <a:p>
             <a:r>
               <a:rPr lang="en-US" dirty="0"/>
-              <a:t>For your homework: Imagine a friend wants to farm near Buea, on Mount Cameroon. Write two good reasons to go and two dangers. We shall correct it at the beginning of our next lesson.</a:t>
+              <a:t>Copy the point on Crater on the left, then draw the diagram on the right: a crater. Give it a title and label it clearly.</a:t>
             </a:r>
             <a:endParaRPr lang="en-US" dirty="0"/>
           </a:p>
@@ -3894,7 +3901,7 @@
           <a:p>
             <a:r>
               <a:rPr lang="en-US" dirty="0"/>
-              <a:t>Our next lesson will be on Lesson 12: The Impact of Volcanicity on Man. Thank you for your attention, and see you next time.</a:t>
+              <a:t>We continue with General Structure of a Volcano. On this slide we have Secondary cone. Write each point on a new line, with the key term first, and explain it in your own words when we revise.</a:t>
             </a:r>
             <a:endParaRPr lang="en-US" dirty="0"/>
           </a:p>
@@ -3982,7 +3989,7 @@
           <a:p>
             <a:r>
               <a:rPr lang="en-US" dirty="0"/>
-              <a:t>Let us play the bilingual game. I say a word in English, and you give me the French word. Then we do the reverse.</a:t>
+              <a:t>Now let us check what you have understood. Question 1: What is a volcano? Answer in your exercise book.</a:t>
             </a:r>
             <a:endParaRPr lang="en-US" dirty="0"/>
           </a:p>
@@ -4070,7 +4077,7 @@
           <a:p>
             <a:r>
               <a:rPr lang="en-US" dirty="0"/>
-              <a:t>I record this information in the official logbook of the class after the lesson.</a:t>
+              <a:t>The expected answer is: an opening in the crust where magma comes out. If you got it right, well done.</a:t>
             </a:r>
             <a:endParaRPr lang="en-US" dirty="0"/>
           </a:p>
@@ -4158,7 +4165,7 @@
           <a:p>
             <a:r>
               <a:rPr lang="en-US" dirty="0"/>
-              <a:t>I complete the second page of the logbook: the matter taught, the evaluation, the homework and the attendance.</a:t>
+              <a:t>Now let us check what you have understood. Question 2: Is Mount Cameroon active, dormant or extinct? Answer in your exercise book.</a:t>
             </a:r>
             <a:endParaRPr lang="en-US" dirty="0"/>
           </a:p>
@@ -4246,7 +4253,7 @@
           <a:p>
             <a:r>
               <a:rPr lang="en-US" dirty="0"/>
-              <a:t>This slide is for me, the teacher: it gives the timing of the lesson and what to do if the projector is not available.</a:t>
+              <a:t>The expected answer is: active: it erupted in 1999 and 2000. If you got it right, well done.</a:t>
             </a:r>
             <a:endParaRPr lang="en-US" dirty="0"/>
           </a:p>
@@ -4334,7 +4341,7 @@
           <a:p>
             <a:r>
               <a:rPr lang="en-US" dirty="0"/>
-              <a:t>These are the references and picture credits used to prepare this lesson.</a:t>
+              <a:t>For those who need more practice, fill in the blanks in your exercise book. The answers are: number 1, lava; number 2, vent; number 3, active.</a:t>
             </a:r>
             <a:endParaRPr lang="en-US" dirty="0"/>
           </a:p>
@@ -4464,6 +4471,622 @@
 </p:notes>
 </file>
 
+<file path=ppt/notesSlides/notesSlide50.xml><?xml version="1.0" encoding="utf-8"?>
+<p:notes xmlns:a="http://schemas.openxmlformats.org/drawingml/2006/main" xmlns:r="http://schemas.openxmlformats.org/officeDocument/2006/relationships" xmlns:p="http://schemas.openxmlformats.org/presentationml/2006/main">
+  <p:cSld>
+    <p:spTree>
+      <p:nvGrpSpPr>
+        <p:cNvPr id="1" name=""/>
+        <p:cNvGrpSpPr/>
+        <p:nvPr/>
+      </p:nvGrpSpPr>
+      <p:grpSpPr>
+        <a:xfrm>
+          <a:off x="0" y="0"/>
+          <a:ext cx="0" cy="0"/>
+          <a:chOff x="0" y="0"/>
+          <a:chExt cx="0" cy="0"/>
+        </a:xfrm>
+      </p:grpSpPr>
+      <p:sp>
+        <p:nvSpPr>
+          <p:cNvPr id="2" name="Slide Image Placeholder 1"/>
+          <p:cNvSpPr>
+            <a:spLocks noGrp="1" noRot="1" noChangeAspect="1"/>
+          </p:cNvSpPr>
+          <p:nvPr>
+            <p:ph type="sldImg"/>
+          </p:nvPr>
+        </p:nvSpPr>
+        <p:spPr/>
+      </p:sp>
+      <p:sp>
+        <p:nvSpPr>
+          <p:cNvPr id="3" name="Notes Placeholder 2"/>
+          <p:cNvSpPr>
+            <a:spLocks noGrp="1"/>
+          </p:cNvSpPr>
+          <p:nvPr>
+            <p:ph type="body" idx="1"/>
+          </p:nvPr>
+        </p:nvSpPr>
+        <p:spPr/>
+        <p:txBody>
+          <a:bodyPr/>
+          <a:lstStyle/>
+          <a:p>
+            <a:r>
+              <a:rPr lang="en-US" dirty="0"/>
+              <a:t>For your homework: Imagine a friend wants to farm near Buea, on Mount Cameroon. Write two good reasons to go and two dangers. We shall correct it at the beginning of our next lesson.</a:t>
+            </a:r>
+            <a:endParaRPr lang="en-US" dirty="0"/>
+          </a:p>
+        </p:txBody>
+      </p:sp>
+      <p:sp>
+        <p:nvSpPr>
+          <p:cNvPr id="4" name="Slide Number Placeholder 3"/>
+          <p:cNvSpPr>
+            <a:spLocks noGrp="1"/>
+          </p:cNvSpPr>
+          <p:nvPr>
+            <p:ph type="sldNum" sz="quarter" idx="10"/>
+          </p:nvPr>
+        </p:nvSpPr>
+        <p:spPr/>
+        <p:txBody>
+          <a:bodyPr/>
+          <a:lstStyle/>
+          <a:p>
+            <a:fld id="{F7021451-1387-4CA6-816F-3879F97B5CBC}" type="slidenum">
+              <a:rPr lang="en-US"/>
+              <a:t>50</a:t>
+            </a:fld>
+            <a:endParaRPr lang="en-US"/>
+          </a:p>
+        </p:txBody>
+      </p:sp>
+    </p:spTree>
+    <p:extLst>
+      <p:ext uri="{BB962C8B-B14F-4D97-AF65-F5344CB8AC3E}">
+        <p14:creationId xmlns:p14="http://schemas.microsoft.com/office/powerpoint/2010/main" val="1024086991"/>
+      </p:ext>
+    </p:extLst>
+  </p:cSld>
+  <p:clrMapOvr>
+    <a:masterClrMapping/>
+  </p:clrMapOvr>
+</p:notes>
+</file>
+
+<file path=ppt/notesSlides/notesSlide51.xml><?xml version="1.0" encoding="utf-8"?>
+<p:notes xmlns:a="http://schemas.openxmlformats.org/drawingml/2006/main" xmlns:r="http://schemas.openxmlformats.org/officeDocument/2006/relationships" xmlns:p="http://schemas.openxmlformats.org/presentationml/2006/main">
+  <p:cSld>
+    <p:spTree>
+      <p:nvGrpSpPr>
+        <p:cNvPr id="1" name=""/>
+        <p:cNvGrpSpPr/>
+        <p:nvPr/>
+      </p:nvGrpSpPr>
+      <p:grpSpPr>
+        <a:xfrm>
+          <a:off x="0" y="0"/>
+          <a:ext cx="0" cy="0"/>
+          <a:chOff x="0" y="0"/>
+          <a:chExt cx="0" cy="0"/>
+        </a:xfrm>
+      </p:grpSpPr>
+      <p:sp>
+        <p:nvSpPr>
+          <p:cNvPr id="2" name="Slide Image Placeholder 1"/>
+          <p:cNvSpPr>
+            <a:spLocks noGrp="1" noRot="1" noChangeAspect="1"/>
+          </p:cNvSpPr>
+          <p:nvPr>
+            <p:ph type="sldImg"/>
+          </p:nvPr>
+        </p:nvSpPr>
+        <p:spPr/>
+      </p:sp>
+      <p:sp>
+        <p:nvSpPr>
+          <p:cNvPr id="3" name="Notes Placeholder 2"/>
+          <p:cNvSpPr>
+            <a:spLocks noGrp="1"/>
+          </p:cNvSpPr>
+          <p:nvPr>
+            <p:ph type="body" idx="1"/>
+          </p:nvPr>
+        </p:nvSpPr>
+        <p:spPr/>
+        <p:txBody>
+          <a:bodyPr/>
+          <a:lstStyle/>
+          <a:p>
+            <a:r>
+              <a:rPr lang="en-US" dirty="0"/>
+              <a:t>Our next lesson will be on Lesson 12: The Impact of Volcanicity on Man. Thank you for your attention, and see you next time.</a:t>
+            </a:r>
+            <a:endParaRPr lang="en-US" dirty="0"/>
+          </a:p>
+        </p:txBody>
+      </p:sp>
+      <p:sp>
+        <p:nvSpPr>
+          <p:cNvPr id="4" name="Slide Number Placeholder 3"/>
+          <p:cNvSpPr>
+            <a:spLocks noGrp="1"/>
+          </p:cNvSpPr>
+          <p:nvPr>
+            <p:ph type="sldNum" sz="quarter" idx="10"/>
+          </p:nvPr>
+        </p:nvSpPr>
+        <p:spPr/>
+        <p:txBody>
+          <a:bodyPr/>
+          <a:lstStyle/>
+          <a:p>
+            <a:fld id="{F7021451-1387-4CA6-816F-3879F97B5CBC}" type="slidenum">
+              <a:rPr lang="en-US"/>
+              <a:t>51</a:t>
+            </a:fld>
+            <a:endParaRPr lang="en-US"/>
+          </a:p>
+        </p:txBody>
+      </p:sp>
+    </p:spTree>
+    <p:extLst>
+      <p:ext uri="{BB962C8B-B14F-4D97-AF65-F5344CB8AC3E}">
+        <p14:creationId xmlns:p14="http://schemas.microsoft.com/office/powerpoint/2010/main" val="1024086991"/>
+      </p:ext>
+    </p:extLst>
+  </p:cSld>
+  <p:clrMapOvr>
+    <a:masterClrMapping/>
+  </p:clrMapOvr>
+</p:notes>
+</file>
+
+<file path=ppt/notesSlides/notesSlide52.xml><?xml version="1.0" encoding="utf-8"?>
+<p:notes xmlns:a="http://schemas.openxmlformats.org/drawingml/2006/main" xmlns:r="http://schemas.openxmlformats.org/officeDocument/2006/relationships" xmlns:p="http://schemas.openxmlformats.org/presentationml/2006/main">
+  <p:cSld>
+    <p:spTree>
+      <p:nvGrpSpPr>
+        <p:cNvPr id="1" name=""/>
+        <p:cNvGrpSpPr/>
+        <p:nvPr/>
+      </p:nvGrpSpPr>
+      <p:grpSpPr>
+        <a:xfrm>
+          <a:off x="0" y="0"/>
+          <a:ext cx="0" cy="0"/>
+          <a:chOff x="0" y="0"/>
+          <a:chExt cx="0" cy="0"/>
+        </a:xfrm>
+      </p:grpSpPr>
+      <p:sp>
+        <p:nvSpPr>
+          <p:cNvPr id="2" name="Slide Image Placeholder 1"/>
+          <p:cNvSpPr>
+            <a:spLocks noGrp="1" noRot="1" noChangeAspect="1"/>
+          </p:cNvSpPr>
+          <p:nvPr>
+            <p:ph type="sldImg"/>
+          </p:nvPr>
+        </p:nvSpPr>
+        <p:spPr/>
+      </p:sp>
+      <p:sp>
+        <p:nvSpPr>
+          <p:cNvPr id="3" name="Notes Placeholder 2"/>
+          <p:cNvSpPr>
+            <a:spLocks noGrp="1"/>
+          </p:cNvSpPr>
+          <p:nvPr>
+            <p:ph type="body" idx="1"/>
+          </p:nvPr>
+        </p:nvSpPr>
+        <p:spPr/>
+        <p:txBody>
+          <a:bodyPr/>
+          <a:lstStyle/>
+          <a:p>
+            <a:r>
+              <a:rPr lang="en-US" dirty="0"/>
+              <a:t>Let us play the bilingual game. I say a word in English, and you give me the French word. Then we do the reverse.</a:t>
+            </a:r>
+            <a:endParaRPr lang="en-US" dirty="0"/>
+          </a:p>
+        </p:txBody>
+      </p:sp>
+      <p:sp>
+        <p:nvSpPr>
+          <p:cNvPr id="4" name="Slide Number Placeholder 3"/>
+          <p:cNvSpPr>
+            <a:spLocks noGrp="1"/>
+          </p:cNvSpPr>
+          <p:nvPr>
+            <p:ph type="sldNum" sz="quarter" idx="10"/>
+          </p:nvPr>
+        </p:nvSpPr>
+        <p:spPr/>
+        <p:txBody>
+          <a:bodyPr/>
+          <a:lstStyle/>
+          <a:p>
+            <a:fld id="{F7021451-1387-4CA6-816F-3879F97B5CBC}" type="slidenum">
+              <a:rPr lang="en-US"/>
+              <a:t>52</a:t>
+            </a:fld>
+            <a:endParaRPr lang="en-US"/>
+          </a:p>
+        </p:txBody>
+      </p:sp>
+    </p:spTree>
+    <p:extLst>
+      <p:ext uri="{BB962C8B-B14F-4D97-AF65-F5344CB8AC3E}">
+        <p14:creationId xmlns:p14="http://schemas.microsoft.com/office/powerpoint/2010/main" val="1024086991"/>
+      </p:ext>
+    </p:extLst>
+  </p:cSld>
+  <p:clrMapOvr>
+    <a:masterClrMapping/>
+  </p:clrMapOvr>
+</p:notes>
+</file>
+
+<file path=ppt/notesSlides/notesSlide53.xml><?xml version="1.0" encoding="utf-8"?>
+<p:notes xmlns:a="http://schemas.openxmlformats.org/drawingml/2006/main" xmlns:r="http://schemas.openxmlformats.org/officeDocument/2006/relationships" xmlns:p="http://schemas.openxmlformats.org/presentationml/2006/main">
+  <p:cSld>
+    <p:spTree>
+      <p:nvGrpSpPr>
+        <p:cNvPr id="1" name=""/>
+        <p:cNvGrpSpPr/>
+        <p:nvPr/>
+      </p:nvGrpSpPr>
+      <p:grpSpPr>
+        <a:xfrm>
+          <a:off x="0" y="0"/>
+          <a:ext cx="0" cy="0"/>
+          <a:chOff x="0" y="0"/>
+          <a:chExt cx="0" cy="0"/>
+        </a:xfrm>
+      </p:grpSpPr>
+      <p:sp>
+        <p:nvSpPr>
+          <p:cNvPr id="2" name="Slide Image Placeholder 1"/>
+          <p:cNvSpPr>
+            <a:spLocks noGrp="1" noRot="1" noChangeAspect="1"/>
+          </p:cNvSpPr>
+          <p:nvPr>
+            <p:ph type="sldImg"/>
+          </p:nvPr>
+        </p:nvSpPr>
+        <p:spPr/>
+      </p:sp>
+      <p:sp>
+        <p:nvSpPr>
+          <p:cNvPr id="3" name="Notes Placeholder 2"/>
+          <p:cNvSpPr>
+            <a:spLocks noGrp="1"/>
+          </p:cNvSpPr>
+          <p:nvPr>
+            <p:ph type="body" idx="1"/>
+          </p:nvPr>
+        </p:nvSpPr>
+        <p:spPr/>
+        <p:txBody>
+          <a:bodyPr/>
+          <a:lstStyle/>
+          <a:p>
+            <a:r>
+              <a:rPr lang="en-US" dirty="0"/>
+              <a:t>I record this information in the official logbook of the class after the lesson.</a:t>
+            </a:r>
+            <a:endParaRPr lang="en-US" dirty="0"/>
+          </a:p>
+        </p:txBody>
+      </p:sp>
+      <p:sp>
+        <p:nvSpPr>
+          <p:cNvPr id="4" name="Slide Number Placeholder 3"/>
+          <p:cNvSpPr>
+            <a:spLocks noGrp="1"/>
+          </p:cNvSpPr>
+          <p:nvPr>
+            <p:ph type="sldNum" sz="quarter" idx="10"/>
+          </p:nvPr>
+        </p:nvSpPr>
+        <p:spPr/>
+        <p:txBody>
+          <a:bodyPr/>
+          <a:lstStyle/>
+          <a:p>
+            <a:fld id="{F7021451-1387-4CA6-816F-3879F97B5CBC}" type="slidenum">
+              <a:rPr lang="en-US"/>
+              <a:t>53</a:t>
+            </a:fld>
+            <a:endParaRPr lang="en-US"/>
+          </a:p>
+        </p:txBody>
+      </p:sp>
+    </p:spTree>
+    <p:extLst>
+      <p:ext uri="{BB962C8B-B14F-4D97-AF65-F5344CB8AC3E}">
+        <p14:creationId xmlns:p14="http://schemas.microsoft.com/office/powerpoint/2010/main" val="1024086991"/>
+      </p:ext>
+    </p:extLst>
+  </p:cSld>
+  <p:clrMapOvr>
+    <a:masterClrMapping/>
+  </p:clrMapOvr>
+</p:notes>
+</file>
+
+<file path=ppt/notesSlides/notesSlide54.xml><?xml version="1.0" encoding="utf-8"?>
+<p:notes xmlns:a="http://schemas.openxmlformats.org/drawingml/2006/main" xmlns:r="http://schemas.openxmlformats.org/officeDocument/2006/relationships" xmlns:p="http://schemas.openxmlformats.org/presentationml/2006/main">
+  <p:cSld>
+    <p:spTree>
+      <p:nvGrpSpPr>
+        <p:cNvPr id="1" name=""/>
+        <p:cNvGrpSpPr/>
+        <p:nvPr/>
+      </p:nvGrpSpPr>
+      <p:grpSpPr>
+        <a:xfrm>
+          <a:off x="0" y="0"/>
+          <a:ext cx="0" cy="0"/>
+          <a:chOff x="0" y="0"/>
+          <a:chExt cx="0" cy="0"/>
+        </a:xfrm>
+      </p:grpSpPr>
+      <p:sp>
+        <p:nvSpPr>
+          <p:cNvPr id="2" name="Slide Image Placeholder 1"/>
+          <p:cNvSpPr>
+            <a:spLocks noGrp="1" noRot="1" noChangeAspect="1"/>
+          </p:cNvSpPr>
+          <p:nvPr>
+            <p:ph type="sldImg"/>
+          </p:nvPr>
+        </p:nvSpPr>
+        <p:spPr/>
+      </p:sp>
+      <p:sp>
+        <p:nvSpPr>
+          <p:cNvPr id="3" name="Notes Placeholder 2"/>
+          <p:cNvSpPr>
+            <a:spLocks noGrp="1"/>
+          </p:cNvSpPr>
+          <p:nvPr>
+            <p:ph type="body" idx="1"/>
+          </p:nvPr>
+        </p:nvSpPr>
+        <p:spPr/>
+        <p:txBody>
+          <a:bodyPr/>
+          <a:lstStyle/>
+          <a:p>
+            <a:r>
+              <a:rPr lang="en-US" dirty="0"/>
+              <a:t>I complete the second page of the logbook: the matter taught, the evaluation, the homework and the attendance.</a:t>
+            </a:r>
+            <a:endParaRPr lang="en-US" dirty="0"/>
+          </a:p>
+        </p:txBody>
+      </p:sp>
+      <p:sp>
+        <p:nvSpPr>
+          <p:cNvPr id="4" name="Slide Number Placeholder 3"/>
+          <p:cNvSpPr>
+            <a:spLocks noGrp="1"/>
+          </p:cNvSpPr>
+          <p:nvPr>
+            <p:ph type="sldNum" sz="quarter" idx="10"/>
+          </p:nvPr>
+        </p:nvSpPr>
+        <p:spPr/>
+        <p:txBody>
+          <a:bodyPr/>
+          <a:lstStyle/>
+          <a:p>
+            <a:fld id="{F7021451-1387-4CA6-816F-3879F97B5CBC}" type="slidenum">
+              <a:rPr lang="en-US"/>
+              <a:t>54</a:t>
+            </a:fld>
+            <a:endParaRPr lang="en-US"/>
+          </a:p>
+        </p:txBody>
+      </p:sp>
+    </p:spTree>
+    <p:extLst>
+      <p:ext uri="{BB962C8B-B14F-4D97-AF65-F5344CB8AC3E}">
+        <p14:creationId xmlns:p14="http://schemas.microsoft.com/office/powerpoint/2010/main" val="1024086991"/>
+      </p:ext>
+    </p:extLst>
+  </p:cSld>
+  <p:clrMapOvr>
+    <a:masterClrMapping/>
+  </p:clrMapOvr>
+</p:notes>
+</file>
+
+<file path=ppt/notesSlides/notesSlide55.xml><?xml version="1.0" encoding="utf-8"?>
+<p:notes xmlns:a="http://schemas.openxmlformats.org/drawingml/2006/main" xmlns:r="http://schemas.openxmlformats.org/officeDocument/2006/relationships" xmlns:p="http://schemas.openxmlformats.org/presentationml/2006/main">
+  <p:cSld>
+    <p:spTree>
+      <p:nvGrpSpPr>
+        <p:cNvPr id="1" name=""/>
+        <p:cNvGrpSpPr/>
+        <p:nvPr/>
+      </p:nvGrpSpPr>
+      <p:grpSpPr>
+        <a:xfrm>
+          <a:off x="0" y="0"/>
+          <a:ext cx="0" cy="0"/>
+          <a:chOff x="0" y="0"/>
+          <a:chExt cx="0" cy="0"/>
+        </a:xfrm>
+      </p:grpSpPr>
+      <p:sp>
+        <p:nvSpPr>
+          <p:cNvPr id="2" name="Slide Image Placeholder 1"/>
+          <p:cNvSpPr>
+            <a:spLocks noGrp="1" noRot="1" noChangeAspect="1"/>
+          </p:cNvSpPr>
+          <p:nvPr>
+            <p:ph type="sldImg"/>
+          </p:nvPr>
+        </p:nvSpPr>
+        <p:spPr/>
+      </p:sp>
+      <p:sp>
+        <p:nvSpPr>
+          <p:cNvPr id="3" name="Notes Placeholder 2"/>
+          <p:cNvSpPr>
+            <a:spLocks noGrp="1"/>
+          </p:cNvSpPr>
+          <p:nvPr>
+            <p:ph type="body" idx="1"/>
+          </p:nvPr>
+        </p:nvSpPr>
+        <p:spPr/>
+        <p:txBody>
+          <a:bodyPr/>
+          <a:lstStyle/>
+          <a:p>
+            <a:r>
+              <a:rPr lang="en-US" dirty="0"/>
+              <a:t>This slide is for me, the teacher: it gives the timing of the lesson and what to do if the projector is not available.</a:t>
+            </a:r>
+            <a:endParaRPr lang="en-US" dirty="0"/>
+          </a:p>
+        </p:txBody>
+      </p:sp>
+      <p:sp>
+        <p:nvSpPr>
+          <p:cNvPr id="4" name="Slide Number Placeholder 3"/>
+          <p:cNvSpPr>
+            <a:spLocks noGrp="1"/>
+          </p:cNvSpPr>
+          <p:nvPr>
+            <p:ph type="sldNum" sz="quarter" idx="10"/>
+          </p:nvPr>
+        </p:nvSpPr>
+        <p:spPr/>
+        <p:txBody>
+          <a:bodyPr/>
+          <a:lstStyle/>
+          <a:p>
+            <a:fld id="{F7021451-1387-4CA6-816F-3879F97B5CBC}" type="slidenum">
+              <a:rPr lang="en-US"/>
+              <a:t>55</a:t>
+            </a:fld>
+            <a:endParaRPr lang="en-US"/>
+          </a:p>
+        </p:txBody>
+      </p:sp>
+    </p:spTree>
+    <p:extLst>
+      <p:ext uri="{BB962C8B-B14F-4D97-AF65-F5344CB8AC3E}">
+        <p14:creationId xmlns:p14="http://schemas.microsoft.com/office/powerpoint/2010/main" val="1024086991"/>
+      </p:ext>
+    </p:extLst>
+  </p:cSld>
+  <p:clrMapOvr>
+    <a:masterClrMapping/>
+  </p:clrMapOvr>
+</p:notes>
+</file>
+
+<file path=ppt/notesSlides/notesSlide56.xml><?xml version="1.0" encoding="utf-8"?>
+<p:notes xmlns:a="http://schemas.openxmlformats.org/drawingml/2006/main" xmlns:r="http://schemas.openxmlformats.org/officeDocument/2006/relationships" xmlns:p="http://schemas.openxmlformats.org/presentationml/2006/main">
+  <p:cSld>
+    <p:spTree>
+      <p:nvGrpSpPr>
+        <p:cNvPr id="1" name=""/>
+        <p:cNvGrpSpPr/>
+        <p:nvPr/>
+      </p:nvGrpSpPr>
+      <p:grpSpPr>
+        <a:xfrm>
+          <a:off x="0" y="0"/>
+          <a:ext cx="0" cy="0"/>
+          <a:chOff x="0" y="0"/>
+          <a:chExt cx="0" cy="0"/>
+        </a:xfrm>
+      </p:grpSpPr>
+      <p:sp>
+        <p:nvSpPr>
+          <p:cNvPr id="2" name="Slide Image Placeholder 1"/>
+          <p:cNvSpPr>
+            <a:spLocks noGrp="1" noRot="1" noChangeAspect="1"/>
+          </p:cNvSpPr>
+          <p:nvPr>
+            <p:ph type="sldImg"/>
+          </p:nvPr>
+        </p:nvSpPr>
+        <p:spPr/>
+      </p:sp>
+      <p:sp>
+        <p:nvSpPr>
+          <p:cNvPr id="3" name="Notes Placeholder 2"/>
+          <p:cNvSpPr>
+            <a:spLocks noGrp="1"/>
+          </p:cNvSpPr>
+          <p:nvPr>
+            <p:ph type="body" idx="1"/>
+          </p:nvPr>
+        </p:nvSpPr>
+        <p:spPr/>
+        <p:txBody>
+          <a:bodyPr/>
+          <a:lstStyle/>
+          <a:p>
+            <a:r>
+              <a:rPr lang="en-US" dirty="0"/>
+              <a:t>These are the references and picture credits used to prepare this lesson.</a:t>
+            </a:r>
+            <a:endParaRPr lang="en-US" dirty="0"/>
+          </a:p>
+        </p:txBody>
+      </p:sp>
+      <p:sp>
+        <p:nvSpPr>
+          <p:cNvPr id="4" name="Slide Number Placeholder 3"/>
+          <p:cNvSpPr>
+            <a:spLocks noGrp="1"/>
+          </p:cNvSpPr>
+          <p:nvPr>
+            <p:ph type="sldNum" sz="quarter" idx="10"/>
+          </p:nvPr>
+        </p:nvSpPr>
+        <p:spPr/>
+        <p:txBody>
+          <a:bodyPr/>
+          <a:lstStyle/>
+          <a:p>
+            <a:fld id="{F7021451-1387-4CA6-816F-3879F97B5CBC}" type="slidenum">
+              <a:rPr lang="en-US"/>
+              <a:t>56</a:t>
+            </a:fld>
+            <a:endParaRPr lang="en-US"/>
+          </a:p>
+        </p:txBody>
+      </p:sp>
+    </p:spTree>
+    <p:extLst>
+      <p:ext uri="{BB962C8B-B14F-4D97-AF65-F5344CB8AC3E}">
+        <p14:creationId xmlns:p14="http://schemas.microsoft.com/office/powerpoint/2010/main" val="1024086991"/>
+      </p:ext>
+    </p:extLst>
+  </p:cSld>
+  <p:clrMapOvr>
+    <a:masterClrMapping/>
+  </p:clrMapOvr>
+</p:notes>
+</file>
+
 <file path=ppt/notesSlides/notesSlide6.xml><?xml version="1.0" encoding="utf-8"?>
 <p:notes xmlns:a="http://schemas.openxmlformats.org/drawingml/2006/main" xmlns:r="http://schemas.openxmlformats.org/officeDocument/2006/relationships" xmlns:p="http://schemas.openxmlformats.org/presentationml/2006/main">
   <p:cSld>
@@ -4774,7 +5397,7 @@
           <a:p>
             <a:r>
               <a:rPr lang="en-US" dirty="0"/>
-              <a:t>Listen carefully to this situation from real life. Mount Cameroon, near Buea, is a very high mountain and an active volcano. In 1999 and 2000, lava flowed down its sides. The soils around it are dark and very fertile. Think about it, because I am going to ask you some questions.</a:t>
+              <a:t>Listen carefully to this situation from real life. Mount Cameroon, near Buea, is a high mountain and an active volcano: in 1999 and 2000, lava flowed down its sides. Yet the dark soils around it are very fertile, and many people live there. Pupils from Buea ask: "What exactly is a volcano, and how is it built?" Think about it, because I am going to ask you some questions.</a:t>
             </a:r>
             <a:endParaRPr lang="en-US" dirty="0"/>
           </a:p>
@@ -6457,7 +7080,7 @@
                 <a:ea typeface="Times New Roman" pitchFamily="34" charset="-122"/>
                 <a:cs typeface="Times New Roman" pitchFamily="34" charset="-120"/>
               </a:rPr>
-              <a:t>People live near an active volcano.</a:t>
+              <a:t>The pupils do not know what a volcano is or how it is built.</a:t>
             </a:r>
             <a:endParaRPr lang="en-US" sz="4000" dirty="0"/>
           </a:p>
@@ -7114,7 +7737,7 @@
                 <a:ea typeface="Times New Roman" pitchFamily="34" charset="-122"/>
                 <a:cs typeface="Times New Roman" pitchFamily="34" charset="-120"/>
               </a:rPr>
-              <a:t>Why do people still live there?</a:t>
+              <a:t>Is Mount Cameroon active, dormant or extinct?</a:t>
             </a:r>
             <a:endParaRPr lang="en-US" sz="4000" dirty="0"/>
           </a:p>
@@ -7333,7 +7956,7 @@
                 <a:ea typeface="Times New Roman" pitchFamily="34" charset="-122"/>
                 <a:cs typeface="Times New Roman" pitchFamily="34" charset="-120"/>
               </a:rPr>
-              <a:t>The volcanic soils are very fertile.</a:t>
+              <a:t>Active: it has erupted recently.</a:t>
             </a:r>
             <a:endParaRPr lang="en-US" sz="4000" dirty="0"/>
           </a:p>
@@ -7883,7 +8506,7 @@
                 <a:ea typeface="Calibri" pitchFamily="34" charset="-122"/>
                 <a:cs typeface="Calibri" pitchFamily="34" charset="-120"/>
               </a:rPr>
-              <a:t>1. DEFINITION AND ORIGIN</a:t>
+              <a:t>1. ORIGIN OF VOLCANOES</a:t>
             </a:r>
             <a:endParaRPr lang="en-US" sz="1400" dirty="0"/>
           </a:p>
@@ -8097,7 +8720,7 @@
                 <a:ea typeface="Calibri" pitchFamily="34" charset="-122"/>
                 <a:cs typeface="Calibri" pitchFamily="34" charset="-120"/>
               </a:rPr>
-              <a:t>1. DEFINITION AND ORIGIN</a:t>
+              <a:t>1. ORIGIN OF VOLCANOES</a:t>
             </a:r>
             <a:endParaRPr lang="en-US" sz="1400" dirty="0"/>
           </a:p>
@@ -8204,7 +8827,7 @@
                 <a:ea typeface="Times New Roman" pitchFamily="34" charset="-122"/>
                 <a:cs typeface="Times New Roman" pitchFamily="34" charset="-120"/>
               </a:rPr>
-              <a:t>What is a volcano, and where does its magma come from?</a:t>
+              <a:t>What comes out of a volcano during an eruption?</a:t>
             </a:r>
             <a:endParaRPr lang="en-US" sz="4000" dirty="0"/>
           </a:p>
@@ -8911,7 +9534,7 @@
                 <a:ea typeface="Calibri" pitchFamily="34" charset="-122"/>
                 <a:cs typeface="Calibri" pitchFamily="34" charset="-120"/>
               </a:rPr>
-              <a:t>1. DEFINITION AND ORIGIN</a:t>
+              <a:t>1. ORIGIN OF VOLCANOES</a:t>
             </a:r>
             <a:endParaRPr lang="en-US" sz="1400" dirty="0"/>
           </a:p>
@@ -9018,7 +9641,7 @@
                 <a:ea typeface="Times New Roman" pitchFamily="34" charset="-122"/>
                 <a:cs typeface="Times New Roman" pitchFamily="34" charset="-120"/>
               </a:rPr>
-              <a:t>It is an opening in the crust where magma, gases and ash come out; magma rises from the hot mantle at plate margins and hot spots.</a:t>
+              <a:t>Lava, gases and ash.</a:t>
             </a:r>
             <a:endParaRPr lang="en-US" sz="4000" dirty="0"/>
           </a:p>
@@ -9451,7 +10074,7 @@
                 <a:ea typeface="Times New Roman" pitchFamily="34" charset="-122"/>
                 <a:cs typeface="Times New Roman" pitchFamily="34" charset="-120"/>
               </a:rPr>
-              <a:t>Name three types of volcanoes by shape and three by activity.</a:t>
+              <a:t>Which type of volcano has gentle slopes made of runny lava?</a:t>
             </a:r>
             <a:endParaRPr lang="en-US" sz="4000" dirty="0"/>
           </a:p>
@@ -9670,7 +10293,7 @@
                 <a:ea typeface="Times New Roman" pitchFamily="34" charset="-122"/>
                 <a:cs typeface="Times New Roman" pitchFamily="34" charset="-120"/>
               </a:rPr>
-              <a:t>By shape: shield, composite and ash cone. By activity: active, dormant and extinct.</a:t>
+              <a:t>The shield volcano.</a:t>
             </a:r>
             <a:endParaRPr lang="en-US" sz="4000" dirty="0"/>
           </a:p>
@@ -9782,7 +10405,7 @@
                 <a:ea typeface="Calibri" pitchFamily="34" charset="-122"/>
                 <a:cs typeface="Calibri" pitchFamily="34" charset="-120"/>
               </a:rPr>
-              <a:t>3. PROCESSES AND STRUCTURE</a:t>
+              <a:t>4. GENERAL STRUCTURE</a:t>
             </a:r>
             <a:endParaRPr lang="en-US" sz="1400" dirty="0"/>
           </a:p>
@@ -9996,7 +10619,7 @@
                 <a:ea typeface="Calibri" pitchFamily="34" charset="-122"/>
                 <a:cs typeface="Calibri" pitchFamily="34" charset="-120"/>
               </a:rPr>
-              <a:t>3. PROCESSES AND STRUCTURE</a:t>
+              <a:t>4. GENERAL STRUCTURE</a:t>
             </a:r>
             <a:endParaRPr lang="en-US" sz="1400" dirty="0"/>
           </a:p>
@@ -10061,7 +10684,7 @@
                 <a:ea typeface="Times New Roman" pitchFamily="34" charset="-122"/>
                 <a:cs typeface="Times New Roman" pitchFamily="34" charset="-120"/>
               </a:rPr>
-              <a:t>Activity 3: Question</a:t>
+              <a:t>Activity 3: Question 1</a:t>
             </a:r>
             <a:endParaRPr lang="en-US" sz="3600" dirty="0"/>
           </a:p>
@@ -10103,7 +10726,7 @@
                 <a:ea typeface="Times New Roman" pitchFamily="34" charset="-122"/>
                 <a:cs typeface="Times New Roman" pitchFamily="34" charset="-120"/>
               </a:rPr>
-              <a:t>Name the parts of a volcano from the bottom to the top.</a:t>
+              <a:t>Where is magma stored under a volcano?</a:t>
             </a:r>
             <a:endParaRPr lang="en-US" sz="4000" dirty="0"/>
           </a:p>
@@ -10215,7 +10838,7 @@
                 <a:ea typeface="Calibri" pitchFamily="34" charset="-122"/>
                 <a:cs typeface="Calibri" pitchFamily="34" charset="-120"/>
               </a:rPr>
-              <a:t>3. PROCESSES AND STRUCTURE</a:t>
+              <a:t>4. GENERAL STRUCTURE</a:t>
             </a:r>
             <a:endParaRPr lang="en-US" sz="1400" dirty="0"/>
           </a:p>
@@ -10280,7 +10903,7 @@
                 <a:ea typeface="Times New Roman" pitchFamily="34" charset="-122"/>
                 <a:cs typeface="Times New Roman" pitchFamily="34" charset="-120"/>
               </a:rPr>
-              <a:t>Activity 3: Answer</a:t>
+              <a:t>Activity 3: Answer 1</a:t>
             </a:r>
             <a:endParaRPr lang="en-US" sz="3600" dirty="0"/>
           </a:p>
@@ -10322,7 +10945,7 @@
                 <a:ea typeface="Times New Roman" pitchFamily="34" charset="-122"/>
                 <a:cs typeface="Times New Roman" pitchFamily="34" charset="-120"/>
               </a:rPr>
-              <a:t>Magma chamber, vent (pipe), cone and crater.</a:t>
+              <a:t>In the magma chamber.</a:t>
             </a:r>
             <a:endParaRPr lang="en-US" sz="4000" dirty="0"/>
           </a:p>
@@ -10434,7 +11057,7 @@
                 <a:ea typeface="Calibri" pitchFamily="34" charset="-122"/>
                 <a:cs typeface="Calibri" pitchFamily="34" charset="-120"/>
               </a:rPr>
-              <a:t>BOARD SUMMARY</a:t>
+              <a:t>4. GENERAL STRUCTURE</a:t>
             </a:r>
             <a:endParaRPr lang="en-US" sz="1400" dirty="0"/>
           </a:p>
@@ -10499,7 +11122,7 @@
                 <a:ea typeface="Times New Roman" pitchFamily="34" charset="-122"/>
                 <a:cs typeface="Times New Roman" pitchFamily="34" charset="-120"/>
               </a:rPr>
-              <a:t>Board Summary</a:t>
+              <a:t>Activity 3: Question 2</a:t>
             </a:r>
             <a:endParaRPr lang="en-US" sz="3600" dirty="0"/>
           </a:p>
@@ -10533,7 +11156,7 @@
               <a:buNone/>
             </a:pPr>
             <a:r>
-              <a:rPr lang="en-US" sz="4000" b="1" dirty="0">
+              <a:rPr lang="en-US" sz="4000" dirty="0">
                 <a:solidFill>
                   <a:srgbClr val="111111"/>
                 </a:solidFill>
@@ -10541,47 +11164,7 @@
                 <a:ea typeface="Times New Roman" pitchFamily="34" charset="-122"/>
                 <a:cs typeface="Times New Roman" pitchFamily="34" charset="-120"/>
               </a:rPr>
-              <a:t>Topic: The Structure of the Earth: Building Processes and Impacts on Man</a:t>
-            </a:r>
-            <a:endParaRPr lang="en-US" sz="4000" dirty="0"/>
-          </a:p>
-          <a:p>
-            <a:pPr algn="l" indent="0" marL="0">
-              <a:spcAft>
-                <a:spcPts val="800"/>
-              </a:spcAft>
-              <a:buNone/>
-            </a:pPr>
-            <a:r>
-              <a:rPr lang="en-US" sz="4000" b="1" dirty="0">
-                <a:solidFill>
-                  <a:srgbClr val="111111"/>
-                </a:solidFill>
-                <a:latin typeface="Times New Roman" pitchFamily="34" charset="0"/>
-                <a:ea typeface="Times New Roman" pitchFamily="34" charset="-122"/>
-                <a:cs typeface="Times New Roman" pitchFamily="34" charset="-120"/>
-              </a:rPr>
-              <a:t>Sub-topic: Volcanoes</a:t>
-            </a:r>
-            <a:endParaRPr lang="en-US" sz="4000" dirty="0"/>
-          </a:p>
-          <a:p>
-            <a:pPr algn="l" indent="0" marL="0">
-              <a:spcAft>
-                <a:spcPts val="800"/>
-              </a:spcAft>
-              <a:buNone/>
-            </a:pPr>
-            <a:r>
-              <a:rPr lang="en-US" sz="4000" b="1" dirty="0">
-                <a:solidFill>
-                  <a:srgbClr val="990011"/>
-                </a:solidFill>
-                <a:latin typeface="Times New Roman" pitchFamily="34" charset="0"/>
-                <a:ea typeface="Times New Roman" pitchFamily="34" charset="-122"/>
-                <a:cs typeface="Times New Roman" pitchFamily="34" charset="-120"/>
-              </a:rPr>
-              <a:t>Lesson 11: Volcanoes</a:t>
+              <a:t>Through which part does it rise?</a:t>
             </a:r>
             <a:endParaRPr lang="en-US" sz="4000" dirty="0"/>
           </a:p>
@@ -10693,7 +11276,7 @@
                 <a:ea typeface="Calibri" pitchFamily="34" charset="-122"/>
                 <a:cs typeface="Calibri" pitchFamily="34" charset="-120"/>
               </a:rPr>
-              <a:t>BOARD SUMMARY</a:t>
+              <a:t>4. GENERAL STRUCTURE</a:t>
             </a:r>
             <a:endParaRPr lang="en-US" sz="1400" dirty="0"/>
           </a:p>
@@ -10716,7 +11299,7 @@
         <p:spPr>
           <a:xfrm>
             <a:off x="0" y="658368"/>
-            <a:ext cx="1463040" cy="5833872"/>
+            <a:ext cx="5120640" cy="5833872"/>
           </a:xfrm>
           <a:prstGeom prst="rect">
             <a:avLst/>
@@ -10731,8 +11314,8 @@
         </p:nvSpPr>
         <p:spPr>
           <a:xfrm>
-            <a:off x="1691640" y="1005840"/>
-            <a:ext cx="10180015" cy="731520"/>
+            <a:off x="5349240" y="1005840"/>
+            <a:ext cx="6522415" cy="731520"/>
           </a:xfrm>
           <a:prstGeom prst="rect">
             <a:avLst/>
@@ -10758,7 +11341,7 @@
                 <a:ea typeface="Times New Roman" pitchFamily="34" charset="-122"/>
                 <a:cs typeface="Times New Roman" pitchFamily="34" charset="-120"/>
               </a:rPr>
-              <a:t>1. Definition and Origin</a:t>
+              <a:t>Activity 3: Answer 2</a:t>
             </a:r>
             <a:endParaRPr lang="en-US" sz="3600" dirty="0"/>
           </a:p>
@@ -10772,8 +11355,8 @@
         </p:nvSpPr>
         <p:spPr>
           <a:xfrm>
-            <a:off x="1691640" y="1783080"/>
-            <a:ext cx="10180015" cy="4663440"/>
+            <a:off x="5349240" y="1783080"/>
+            <a:ext cx="6522415" cy="4663440"/>
           </a:xfrm>
           <a:prstGeom prst="rect">
             <a:avLst/>
@@ -10792,7 +11375,7 @@
               <a:buNone/>
             </a:pPr>
             <a:r>
-              <a:rPr lang="en-US" sz="4000" i="1" dirty="0">
+              <a:rPr lang="en-US" sz="4000" dirty="0">
                 <a:solidFill>
                   <a:srgbClr val="111111"/>
                 </a:solidFill>
@@ -10800,81 +11383,7 @@
                 <a:ea typeface="Times New Roman" pitchFamily="34" charset="-122"/>
                 <a:cs typeface="Times New Roman" pitchFamily="34" charset="-120"/>
               </a:rPr>
-              <a:t>Volcanoes are defined and explained as follows:</a:t>
-            </a:r>
-            <a:endParaRPr lang="en-US" sz="4000" dirty="0"/>
-          </a:p>
-          <a:p>
-            <a:pPr algn="l" indent="0" marL="0">
-              <a:spcAft>
-                <a:spcPts val="800"/>
-              </a:spcAft>
-              <a:buNone/>
-            </a:pPr>
-            <a:r>
-              <a:rPr lang="en-US" sz="4000" b="1" dirty="0">
-                <a:solidFill>
-                  <a:srgbClr val="111111"/>
-                </a:solidFill>
-                <a:latin typeface="Times New Roman" pitchFamily="34" charset="0"/>
-                <a:ea typeface="Times New Roman" pitchFamily="34" charset="-122"/>
-                <a:cs typeface="Times New Roman" pitchFamily="34" charset="-120"/>
-              </a:rPr>
-              <a:t>Volcano: </a:t>
-            </a:r>
-            <a:pPr algn="l" indent="0" marL="0">
-              <a:spcAft>
-                <a:spcPts val="800"/>
-              </a:spcAft>
-              <a:buNone/>
-            </a:pPr>
-            <a:r>
-              <a:rPr lang="en-US" sz="4000" dirty="0">
-                <a:solidFill>
-                  <a:srgbClr val="111111"/>
-                </a:solidFill>
-                <a:latin typeface="Times New Roman" pitchFamily="34" charset="0"/>
-                <a:ea typeface="Times New Roman" pitchFamily="34" charset="-122"/>
-                <a:cs typeface="Times New Roman" pitchFamily="34" charset="-120"/>
-              </a:rPr>
-              <a:t>It is an opening in the crust through which magma, gases and ash come out.</a:t>
-            </a:r>
-            <a:endParaRPr lang="en-US" sz="4000" dirty="0"/>
-          </a:p>
-          <a:p>
-            <a:pPr algn="l" indent="0" marL="0">
-              <a:spcAft>
-                <a:spcPts val="800"/>
-              </a:spcAft>
-              <a:buNone/>
-            </a:pPr>
-            <a:r>
-              <a:rPr lang="en-US" sz="4000" b="1" dirty="0">
-                <a:solidFill>
-                  <a:srgbClr val="111111"/>
-                </a:solidFill>
-                <a:latin typeface="Times New Roman" pitchFamily="34" charset="0"/>
-                <a:ea typeface="Times New Roman" pitchFamily="34" charset="-122"/>
-                <a:cs typeface="Times New Roman" pitchFamily="34" charset="-120"/>
-              </a:rPr>
-              <a:t>Volcanicity: </a:t>
-            </a:r>
-            <a:pPr algn="l" indent="0" marL="0">
-              <a:spcAft>
-                <a:spcPts val="800"/>
-              </a:spcAft>
-              <a:buNone/>
-            </a:pPr>
-            <a:r>
-              <a:rPr lang="en-US" sz="4000" dirty="0">
-                <a:solidFill>
-                  <a:srgbClr val="111111"/>
-                </a:solidFill>
-                <a:latin typeface="Times New Roman" pitchFamily="34" charset="0"/>
-                <a:ea typeface="Times New Roman" pitchFamily="34" charset="-122"/>
-                <a:cs typeface="Times New Roman" pitchFamily="34" charset="-120"/>
-              </a:rPr>
-              <a:t>It is all the processes by which magma rises into the crust or onto the surface.</a:t>
+              <a:t>Through the vent (pipe).</a:t>
             </a:r>
             <a:endParaRPr lang="en-US" sz="4000" dirty="0"/>
           </a:p>
@@ -11051,7 +11560,7 @@
                 <a:ea typeface="Times New Roman" pitchFamily="34" charset="-122"/>
                 <a:cs typeface="Times New Roman" pitchFamily="34" charset="-120"/>
               </a:rPr>
-              <a:t>1. Definition and Origin (continued)</a:t>
+              <a:t>Board Summary</a:t>
             </a:r>
             <a:endParaRPr lang="en-US" sz="3600" dirty="0"/>
           </a:p>
@@ -11093,8 +11602,11 @@
                 <a:ea typeface="Times New Roman" pitchFamily="34" charset="-122"/>
                 <a:cs typeface="Times New Roman" pitchFamily="34" charset="-120"/>
               </a:rPr>
-              <a:t>Origin: </a:t>
-            </a:r>
+              <a:t>Topic: The Structure of the Earth: Building Processes and Impacts on Man</a:t>
+            </a:r>
+            <a:endParaRPr lang="en-US" sz="4000" dirty="0"/>
+          </a:p>
+          <a:p>
             <a:pPr algn="l" indent="0" marL="0">
               <a:spcAft>
                 <a:spcPts val="800"/>
@@ -11102,7 +11614,7 @@
               <a:buNone/>
             </a:pPr>
             <a:r>
-              <a:rPr lang="en-US" sz="4000" dirty="0">
+              <a:rPr lang="en-US" sz="4000" b="1" dirty="0">
                 <a:solidFill>
                   <a:srgbClr val="111111"/>
                 </a:solidFill>
@@ -11110,7 +11622,7 @@
                 <a:ea typeface="Times New Roman" pitchFamily="34" charset="-122"/>
                 <a:cs typeface="Times New Roman" pitchFamily="34" charset="-120"/>
               </a:rPr>
-              <a:t>Volcanoes form at plate margins and hot spots where magma rises from the mantle.</a:t>
+              <a:t>Sub-topic: Volcanoes</a:t>
             </a:r>
             <a:endParaRPr lang="en-US" sz="4000" dirty="0"/>
           </a:p>
@@ -11124,30 +11636,13 @@
             <a:r>
               <a:rPr lang="en-US" sz="4000" b="1" dirty="0">
                 <a:solidFill>
-                  <a:srgbClr val="111111"/>
+                  <a:srgbClr val="990011"/>
                 </a:solidFill>
                 <a:latin typeface="Times New Roman" pitchFamily="34" charset="0"/>
                 <a:ea typeface="Times New Roman" pitchFamily="34" charset="-122"/>
                 <a:cs typeface="Times New Roman" pitchFamily="34" charset="-120"/>
               </a:rPr>
-              <a:t>Cameroon: </a:t>
-            </a:r>
-            <a:pPr algn="l" indent="0" marL="0">
-              <a:spcAft>
-                <a:spcPts val="800"/>
-              </a:spcAft>
-              <a:buNone/>
-            </a:pPr>
-            <a:r>
-              <a:rPr lang="en-US" sz="4000" dirty="0">
-                <a:solidFill>
-                  <a:srgbClr val="111111"/>
-                </a:solidFill>
-                <a:latin typeface="Times New Roman" pitchFamily="34" charset="0"/>
-                <a:ea typeface="Times New Roman" pitchFamily="34" charset="-122"/>
-                <a:cs typeface="Times New Roman" pitchFamily="34" charset="-120"/>
-              </a:rPr>
-              <a:t>Mount Cameroon, Manengouba and Oku lie on the Cameroon Volcanic Line.</a:t>
+              <a:t>Lesson 11: Volcanoes</a:t>
             </a:r>
             <a:endParaRPr lang="en-US" sz="4000" dirty="0"/>
           </a:p>
@@ -12291,7 +12786,7 @@
         <p:spPr>
           <a:xfrm>
             <a:off x="0" y="658368"/>
-            <a:ext cx="2468880" cy="5833872"/>
+            <a:ext cx="5120640" cy="5833872"/>
           </a:xfrm>
           <a:prstGeom prst="rect">
             <a:avLst/>
@@ -12306,8 +12801,8 @@
         </p:nvSpPr>
         <p:spPr>
           <a:xfrm>
-            <a:off x="2697480" y="1005840"/>
-            <a:ext cx="9174175" cy="731520"/>
+            <a:off x="5349240" y="1005840"/>
+            <a:ext cx="6522415" cy="731520"/>
           </a:xfrm>
           <a:prstGeom prst="rect">
             <a:avLst/>
@@ -12333,7 +12828,7 @@
                 <a:ea typeface="Times New Roman" pitchFamily="34" charset="-122"/>
                 <a:cs typeface="Times New Roman" pitchFamily="34" charset="-120"/>
               </a:rPr>
-              <a:t>2. Types of Volcanoes</a:t>
+              <a:t>DEFINITIONS</a:t>
             </a:r>
             <a:endParaRPr lang="en-US" sz="3600" dirty="0"/>
           </a:p>
@@ -12347,8 +12842,8 @@
         </p:nvSpPr>
         <p:spPr>
           <a:xfrm>
-            <a:off x="2697480" y="1783080"/>
-            <a:ext cx="9174175" cy="4663440"/>
+            <a:off x="5349240" y="1783080"/>
+            <a:ext cx="6522415" cy="4663440"/>
           </a:xfrm>
           <a:prstGeom prst="rect">
             <a:avLst/>
@@ -12375,7 +12870,7 @@
                 <a:ea typeface="Times New Roman" pitchFamily="34" charset="-122"/>
                 <a:cs typeface="Times New Roman" pitchFamily="34" charset="-120"/>
               </a:rPr>
-              <a:t>Volcanoes are classified as follows:</a:t>
+              <a:t>The key terms of this lesson are defined as follows:</a:t>
             </a:r>
             <a:endParaRPr lang="en-US" sz="4000" dirty="0"/>
           </a:p>
@@ -12395,7 +12890,7 @@
                 <a:ea typeface="Times New Roman" pitchFamily="34" charset="-122"/>
                 <a:cs typeface="Times New Roman" pitchFamily="34" charset="-120"/>
               </a:rPr>
-              <a:t>Active volcano: </a:t>
+              <a:t>Volcano: </a:t>
             </a:r>
             <a:pPr algn="l" indent="0" marL="0">
               <a:spcAft>
@@ -12412,44 +12907,7 @@
                 <a:ea typeface="Times New Roman" pitchFamily="34" charset="-122"/>
                 <a:cs typeface="Times New Roman" pitchFamily="34" charset="-120"/>
               </a:rPr>
-              <a:t>It erupts now or has erupted recently, like Mount Cameroon.</a:t>
-            </a:r>
-            <a:endParaRPr lang="en-US" sz="4000" dirty="0"/>
-          </a:p>
-          <a:p>
-            <a:pPr algn="l" indent="0" marL="0">
-              <a:spcAft>
-                <a:spcPts val="800"/>
-              </a:spcAft>
-              <a:buNone/>
-            </a:pPr>
-            <a:r>
-              <a:rPr lang="en-US" sz="4000" b="1" dirty="0">
-                <a:solidFill>
-                  <a:srgbClr val="111111"/>
-                </a:solidFill>
-                <a:latin typeface="Times New Roman" pitchFamily="34" charset="0"/>
-                <a:ea typeface="Times New Roman" pitchFamily="34" charset="-122"/>
-                <a:cs typeface="Times New Roman" pitchFamily="34" charset="-120"/>
-              </a:rPr>
-              <a:t>Dormant volcano: </a:t>
-            </a:r>
-            <a:pPr algn="l" indent="0" marL="0">
-              <a:spcAft>
-                <a:spcPts val="800"/>
-              </a:spcAft>
-              <a:buNone/>
-            </a:pPr>
-            <a:r>
-              <a:rPr lang="en-US" sz="4000" dirty="0">
-                <a:solidFill>
-                  <a:srgbClr val="111111"/>
-                </a:solidFill>
-                <a:latin typeface="Times New Roman" pitchFamily="34" charset="0"/>
-                <a:ea typeface="Times New Roman" pitchFamily="34" charset="-122"/>
-                <a:cs typeface="Times New Roman" pitchFamily="34" charset="-120"/>
-              </a:rPr>
-              <a:t>It has not erupted for a long time but can erupt again.</a:t>
+              <a:t>It is an opening in the crust through which magma, gases and ash come out onto the surface.</a:t>
             </a:r>
             <a:endParaRPr lang="en-US" sz="4000" dirty="0"/>
           </a:p>
@@ -12584,7 +13042,7 @@
         <p:spPr>
           <a:xfrm>
             <a:off x="0" y="658368"/>
-            <a:ext cx="5120640" cy="5833872"/>
+            <a:ext cx="2468880" cy="5833872"/>
           </a:xfrm>
           <a:prstGeom prst="rect">
             <a:avLst/>
@@ -12599,8 +13057,8 @@
         </p:nvSpPr>
         <p:spPr>
           <a:xfrm>
-            <a:off x="5349240" y="1005840"/>
-            <a:ext cx="6522415" cy="731520"/>
+            <a:off x="2697480" y="1005840"/>
+            <a:ext cx="9174175" cy="731520"/>
           </a:xfrm>
           <a:prstGeom prst="rect">
             <a:avLst/>
@@ -12626,7 +13084,7 @@
                 <a:ea typeface="Times New Roman" pitchFamily="34" charset="-122"/>
                 <a:cs typeface="Times New Roman" pitchFamily="34" charset="-120"/>
               </a:rPr>
-              <a:t>2. Types of Volcanoes (continued)</a:t>
+              <a:t>DEFINITIONS (continued)</a:t>
             </a:r>
             <a:endParaRPr lang="en-US" sz="3600" dirty="0"/>
           </a:p>
@@ -12640,8 +13098,8 @@
         </p:nvSpPr>
         <p:spPr>
           <a:xfrm>
-            <a:off x="5349240" y="1783080"/>
-            <a:ext cx="6522415" cy="4663440"/>
+            <a:off x="2697480" y="1783080"/>
+            <a:ext cx="9174175" cy="4663440"/>
           </a:xfrm>
           <a:prstGeom prst="rect">
             <a:avLst/>
@@ -12668,7 +13126,7 @@
                 <a:ea typeface="Times New Roman" pitchFamily="34" charset="-122"/>
                 <a:cs typeface="Times New Roman" pitchFamily="34" charset="-120"/>
               </a:rPr>
-              <a:t>Extinct volcano: </a:t>
+              <a:t>Volcanicity: </a:t>
             </a:r>
             <a:pPr algn="l" indent="0" marL="0">
               <a:spcAft>
@@ -12685,7 +13143,7 @@
                 <a:ea typeface="Times New Roman" pitchFamily="34" charset="-122"/>
                 <a:cs typeface="Times New Roman" pitchFamily="34" charset="-120"/>
               </a:rPr>
-              <a:t>It will not erupt again, like Mount Manengouba.</a:t>
+              <a:t>It is all the processes by which magma rises into the crust or onto the surface.</a:t>
             </a:r>
             <a:endParaRPr lang="en-US" sz="4000" dirty="0"/>
           </a:p>
@@ -12705,7 +13163,7 @@
                 <a:ea typeface="Times New Roman" pitchFamily="34" charset="-122"/>
                 <a:cs typeface="Times New Roman" pitchFamily="34" charset="-120"/>
               </a:rPr>
-              <a:t>By shape: </a:t>
+              <a:t>Magma: </a:t>
             </a:r>
             <a:pPr algn="l" indent="0" marL="0">
               <a:spcAft>
@@ -12722,7 +13180,44 @@
                 <a:ea typeface="Times New Roman" pitchFamily="34" charset="-122"/>
                 <a:cs typeface="Times New Roman" pitchFamily="34" charset="-120"/>
               </a:rPr>
-              <a:t>Volcanoes are shield volcanoes, composite cones or ash and cinder cones.</a:t>
+              <a:t>It is molten rock under the ground.</a:t>
+            </a:r>
+            <a:endParaRPr lang="en-US" sz="4000" dirty="0"/>
+          </a:p>
+          <a:p>
+            <a:pPr algn="l" indent="0" marL="0">
+              <a:spcAft>
+                <a:spcPts val="800"/>
+              </a:spcAft>
+              <a:buNone/>
+            </a:pPr>
+            <a:r>
+              <a:rPr lang="en-US" sz="4000" b="1" dirty="0">
+                <a:solidFill>
+                  <a:srgbClr val="111111"/>
+                </a:solidFill>
+                <a:latin typeface="Times New Roman" pitchFamily="34" charset="0"/>
+                <a:ea typeface="Times New Roman" pitchFamily="34" charset="-122"/>
+                <a:cs typeface="Times New Roman" pitchFamily="34" charset="-120"/>
+              </a:rPr>
+              <a:t>Lava: </a:t>
+            </a:r>
+            <a:pPr algn="l" indent="0" marL="0">
+              <a:spcAft>
+                <a:spcPts val="800"/>
+              </a:spcAft>
+              <a:buNone/>
+            </a:pPr>
+            <a:r>
+              <a:rPr lang="en-US" sz="4000" dirty="0">
+                <a:solidFill>
+                  <a:srgbClr val="111111"/>
+                </a:solidFill>
+                <a:latin typeface="Times New Roman" pitchFamily="34" charset="0"/>
+                <a:ea typeface="Times New Roman" pitchFamily="34" charset="-122"/>
+                <a:cs typeface="Times New Roman" pitchFamily="34" charset="-120"/>
+              </a:rPr>
+              <a:t>It is magma that comes out onto the surface.</a:t>
             </a:r>
             <a:endParaRPr lang="en-US" sz="4000" dirty="0"/>
           </a:p>
@@ -12840,48 +13335,9 @@
           </a:p>
         </p:txBody>
       </p:sp>
-      <p:sp>
-        <p:nvSpPr>
-          <p:cNvPr id="3" name="Text 1"/>
-          <p:cNvSpPr/>
-          <p:nvPr/>
-        </p:nvSpPr>
-        <p:spPr>
-          <a:xfrm>
-            <a:off x="457200" y="1005840"/>
-            <a:ext cx="11277295" cy="731520"/>
-          </a:xfrm>
-          <a:prstGeom prst="rect">
-            <a:avLst/>
-          </a:prstGeom>
-          <a:noFill/>
-          <a:ln/>
-        </p:spPr>
-        <p:txBody>
-          <a:bodyPr wrap="square" lIns="0" tIns="0" rIns="0" bIns="0" rtlCol="0" anchor="ctr"/>
-          <a:lstStyle/>
-          <a:p>
-            <a:pPr algn="ctr" indent="0" marL="0">
-              <a:buNone/>
-            </a:pPr>
-            <a:r>
-              <a:rPr lang="en-US" sz="3600" b="1" dirty="0">
-                <a:solidFill>
-                  <a:srgbClr val="990011"/>
-                </a:solidFill>
-                <a:latin typeface="Times New Roman" pitchFamily="34" charset="0"/>
-                <a:ea typeface="Times New Roman" pitchFamily="34" charset="-122"/>
-                <a:cs typeface="Times New Roman" pitchFamily="34" charset="-120"/>
-              </a:rPr>
-              <a:t>2. Types of Volcanoes</a:t>
-            </a:r>
-            <a:endParaRPr lang="en-US" sz="3600" dirty="0"/>
-          </a:p>
-        </p:txBody>
-      </p:sp>
       <p:pic>
         <p:nvPicPr>
-          <p:cNvPr id="4" name="Image 0" descr="/home/claude/f4/img/v2/volcano_types_big.png">    </p:cNvPr>
+          <p:cNvPr id="3" name="Image 0" descr="/home/claude/f4/img/minesec_sheet.png">    </p:cNvPr>
           <p:cNvPicPr>
             <a:picLocks noChangeAspect="1"/>
           </p:cNvPicPr>
@@ -12895,14 +13351,55 @@
         </p:blipFill>
         <p:spPr>
           <a:xfrm>
-            <a:off x="629930" y="1783080"/>
-            <a:ext cx="10931835" cy="4270248"/>
+            <a:off x="0" y="658368"/>
+            <a:ext cx="1463040" cy="5833872"/>
           </a:xfrm>
           <a:prstGeom prst="rect">
             <a:avLst/>
           </a:prstGeom>
         </p:spPr>
       </p:pic>
+      <p:sp>
+        <p:nvSpPr>
+          <p:cNvPr id="4" name="Text 1"/>
+          <p:cNvSpPr/>
+          <p:nvPr/>
+        </p:nvSpPr>
+        <p:spPr>
+          <a:xfrm>
+            <a:off x="1691640" y="1005840"/>
+            <a:ext cx="10180015" cy="731520"/>
+          </a:xfrm>
+          <a:prstGeom prst="rect">
+            <a:avLst/>
+          </a:prstGeom>
+          <a:noFill/>
+          <a:ln/>
+        </p:spPr>
+        <p:txBody>
+          <a:bodyPr wrap="square" lIns="0" tIns="0" rIns="0" bIns="0" rtlCol="0" anchor="ctr">
+            <a:normAutofit/>
+          </a:bodyPr>
+          <a:lstStyle/>
+          <a:p>
+            <a:pPr algn="ctr" indent="0" marL="0">
+              <a:buNone/>
+            </a:pPr>
+            <a:r>
+              <a:rPr lang="en-US" sz="3600" b="1" dirty="0">
+                <a:solidFill>
+                  <a:srgbClr val="990011"/>
+                </a:solidFill>
+                <a:latin typeface="Times New Roman" pitchFamily="34" charset="0"/>
+                <a:ea typeface="Times New Roman" pitchFamily="34" charset="-122"/>
+                <a:cs typeface="Times New Roman" pitchFamily="34" charset="-120"/>
+              </a:rPr>
+              <a:t>1. Origin of Volcanoes</a:t>
+            </a:r>
+            <a:endParaRPr lang="en-US" sz="3600" dirty="0"/>
+          </a:p>
+        </p:txBody>
+      </p:sp>
       <p:sp>
         <p:nvSpPr>
           <p:cNvPr id="5" name="Text 2"/>
@@ -12911,8 +13408,8 @@
         </p:nvSpPr>
         <p:spPr>
           <a:xfrm>
-            <a:off x="457200" y="6089904"/>
-            <a:ext cx="11277295" cy="347472"/>
+            <a:off x="1691640" y="1783080"/>
+            <a:ext cx="10180015" cy="4663440"/>
           </a:xfrm>
           <a:prstGeom prst="rect">
             <a:avLst/>
@@ -12921,24 +13418,101 @@
           <a:ln/>
         </p:spPr>
         <p:txBody>
-          <a:bodyPr wrap="square" lIns="0" tIns="0" rIns="0" bIns="0" rtlCol="0" anchor="ctr"/>
-          <a:lstStyle/>
-          <a:p>
-            <a:pPr algn="ctr" indent="0" marL="0">
+          <a:bodyPr wrap="square" lIns="0" tIns="0" rIns="0" bIns="0" rtlCol="0" anchor="t"/>
+          <a:lstStyle/>
+          <a:p>
+            <a:pPr algn="l" indent="0" marL="0">
+              <a:spcAft>
+                <a:spcPts val="800"/>
+              </a:spcAft>
               <a:buNone/>
             </a:pPr>
             <a:r>
-              <a:rPr lang="en-US" sz="1800" i="1" dirty="0">
-                <a:solidFill>
-                  <a:srgbClr val="555555"/>
+              <a:rPr lang="en-US" sz="4000" i="1" dirty="0">
+                <a:solidFill>
+                  <a:srgbClr val="111111"/>
                 </a:solidFill>
                 <a:latin typeface="Times New Roman" pitchFamily="34" charset="0"/>
                 <a:ea typeface="Times New Roman" pitchFamily="34" charset="-122"/>
                 <a:cs typeface="Times New Roman" pitchFamily="34" charset="-120"/>
               </a:rPr>
-              <a:t>Illustration: types of volcanoes by shape</a:t>
-            </a:r>
-            <a:endParaRPr lang="en-US" sz="1800" dirty="0"/>
+              <a:t>Volcanoes are found in the following places:</a:t>
+            </a:r>
+            <a:endParaRPr lang="en-US" sz="4000" dirty="0"/>
+          </a:p>
+          <a:p>
+            <a:pPr algn="l" indent="0" marL="0">
+              <a:spcAft>
+                <a:spcPts val="800"/>
+              </a:spcAft>
+              <a:buNone/>
+            </a:pPr>
+            <a:r>
+              <a:rPr lang="en-US" sz="4000" b="1" dirty="0">
+                <a:solidFill>
+                  <a:srgbClr val="111111"/>
+                </a:solidFill>
+                <a:latin typeface="Times New Roman" pitchFamily="34" charset="0"/>
+                <a:ea typeface="Times New Roman" pitchFamily="34" charset="-122"/>
+                <a:cs typeface="Times New Roman" pitchFamily="34" charset="-120"/>
+              </a:rPr>
+              <a:t>Constructive plate margins: </a:t>
+            </a:r>
+            <a:pPr algn="l" indent="0" marL="0">
+              <a:spcAft>
+                <a:spcPts val="800"/>
+              </a:spcAft>
+              <a:buNone/>
+            </a:pPr>
+            <a:r>
+              <a:rPr lang="en-US" sz="4000" dirty="0">
+                <a:solidFill>
+                  <a:srgbClr val="111111"/>
+                </a:solidFill>
+                <a:latin typeface="Times New Roman" pitchFamily="34" charset="0"/>
+                <a:ea typeface="Times New Roman" pitchFamily="34" charset="-122"/>
+                <a:cs typeface="Times New Roman" pitchFamily="34" charset="-120"/>
+              </a:rPr>
+              <a:t>Where plates move apart, magma rises through the gap, as in Iceland and the East African Rift.</a:t>
+            </a:r>
+            <a:endParaRPr lang="en-US" sz="4000" dirty="0"/>
+          </a:p>
+          <a:p>
+            <a:pPr algn="l" indent="0" marL="0">
+              <a:spcAft>
+                <a:spcPts val="800"/>
+              </a:spcAft>
+              <a:buNone/>
+            </a:pPr>
+            <a:r>
+              <a:rPr lang="en-US" sz="4000" b="1" dirty="0">
+                <a:solidFill>
+                  <a:srgbClr val="111111"/>
+                </a:solidFill>
+                <a:latin typeface="Times New Roman" pitchFamily="34" charset="0"/>
+                <a:ea typeface="Times New Roman" pitchFamily="34" charset="-122"/>
+                <a:cs typeface="Times New Roman" pitchFamily="34" charset="-120"/>
+              </a:rPr>
+              <a:t>Destructive plate margins: </a:t>
+            </a:r>
+            <a:pPr algn="l" indent="0" marL="0">
+              <a:spcAft>
+                <a:spcPts val="800"/>
+              </a:spcAft>
+              <a:buNone/>
+            </a:pPr>
+            <a:r>
+              <a:rPr lang="en-US" sz="4000" dirty="0">
+                <a:solidFill>
+                  <a:srgbClr val="111111"/>
+                </a:solidFill>
+                <a:latin typeface="Times New Roman" pitchFamily="34" charset="0"/>
+                <a:ea typeface="Times New Roman" pitchFamily="34" charset="-122"/>
+                <a:cs typeface="Times New Roman" pitchFamily="34" charset="-120"/>
+              </a:rPr>
+              <a:t>Where one plate sinks and melts, magma rises to the surface, as around the Pacific Ocean.</a:t>
+            </a:r>
+            <a:endParaRPr lang="en-US" sz="4000" dirty="0"/>
           </a:p>
         </p:txBody>
       </p:sp>
@@ -13071,7 +13645,7 @@
         <p:spPr>
           <a:xfrm>
             <a:off x="0" y="658368"/>
-            <a:ext cx="3840480" cy="5833872"/>
+            <a:ext cx="5120640" cy="5833872"/>
           </a:xfrm>
           <a:prstGeom prst="rect">
             <a:avLst/>
@@ -13086,8 +13660,8 @@
         </p:nvSpPr>
         <p:spPr>
           <a:xfrm>
-            <a:off x="4069080" y="1005840"/>
-            <a:ext cx="7802575" cy="731520"/>
+            <a:off x="5349240" y="1005840"/>
+            <a:ext cx="6522415" cy="731520"/>
           </a:xfrm>
           <a:prstGeom prst="rect">
             <a:avLst/>
@@ -13113,7 +13687,7 @@
                 <a:ea typeface="Times New Roman" pitchFamily="34" charset="-122"/>
                 <a:cs typeface="Times New Roman" pitchFamily="34" charset="-120"/>
               </a:rPr>
-              <a:t>3. Processes of Volcanicity</a:t>
+              <a:t>1. Origin of Volcanoes (continued)</a:t>
             </a:r>
             <a:endParaRPr lang="en-US" sz="3600" dirty="0"/>
           </a:p>
@@ -13127,8 +13701,8 @@
         </p:nvSpPr>
         <p:spPr>
           <a:xfrm>
-            <a:off x="4069080" y="1783080"/>
-            <a:ext cx="7802575" cy="4663440"/>
+            <a:off x="5349240" y="1783080"/>
+            <a:ext cx="6522415" cy="4663440"/>
           </a:xfrm>
           <a:prstGeom prst="rect">
             <a:avLst/>
@@ -13147,7 +13721,7 @@
               <a:buNone/>
             </a:pPr>
             <a:r>
-              <a:rPr lang="en-US" sz="4000" i="1" dirty="0">
+              <a:rPr lang="en-US" sz="4000" b="1" dirty="0">
                 <a:solidFill>
                   <a:srgbClr val="111111"/>
                 </a:solidFill>
@@ -13155,11 +13729,8 @@
                 <a:ea typeface="Times New Roman" pitchFamily="34" charset="-122"/>
                 <a:cs typeface="Times New Roman" pitchFamily="34" charset="-120"/>
               </a:rPr>
-              <a:t>Magma moves in two ways:</a:t>
-            </a:r>
-            <a:endParaRPr lang="en-US" sz="4000" dirty="0"/>
-          </a:p>
-          <a:p>
+              <a:t>Hot spots: </a:t>
+            </a:r>
             <a:pPr algn="l" indent="0" marL="0">
               <a:spcAft>
                 <a:spcPts val="800"/>
@@ -13167,7 +13738,7 @@
               <a:buNone/>
             </a:pPr>
             <a:r>
-              <a:rPr lang="en-US" sz="4000" b="1" dirty="0">
+              <a:rPr lang="en-US" sz="4000" dirty="0">
                 <a:solidFill>
                   <a:srgbClr val="111111"/>
                 </a:solidFill>
@@ -13175,61 +13746,7 @@
                 <a:ea typeface="Times New Roman" pitchFamily="34" charset="-122"/>
                 <a:cs typeface="Times New Roman" pitchFamily="34" charset="-120"/>
               </a:rPr>
-              <a:t>Intrusion: </a:t>
-            </a:r>
-            <a:pPr algn="l" indent="0" marL="0">
-              <a:spcAft>
-                <a:spcPts val="800"/>
-              </a:spcAft>
-              <a:buNone/>
-            </a:pPr>
-            <a:r>
-              <a:rPr lang="en-US" sz="4000" dirty="0">
-                <a:solidFill>
-                  <a:srgbClr val="111111"/>
-                </a:solidFill>
-                <a:latin typeface="Times New Roman" pitchFamily="34" charset="0"/>
-                <a:ea typeface="Times New Roman" pitchFamily="34" charset="-122"/>
-                <a:cs typeface="Times New Roman" pitchFamily="34" charset="-120"/>
-              </a:rPr>
-              <a:t>Magma cools inside the crust and forms dykes, sills, laccoliths and batholiths.</a:t>
-            </a:r>
-            <a:endParaRPr lang="en-US" sz="4000" dirty="0"/>
-          </a:p>
-          <a:p>
-            <a:pPr algn="l" indent="0" marL="0">
-              <a:spcAft>
-                <a:spcPts val="800"/>
-              </a:spcAft>
-              <a:buNone/>
-            </a:pPr>
-            <a:r>
-              <a:rPr lang="en-US" sz="4000" b="1" dirty="0">
-                <a:solidFill>
-                  <a:srgbClr val="111111"/>
-                </a:solidFill>
-                <a:latin typeface="Times New Roman" pitchFamily="34" charset="0"/>
-                <a:ea typeface="Times New Roman" pitchFamily="34" charset="-122"/>
-                <a:cs typeface="Times New Roman" pitchFamily="34" charset="-120"/>
-              </a:rPr>
-              <a:t>Extrusion: </a:t>
-            </a:r>
-            <a:pPr algn="l" indent="0" marL="0">
-              <a:spcAft>
-                <a:spcPts val="800"/>
-              </a:spcAft>
-              <a:buNone/>
-            </a:pPr>
-            <a:r>
-              <a:rPr lang="en-US" sz="4000" dirty="0">
-                <a:solidFill>
-                  <a:srgbClr val="111111"/>
-                </a:solidFill>
-                <a:latin typeface="Times New Roman" pitchFamily="34" charset="0"/>
-                <a:ea typeface="Times New Roman" pitchFamily="34" charset="-122"/>
-                <a:cs typeface="Times New Roman" pitchFamily="34" charset="-120"/>
-              </a:rPr>
-              <a:t>Magma comes out as lava, ash and gas and builds cones and lava plateaux.</a:t>
+              <a:t>In some places, hot magma rises from deep in the mantle in the middle of a plate, as in Hawaii.</a:t>
             </a:r>
             <a:endParaRPr lang="en-US" sz="4000" dirty="0"/>
           </a:p>
@@ -13355,8 +13872,8 @@
         </p:nvSpPr>
         <p:spPr>
           <a:xfrm>
-            <a:off x="457200" y="1005840"/>
-            <a:ext cx="11277295" cy="731520"/>
+            <a:off x="365760" y="1005840"/>
+            <a:ext cx="11460175" cy="731520"/>
           </a:xfrm>
           <a:prstGeom prst="rect">
             <a:avLst/>
@@ -13365,7 +13882,9 @@
           <a:ln/>
         </p:spPr>
         <p:txBody>
-          <a:bodyPr wrap="square" lIns="0" tIns="0" rIns="0" bIns="0" rtlCol="0" anchor="ctr"/>
+          <a:bodyPr wrap="square" lIns="0" tIns="0" rIns="0" bIns="0" rtlCol="0" anchor="ctr">
+            <a:normAutofit/>
+          </a:bodyPr>
           <a:lstStyle/>
           <a:p>
             <a:pPr algn="ctr" indent="0" marL="0">
@@ -13380,7 +13899,66 @@
                 <a:ea typeface="Times New Roman" pitchFamily="34" charset="-122"/>
                 <a:cs typeface="Times New Roman" pitchFamily="34" charset="-120"/>
               </a:rPr>
-              <a:t>3. Processes of Volcanicity</a:t>
+              <a:t>1. Origin of Volcanoes</a:t>
+            </a:r>
+            <a:endParaRPr lang="en-US" sz="3600" dirty="0"/>
+          </a:p>
+        </p:txBody>
+      </p:sp>
+      <p:sp>
+        <p:nvSpPr>
+          <p:cNvPr id="4" name="Text 2"/>
+          <p:cNvSpPr/>
+          <p:nvPr/>
+        </p:nvSpPr>
+        <p:spPr>
+          <a:xfrm>
+            <a:off x="365760" y="1783080"/>
+            <a:ext cx="4846320" cy="4617720"/>
+          </a:xfrm>
+          <a:prstGeom prst="rect">
+            <a:avLst/>
+          </a:prstGeom>
+          <a:noFill/>
+          <a:ln/>
+        </p:spPr>
+        <p:txBody>
+          <a:bodyPr wrap="square" lIns="0" tIns="0" rIns="0" bIns="0" rtlCol="0" anchor="t"/>
+          <a:lstStyle/>
+          <a:p>
+            <a:pPr algn="l" indent="0" marL="0">
+              <a:spcAft>
+                <a:spcPts val="800"/>
+              </a:spcAft>
+              <a:buNone/>
+            </a:pPr>
+            <a:r>
+              <a:rPr lang="en-US" sz="3600" b="1" dirty="0">
+                <a:solidFill>
+                  <a:srgbClr val="111111"/>
+                </a:solidFill>
+                <a:latin typeface="Times New Roman" pitchFamily="34" charset="0"/>
+                <a:ea typeface="Times New Roman" pitchFamily="34" charset="-122"/>
+                <a:cs typeface="Times New Roman" pitchFamily="34" charset="-120"/>
+              </a:rPr>
+              <a:t>Lines of weakness: </a:t>
+            </a:r>
+            <a:pPr algn="l" indent="0" marL="0">
+              <a:spcAft>
+                <a:spcPts val="800"/>
+              </a:spcAft>
+              <a:buNone/>
+            </a:pPr>
+            <a:r>
+              <a:rPr lang="en-US" sz="3600" dirty="0">
+                <a:solidFill>
+                  <a:srgbClr val="111111"/>
+                </a:solidFill>
+                <a:latin typeface="Times New Roman" pitchFamily="34" charset="0"/>
+                <a:ea typeface="Times New Roman" pitchFamily="34" charset="-122"/>
+                <a:cs typeface="Times New Roman" pitchFamily="34" charset="-120"/>
+              </a:rPr>
+              <a:t>Magma rises along cracks in the crust, as on the Cameroon Volcanic Line.</a:t>
             </a:r>
             <a:endParaRPr lang="en-US" sz="3600" dirty="0"/>
           </a:p>
@@ -13388,7 +13966,7 @@
       </p:sp>
       <p:pic>
         <p:nvPicPr>
-          <p:cNvPr id="4" name="Image 0" descr="/home/claude/f4/img/v2/intrusive_extrusive_big.png">    </p:cNvPr>
+          <p:cNvPr id="5" name="Image 0" descr="/home/claude/f4/img/cameroon_volcanic_line.png">    </p:cNvPr>
           <p:cNvPicPr>
             <a:picLocks noChangeAspect="1"/>
           </p:cNvPicPr>
@@ -13402,8 +13980,8 @@
         </p:blipFill>
         <p:spPr>
           <a:xfrm>
-            <a:off x="629930" y="1783080"/>
-            <a:ext cx="10931835" cy="4270248"/>
+            <a:off x="6021727" y="1783080"/>
+            <a:ext cx="5314602" cy="4270248"/>
           </a:xfrm>
           <a:prstGeom prst="rect">
             <a:avLst/>
@@ -13412,14 +13990,14 @@
       </p:pic>
       <p:sp>
         <p:nvSpPr>
-          <p:cNvPr id="5" name="Text 2"/>
+          <p:cNvPr id="6" name="Text 3"/>
           <p:cNvSpPr/>
           <p:nvPr/>
         </p:nvSpPr>
         <p:spPr>
           <a:xfrm>
-            <a:off x="457200" y="6089904"/>
-            <a:ext cx="11277295" cy="347472"/>
+            <a:off x="5349240" y="6089904"/>
+            <a:ext cx="6659575" cy="347472"/>
           </a:xfrm>
           <a:prstGeom prst="rect">
             <a:avLst/>
@@ -13435,7 +14013,7 @@
               <a:buNone/>
             </a:pPr>
             <a:r>
-              <a:rPr lang="en-US" sz="1800" i="1" dirty="0">
+              <a:rPr lang="en-US" sz="1600" i="1" dirty="0">
                 <a:solidFill>
                   <a:srgbClr val="555555"/>
                 </a:solidFill>
@@ -13443,9 +14021,9 @@
                 <a:ea typeface="Times New Roman" pitchFamily="34" charset="-122"/>
                 <a:cs typeface="Times New Roman" pitchFamily="34" charset="-120"/>
               </a:rPr>
-              <a:t>Illustration: intrusive and extrusive features</a:t>
-            </a:r>
-            <a:endParaRPr lang="en-US" sz="1800" dirty="0"/>
+              <a:t>Illustration: volcanoes of Cameroon</a:t>
+            </a:r>
+            <a:endParaRPr lang="en-US" sz="1600" dirty="0"/>
           </a:p>
         </p:txBody>
       </p:sp>
@@ -13561,9 +14139,170 @@
           </a:p>
         </p:txBody>
       </p:sp>
+      <p:sp>
+        <p:nvSpPr>
+          <p:cNvPr id="3" name="Text 1"/>
+          <p:cNvSpPr/>
+          <p:nvPr/>
+        </p:nvSpPr>
+        <p:spPr>
+          <a:xfrm>
+            <a:off x="365760" y="1005840"/>
+            <a:ext cx="11460175" cy="731520"/>
+          </a:xfrm>
+          <a:prstGeom prst="rect">
+            <a:avLst/>
+          </a:prstGeom>
+          <a:noFill/>
+          <a:ln/>
+        </p:spPr>
+        <p:txBody>
+          <a:bodyPr wrap="square" lIns="0" tIns="0" rIns="0" bIns="0" rtlCol="0" anchor="ctr">
+            <a:normAutofit/>
+          </a:bodyPr>
+          <a:lstStyle/>
+          <a:p>
+            <a:pPr algn="ctr" indent="0" marL="0">
+              <a:buNone/>
+            </a:pPr>
+            <a:r>
+              <a:rPr lang="en-US" sz="3600" b="1" dirty="0">
+                <a:solidFill>
+                  <a:srgbClr val="990011"/>
+                </a:solidFill>
+                <a:latin typeface="Times New Roman" pitchFamily="34" charset="0"/>
+                <a:ea typeface="Times New Roman" pitchFamily="34" charset="-122"/>
+                <a:cs typeface="Times New Roman" pitchFamily="34" charset="-120"/>
+              </a:rPr>
+              <a:t>2. Types of Volcanoes</a:t>
+            </a:r>
+            <a:endParaRPr lang="en-US" sz="3600" dirty="0"/>
+          </a:p>
+        </p:txBody>
+      </p:sp>
+      <p:sp>
+        <p:nvSpPr>
+          <p:cNvPr id="4" name="Text 2"/>
+          <p:cNvSpPr/>
+          <p:nvPr/>
+        </p:nvSpPr>
+        <p:spPr>
+          <a:xfrm>
+            <a:off x="365760" y="1737360"/>
+            <a:ext cx="5120640" cy="457200"/>
+          </a:xfrm>
+          <a:prstGeom prst="rect">
+            <a:avLst/>
+          </a:prstGeom>
+          <a:noFill/>
+          <a:ln/>
+        </p:spPr>
+        <p:txBody>
+          <a:bodyPr wrap="square" lIns="0" tIns="0" rIns="0" bIns="0" rtlCol="0" anchor="ctr">
+            <a:normAutofit/>
+          </a:bodyPr>
+          <a:lstStyle/>
+          <a:p>
+            <a:pPr algn="l" indent="0" marL="0">
+              <a:buNone/>
+            </a:pPr>
+            <a:r>
+              <a:rPr lang="en-US" sz="3000" b="1" dirty="0">
+                <a:solidFill>
+                  <a:srgbClr val="990011"/>
+                </a:solidFill>
+                <a:latin typeface="Times New Roman" pitchFamily="34" charset="0"/>
+                <a:ea typeface="Times New Roman" pitchFamily="34" charset="-122"/>
+                <a:cs typeface="Times New Roman" pitchFamily="34" charset="-120"/>
+              </a:rPr>
+              <a:t>A) According to Activity</a:t>
+            </a:r>
+            <a:endParaRPr lang="en-US" sz="3000" dirty="0"/>
+          </a:p>
+        </p:txBody>
+      </p:sp>
+      <p:sp>
+        <p:nvSpPr>
+          <p:cNvPr id="5" name="Text 3"/>
+          <p:cNvSpPr/>
+          <p:nvPr/>
+        </p:nvSpPr>
+        <p:spPr>
+          <a:xfrm>
+            <a:off x="365760" y="2240280"/>
+            <a:ext cx="4846320" cy="4160520"/>
+          </a:xfrm>
+          <a:prstGeom prst="rect">
+            <a:avLst/>
+          </a:prstGeom>
+          <a:noFill/>
+          <a:ln/>
+        </p:spPr>
+        <p:txBody>
+          <a:bodyPr wrap="square" lIns="0" tIns="0" rIns="0" bIns="0" rtlCol="0" anchor="t"/>
+          <a:lstStyle/>
+          <a:p>
+            <a:pPr algn="l" indent="0" marL="0">
+              <a:spcAft>
+                <a:spcPts val="800"/>
+              </a:spcAft>
+              <a:buNone/>
+            </a:pPr>
+            <a:r>
+              <a:rPr lang="en-US" sz="3400" i="1" dirty="0">
+                <a:solidFill>
+                  <a:srgbClr val="111111"/>
+                </a:solidFill>
+                <a:latin typeface="Times New Roman" pitchFamily="34" charset="0"/>
+                <a:ea typeface="Times New Roman" pitchFamily="34" charset="-122"/>
+                <a:cs typeface="Times New Roman" pitchFamily="34" charset="-120"/>
+              </a:rPr>
+              <a:t>Volcanoes are classified according to their activity as follows:</a:t>
+            </a:r>
+            <a:endParaRPr lang="en-US" sz="3400" dirty="0"/>
+          </a:p>
+          <a:p>
+            <a:pPr algn="l" indent="0" marL="0">
+              <a:spcAft>
+                <a:spcPts val="800"/>
+              </a:spcAft>
+              <a:buNone/>
+            </a:pPr>
+            <a:r>
+              <a:rPr lang="en-US" sz="3400" b="1" dirty="0">
+                <a:solidFill>
+                  <a:srgbClr val="111111"/>
+                </a:solidFill>
+                <a:latin typeface="Times New Roman" pitchFamily="34" charset="0"/>
+                <a:ea typeface="Times New Roman" pitchFamily="34" charset="-122"/>
+                <a:cs typeface="Times New Roman" pitchFamily="34" charset="-120"/>
+              </a:rPr>
+              <a:t>Active volcano: </a:t>
+            </a:r>
+            <a:pPr algn="l" indent="0" marL="0">
+              <a:spcAft>
+                <a:spcPts val="800"/>
+              </a:spcAft>
+              <a:buNone/>
+            </a:pPr>
+            <a:r>
+              <a:rPr lang="en-US" sz="3400" dirty="0">
+                <a:solidFill>
+                  <a:srgbClr val="111111"/>
+                </a:solidFill>
+                <a:latin typeface="Times New Roman" pitchFamily="34" charset="0"/>
+                <a:ea typeface="Times New Roman" pitchFamily="34" charset="-122"/>
+                <a:cs typeface="Times New Roman" pitchFamily="34" charset="-120"/>
+              </a:rPr>
+              <a:t>It erupts now or has erupted recently, like Mount Cameroon.</a:t>
+            </a:r>
+            <a:endParaRPr lang="en-US" sz="3400" dirty="0"/>
+          </a:p>
+        </p:txBody>
+      </p:sp>
       <p:pic>
         <p:nvPicPr>
-          <p:cNvPr id="3" name="Image 0" descr="/home/claude/f4/img/minesec_sheet.png">    </p:cNvPr>
+          <p:cNvPr id="6" name="Image 0" descr="/home/claude/f4/img/v2/lsa_mtcameroon.jpg">    </p:cNvPr>
           <p:cNvPicPr>
             <a:picLocks noChangeAspect="1"/>
           </p:cNvPicPr>
@@ -13577,8 +14316,8 @@
         </p:blipFill>
         <p:spPr>
           <a:xfrm>
-            <a:off x="0" y="658368"/>
-            <a:ext cx="5120640" cy="5833872"/>
+            <a:off x="5349240" y="2071212"/>
+            <a:ext cx="6659575" cy="3693983"/>
           </a:xfrm>
           <a:prstGeom prst="rect">
             <a:avLst/>
@@ -13587,14 +14326,14 @@
       </p:pic>
       <p:sp>
         <p:nvSpPr>
-          <p:cNvPr id="4" name="Text 1"/>
+          <p:cNvPr id="7" name="Text 4"/>
           <p:cNvSpPr/>
           <p:nvPr/>
         </p:nvSpPr>
         <p:spPr>
           <a:xfrm>
-            <a:off x="5349240" y="1005840"/>
-            <a:ext cx="6522415" cy="731520"/>
+            <a:off x="5349240" y="6089904"/>
+            <a:ext cx="6659575" cy="347472"/>
           </a:xfrm>
           <a:prstGeom prst="rect">
             <a:avLst/>
@@ -13603,142 +14342,24 @@
           <a:ln/>
         </p:spPr>
         <p:txBody>
-          <a:bodyPr wrap="square" lIns="0" tIns="0" rIns="0" bIns="0" rtlCol="0" anchor="ctr">
-            <a:normAutofit/>
-          </a:bodyPr>
+          <a:bodyPr wrap="square" lIns="0" tIns="0" rIns="0" bIns="0" rtlCol="0" anchor="ctr"/>
           <a:lstStyle/>
           <a:p>
             <a:pPr algn="ctr" indent="0" marL="0">
               <a:buNone/>
             </a:pPr>
             <a:r>
-              <a:rPr lang="en-US" sz="3600" b="1" dirty="0">
-                <a:solidFill>
-                  <a:srgbClr val="990011"/>
+              <a:rPr lang="en-US" sz="1600" i="1" dirty="0">
+                <a:solidFill>
+                  <a:srgbClr val="555555"/>
                 </a:solidFill>
                 <a:latin typeface="Times New Roman" pitchFamily="34" charset="0"/>
                 <a:ea typeface="Times New Roman" pitchFamily="34" charset="-122"/>
                 <a:cs typeface="Times New Roman" pitchFamily="34" charset="-120"/>
               </a:rPr>
-              <a:t>4. General Structure of a Volcano</a:t>
-            </a:r>
-            <a:endParaRPr lang="en-US" sz="3600" dirty="0"/>
-          </a:p>
-        </p:txBody>
-      </p:sp>
-      <p:sp>
-        <p:nvSpPr>
-          <p:cNvPr id="5" name="Text 2"/>
-          <p:cNvSpPr/>
-          <p:nvPr/>
-        </p:nvSpPr>
-        <p:spPr>
-          <a:xfrm>
-            <a:off x="5349240" y="1783080"/>
-            <a:ext cx="6522415" cy="4663440"/>
-          </a:xfrm>
-          <a:prstGeom prst="rect">
-            <a:avLst/>
-          </a:prstGeom>
-          <a:noFill/>
-          <a:ln/>
-        </p:spPr>
-        <p:txBody>
-          <a:bodyPr wrap="square" lIns="0" tIns="0" rIns="0" bIns="0" rtlCol="0" anchor="t"/>
-          <a:lstStyle/>
-          <a:p>
-            <a:pPr algn="l" indent="0" marL="0">
-              <a:spcAft>
-                <a:spcPts val="800"/>
-              </a:spcAft>
-              <a:buNone/>
-            </a:pPr>
-            <a:r>
-              <a:rPr lang="en-US" sz="4000" i="1" dirty="0">
-                <a:solidFill>
-                  <a:srgbClr val="111111"/>
-                </a:solidFill>
-                <a:latin typeface="Times New Roman" pitchFamily="34" charset="0"/>
-                <a:ea typeface="Times New Roman" pitchFamily="34" charset="-122"/>
-                <a:cs typeface="Times New Roman" pitchFamily="34" charset="-120"/>
-              </a:rPr>
-              <a:t>A volcano has the following parts:</a:t>
-            </a:r>
-            <a:endParaRPr lang="en-US" sz="4000" dirty="0"/>
-          </a:p>
-          <a:p>
-            <a:pPr algn="l" indent="0" marL="0">
-              <a:spcAft>
-                <a:spcPts val="800"/>
-              </a:spcAft>
-              <a:buNone/>
-            </a:pPr>
-            <a:r>
-              <a:rPr lang="en-US" sz="4000" b="1" dirty="0">
-                <a:solidFill>
-                  <a:srgbClr val="111111"/>
-                </a:solidFill>
-                <a:latin typeface="Times New Roman" pitchFamily="34" charset="0"/>
-                <a:ea typeface="Times New Roman" pitchFamily="34" charset="-122"/>
-                <a:cs typeface="Times New Roman" pitchFamily="34" charset="-120"/>
-              </a:rPr>
-              <a:t>Magma chamber: </a:t>
-            </a:r>
-            <a:pPr algn="l" indent="0" marL="0">
-              <a:spcAft>
-                <a:spcPts val="800"/>
-              </a:spcAft>
-              <a:buNone/>
-            </a:pPr>
-            <a:r>
-              <a:rPr lang="en-US" sz="4000" dirty="0">
-                <a:solidFill>
-                  <a:srgbClr val="111111"/>
-                </a:solidFill>
-                <a:latin typeface="Times New Roman" pitchFamily="34" charset="0"/>
-                <a:ea typeface="Times New Roman" pitchFamily="34" charset="-122"/>
-                <a:cs typeface="Times New Roman" pitchFamily="34" charset="-120"/>
-              </a:rPr>
-              <a:t>It is the store of molten rock under the volcano.</a:t>
-            </a:r>
-            <a:endParaRPr lang="en-US" sz="4000" dirty="0"/>
-          </a:p>
-          <a:p>
-            <a:pPr algn="l" indent="0" marL="0">
-              <a:spcAft>
-                <a:spcPts val="800"/>
-              </a:spcAft>
-              <a:buNone/>
-            </a:pPr>
-            <a:r>
-              <a:rPr lang="en-US" sz="4000" b="1" dirty="0">
-                <a:solidFill>
-                  <a:srgbClr val="111111"/>
-                </a:solidFill>
-                <a:latin typeface="Times New Roman" pitchFamily="34" charset="0"/>
-                <a:ea typeface="Times New Roman" pitchFamily="34" charset="-122"/>
-                <a:cs typeface="Times New Roman" pitchFamily="34" charset="-120"/>
-              </a:rPr>
-              <a:t>Vent: </a:t>
-            </a:r>
-            <a:pPr algn="l" indent="0" marL="0">
-              <a:spcAft>
-                <a:spcPts val="800"/>
-              </a:spcAft>
-              <a:buNone/>
-            </a:pPr>
-            <a:r>
-              <a:rPr lang="en-US" sz="4000" dirty="0">
-                <a:solidFill>
-                  <a:srgbClr val="111111"/>
-                </a:solidFill>
-                <a:latin typeface="Times New Roman" pitchFamily="34" charset="0"/>
-                <a:ea typeface="Times New Roman" pitchFamily="34" charset="-122"/>
-                <a:cs typeface="Times New Roman" pitchFamily="34" charset="-120"/>
-              </a:rPr>
-              <a:t>It is the pipe through which magma rises.</a:t>
-            </a:r>
-            <a:endParaRPr lang="en-US" sz="4000" dirty="0"/>
+              <a:t>Illustration: Mount Cameroon</a:t>
+            </a:r>
+            <a:endParaRPr lang="en-US" sz="1600" dirty="0"/>
           </a:p>
         </p:txBody>
       </p:sp>
@@ -13913,7 +14534,7 @@
                 <a:ea typeface="Times New Roman" pitchFamily="34" charset="-122"/>
                 <a:cs typeface="Times New Roman" pitchFamily="34" charset="-120"/>
               </a:rPr>
-              <a:t>4. General Structure of a Volcano (continued)</a:t>
+              <a:t>2. Types of Volcanoes</a:t>
             </a:r>
             <a:endParaRPr lang="en-US" sz="3600" dirty="0"/>
           </a:p>
@@ -13927,8 +14548,47 @@
         </p:nvSpPr>
         <p:spPr>
           <a:xfrm>
-            <a:off x="5349240" y="1783080"/>
-            <a:ext cx="6522415" cy="4663440"/>
+            <a:off x="5349240" y="1737360"/>
+            <a:ext cx="6522415" cy="457200"/>
+          </a:xfrm>
+          <a:prstGeom prst="rect">
+            <a:avLst/>
+          </a:prstGeom>
+          <a:noFill/>
+          <a:ln/>
+        </p:spPr>
+        <p:txBody>
+          <a:bodyPr wrap="square" lIns="0" tIns="0" rIns="0" bIns="0" rtlCol="0" anchor="ctr"/>
+          <a:lstStyle/>
+          <a:p>
+            <a:pPr algn="l" indent="0" marL="0">
+              <a:buNone/>
+            </a:pPr>
+            <a:r>
+              <a:rPr lang="en-US" sz="3200" b="1" dirty="0">
+                <a:solidFill>
+                  <a:srgbClr val="990011"/>
+                </a:solidFill>
+                <a:latin typeface="Times New Roman" pitchFamily="34" charset="0"/>
+                <a:ea typeface="Times New Roman" pitchFamily="34" charset="-122"/>
+                <a:cs typeface="Times New Roman" pitchFamily="34" charset="-120"/>
+              </a:rPr>
+              <a:t>A) According to Activity</a:t>
+            </a:r>
+            <a:endParaRPr lang="en-US" sz="3200" dirty="0"/>
+          </a:p>
+        </p:txBody>
+      </p:sp>
+      <p:sp>
+        <p:nvSpPr>
+          <p:cNvPr id="6" name="Text 3"/>
+          <p:cNvSpPr/>
+          <p:nvPr/>
+        </p:nvSpPr>
+        <p:spPr>
+          <a:xfrm>
+            <a:off x="5349240" y="2240280"/>
+            <a:ext cx="6522415" cy="4206240"/>
           </a:xfrm>
           <a:prstGeom prst="rect">
             <a:avLst/>
@@ -13955,7 +14615,7 @@
                 <a:ea typeface="Times New Roman" pitchFamily="34" charset="-122"/>
                 <a:cs typeface="Times New Roman" pitchFamily="34" charset="-120"/>
               </a:rPr>
-              <a:t>Cone and crater: </a:t>
+              <a:t>Dormant volcano: </a:t>
             </a:r>
             <a:pPr algn="l" indent="0" marL="0">
               <a:spcAft>
@@ -13972,7 +14632,44 @@
                 <a:ea typeface="Times New Roman" pitchFamily="34" charset="-122"/>
                 <a:cs typeface="Times New Roman" pitchFamily="34" charset="-120"/>
               </a:rPr>
-              <a:t>The cone is built of lava and ash, and the crater is the hollow at the top.</a:t>
+              <a:t>It has not erupted for a long time but can erupt again.</a:t>
+            </a:r>
+            <a:endParaRPr lang="en-US" sz="4000" dirty="0"/>
+          </a:p>
+          <a:p>
+            <a:pPr algn="l" indent="0" marL="0">
+              <a:spcAft>
+                <a:spcPts val="800"/>
+              </a:spcAft>
+              <a:buNone/>
+            </a:pPr>
+            <a:r>
+              <a:rPr lang="en-US" sz="4000" b="1" dirty="0">
+                <a:solidFill>
+                  <a:srgbClr val="111111"/>
+                </a:solidFill>
+                <a:latin typeface="Times New Roman" pitchFamily="34" charset="0"/>
+                <a:ea typeface="Times New Roman" pitchFamily="34" charset="-122"/>
+                <a:cs typeface="Times New Roman" pitchFamily="34" charset="-120"/>
+              </a:rPr>
+              <a:t>Extinct volcano: </a:t>
+            </a:r>
+            <a:pPr algn="l" indent="0" marL="0">
+              <a:spcAft>
+                <a:spcPts val="800"/>
+              </a:spcAft>
+              <a:buNone/>
+            </a:pPr>
+            <a:r>
+              <a:rPr lang="en-US" sz="4000" dirty="0">
+                <a:solidFill>
+                  <a:srgbClr val="111111"/>
+                </a:solidFill>
+                <a:latin typeface="Times New Roman" pitchFamily="34" charset="0"/>
+                <a:ea typeface="Times New Roman" pitchFamily="34" charset="-122"/>
+                <a:cs typeface="Times New Roman" pitchFamily="34" charset="-120"/>
+              </a:rPr>
+              <a:t>It will never erupt again, like Mount Manengouba.</a:t>
             </a:r>
             <a:endParaRPr lang="en-US" sz="4000" dirty="0"/>
           </a:p>
@@ -14098,8 +14795,8 @@
         </p:nvSpPr>
         <p:spPr>
           <a:xfrm>
-            <a:off x="457200" y="1005840"/>
-            <a:ext cx="11277295" cy="731520"/>
+            <a:off x="365760" y="1005840"/>
+            <a:ext cx="11460175" cy="731520"/>
           </a:xfrm>
           <a:prstGeom prst="rect">
             <a:avLst/>
@@ -14108,7 +14805,9 @@
           <a:ln/>
         </p:spPr>
         <p:txBody>
-          <a:bodyPr wrap="square" lIns="0" tIns="0" rIns="0" bIns="0" rtlCol="0" anchor="ctr"/>
+          <a:bodyPr wrap="square" lIns="0" tIns="0" rIns="0" bIns="0" rtlCol="0" anchor="ctr">
+            <a:normAutofit/>
+          </a:bodyPr>
           <a:lstStyle/>
           <a:p>
             <a:pPr algn="ctr" indent="0" marL="0">
@@ -14123,7 +14822,127 @@
                 <a:ea typeface="Times New Roman" pitchFamily="34" charset="-122"/>
                 <a:cs typeface="Times New Roman" pitchFamily="34" charset="-120"/>
               </a:rPr>
-              <a:t>4. General Structure of a Volcano</a:t>
+              <a:t>2. Types of Volcanoes</a:t>
+            </a:r>
+            <a:endParaRPr lang="en-US" sz="3600" dirty="0"/>
+          </a:p>
+        </p:txBody>
+      </p:sp>
+      <p:sp>
+        <p:nvSpPr>
+          <p:cNvPr id="4" name="Text 2"/>
+          <p:cNvSpPr/>
+          <p:nvPr/>
+        </p:nvSpPr>
+        <p:spPr>
+          <a:xfrm>
+            <a:off x="365760" y="1737360"/>
+            <a:ext cx="5120640" cy="457200"/>
+          </a:xfrm>
+          <a:prstGeom prst="rect">
+            <a:avLst/>
+          </a:prstGeom>
+          <a:noFill/>
+          <a:ln/>
+        </p:spPr>
+        <p:txBody>
+          <a:bodyPr wrap="square" lIns="0" tIns="0" rIns="0" bIns="0" rtlCol="0" anchor="ctr">
+            <a:normAutofit/>
+          </a:bodyPr>
+          <a:lstStyle/>
+          <a:p>
+            <a:pPr algn="l" indent="0" marL="0">
+              <a:buNone/>
+            </a:pPr>
+            <a:r>
+              <a:rPr lang="en-US" sz="3000" b="1" dirty="0">
+                <a:solidFill>
+                  <a:srgbClr val="990011"/>
+                </a:solidFill>
+                <a:latin typeface="Times New Roman" pitchFamily="34" charset="0"/>
+                <a:ea typeface="Times New Roman" pitchFamily="34" charset="-122"/>
+                <a:cs typeface="Times New Roman" pitchFamily="34" charset="-120"/>
+              </a:rPr>
+              <a:t>B) According to Shape</a:t>
+            </a:r>
+            <a:endParaRPr lang="en-US" sz="3000" dirty="0"/>
+          </a:p>
+        </p:txBody>
+      </p:sp>
+      <p:sp>
+        <p:nvSpPr>
+          <p:cNvPr id="5" name="Text 3"/>
+          <p:cNvSpPr/>
+          <p:nvPr/>
+        </p:nvSpPr>
+        <p:spPr>
+          <a:xfrm>
+            <a:off x="365760" y="2240280"/>
+            <a:ext cx="4846320" cy="4160520"/>
+          </a:xfrm>
+          <a:prstGeom prst="rect">
+            <a:avLst/>
+          </a:prstGeom>
+          <a:noFill/>
+          <a:ln/>
+        </p:spPr>
+        <p:txBody>
+          <a:bodyPr wrap="square" lIns="0" tIns="0" rIns="0" bIns="0" rtlCol="0" anchor="t"/>
+          <a:lstStyle/>
+          <a:p>
+            <a:pPr algn="l" indent="0" marL="0">
+              <a:spcAft>
+                <a:spcPts val="800"/>
+              </a:spcAft>
+              <a:buNone/>
+            </a:pPr>
+            <a:r>
+              <a:rPr lang="en-US" sz="3600" i="1" dirty="0">
+                <a:solidFill>
+                  <a:srgbClr val="111111"/>
+                </a:solidFill>
+                <a:latin typeface="Times New Roman" pitchFamily="34" charset="0"/>
+                <a:ea typeface="Times New Roman" pitchFamily="34" charset="-122"/>
+                <a:cs typeface="Times New Roman" pitchFamily="34" charset="-120"/>
+              </a:rPr>
+              <a:t>Volcanoes are classified according to their shape as follows:</a:t>
+            </a:r>
+            <a:endParaRPr lang="en-US" sz="3600" dirty="0"/>
+          </a:p>
+          <a:p>
+            <a:pPr algn="l" indent="0" marL="0">
+              <a:spcAft>
+                <a:spcPts val="800"/>
+              </a:spcAft>
+              <a:buNone/>
+            </a:pPr>
+            <a:r>
+              <a:rPr lang="en-US" sz="3600" b="1" dirty="0">
+                <a:solidFill>
+                  <a:srgbClr val="111111"/>
+                </a:solidFill>
+                <a:latin typeface="Times New Roman" pitchFamily="34" charset="0"/>
+                <a:ea typeface="Times New Roman" pitchFamily="34" charset="-122"/>
+                <a:cs typeface="Times New Roman" pitchFamily="34" charset="-120"/>
+              </a:rPr>
+              <a:t>Shield volcano: </a:t>
+            </a:r>
+            <a:pPr algn="l" indent="0" marL="0">
+              <a:spcAft>
+                <a:spcPts val="800"/>
+              </a:spcAft>
+              <a:buNone/>
+            </a:pPr>
+            <a:r>
+              <a:rPr lang="en-US" sz="3600" dirty="0">
+                <a:solidFill>
+                  <a:srgbClr val="111111"/>
+                </a:solidFill>
+                <a:latin typeface="Times New Roman" pitchFamily="34" charset="0"/>
+                <a:ea typeface="Times New Roman" pitchFamily="34" charset="-122"/>
+                <a:cs typeface="Times New Roman" pitchFamily="34" charset="-120"/>
+              </a:rPr>
+              <a:t>It has gentle slopes built by runny lava, like Mauna Loa in Hawaii.</a:t>
             </a:r>
             <a:endParaRPr lang="en-US" sz="3600" dirty="0"/>
           </a:p>
@@ -14131,7 +14950,7 @@
       </p:sp>
       <p:pic>
         <p:nvPicPr>
-          <p:cNvPr id="4" name="Image 0" descr="/home/claude/f4/img/v2/volcano_big.png">    </p:cNvPr>
+          <p:cNvPr id="6" name="Image 0" descr="/home/claude/f4/img/v2/volcano_types_big.png">    </p:cNvPr>
           <p:cNvPicPr>
             <a:picLocks noChangeAspect="1"/>
           </p:cNvPicPr>
@@ -14145,8 +14964,8 @@
         </p:blipFill>
         <p:spPr>
           <a:xfrm>
-            <a:off x="629930" y="1783080"/>
-            <a:ext cx="10931835" cy="4270248"/>
+            <a:off x="5349240" y="2617506"/>
+            <a:ext cx="6659575" cy="2601397"/>
           </a:xfrm>
           <a:prstGeom prst="rect">
             <a:avLst/>
@@ -14155,14 +14974,14 @@
       </p:pic>
       <p:sp>
         <p:nvSpPr>
-          <p:cNvPr id="5" name="Text 2"/>
+          <p:cNvPr id="7" name="Text 4"/>
           <p:cNvSpPr/>
           <p:nvPr/>
         </p:nvSpPr>
         <p:spPr>
           <a:xfrm>
-            <a:off x="457200" y="6089904"/>
-            <a:ext cx="11277295" cy="347472"/>
+            <a:off x="5349240" y="6089904"/>
+            <a:ext cx="6659575" cy="347472"/>
           </a:xfrm>
           <a:prstGeom prst="rect">
             <a:avLst/>
@@ -14178,7 +14997,7 @@
               <a:buNone/>
             </a:pPr>
             <a:r>
-              <a:rPr lang="en-US" sz="1800" i="1" dirty="0">
+              <a:rPr lang="en-US" sz="1600" i="1" dirty="0">
                 <a:solidFill>
                   <a:srgbClr val="555555"/>
                 </a:solidFill>
@@ -14186,9 +15005,9 @@
                 <a:ea typeface="Times New Roman" pitchFamily="34" charset="-122"/>
                 <a:cs typeface="Times New Roman" pitchFamily="34" charset="-120"/>
               </a:rPr>
-              <a:t>Illustration: the structure of a volcano</a:t>
-            </a:r>
-            <a:endParaRPr lang="en-US" sz="1800" dirty="0"/>
+              <a:t>Illustration: types of volcanoes by shape</a:t>
+            </a:r>
+            <a:endParaRPr lang="en-US" sz="1600" dirty="0"/>
           </a:p>
         </p:txBody>
       </p:sp>
@@ -14298,7 +15117,7 @@
                 <a:ea typeface="Calibri" pitchFamily="34" charset="-122"/>
                 <a:cs typeface="Calibri" pitchFamily="34" charset="-120"/>
               </a:rPr>
-              <a:t>FORMATIVE EVALUATION</a:t>
+              <a:t>BOARD SUMMARY</a:t>
             </a:r>
             <a:endParaRPr lang="en-US" sz="1400" dirty="0"/>
           </a:p>
@@ -14321,7 +15140,7 @@
         <p:spPr>
           <a:xfrm>
             <a:off x="0" y="658368"/>
-            <a:ext cx="5120640" cy="5833872"/>
+            <a:ext cx="3840480" cy="5833872"/>
           </a:xfrm>
           <a:prstGeom prst="rect">
             <a:avLst/>
@@ -14336,8 +15155,8 @@
         </p:nvSpPr>
         <p:spPr>
           <a:xfrm>
-            <a:off x="5349240" y="1005840"/>
-            <a:ext cx="6522415" cy="731520"/>
+            <a:off x="4069080" y="1005840"/>
+            <a:ext cx="7802575" cy="731520"/>
           </a:xfrm>
           <a:prstGeom prst="rect">
             <a:avLst/>
@@ -14363,7 +15182,7 @@
                 <a:ea typeface="Times New Roman" pitchFamily="34" charset="-122"/>
                 <a:cs typeface="Times New Roman" pitchFamily="34" charset="-120"/>
               </a:rPr>
-              <a:t>Evaluation 1</a:t>
+              <a:t>2. Types of Volcanoes</a:t>
             </a:r>
             <a:endParaRPr lang="en-US" sz="3600" dirty="0"/>
           </a:p>
@@ -14377,8 +15196,47 @@
         </p:nvSpPr>
         <p:spPr>
           <a:xfrm>
-            <a:off x="5349240" y="1783080"/>
-            <a:ext cx="6522415" cy="4663440"/>
+            <a:off x="4069080" y="1737360"/>
+            <a:ext cx="7802575" cy="457200"/>
+          </a:xfrm>
+          <a:prstGeom prst="rect">
+            <a:avLst/>
+          </a:prstGeom>
+          <a:noFill/>
+          <a:ln/>
+        </p:spPr>
+        <p:txBody>
+          <a:bodyPr wrap="square" lIns="0" tIns="0" rIns="0" bIns="0" rtlCol="0" anchor="ctr"/>
+          <a:lstStyle/>
+          <a:p>
+            <a:pPr algn="l" indent="0" marL="0">
+              <a:buNone/>
+            </a:pPr>
+            <a:r>
+              <a:rPr lang="en-US" sz="3200" b="1" dirty="0">
+                <a:solidFill>
+                  <a:srgbClr val="990011"/>
+                </a:solidFill>
+                <a:latin typeface="Times New Roman" pitchFamily="34" charset="0"/>
+                <a:ea typeface="Times New Roman" pitchFamily="34" charset="-122"/>
+                <a:cs typeface="Times New Roman" pitchFamily="34" charset="-120"/>
+              </a:rPr>
+              <a:t>B) According to Shape</a:t>
+            </a:r>
+            <a:endParaRPr lang="en-US" sz="3200" dirty="0"/>
+          </a:p>
+        </p:txBody>
+      </p:sp>
+      <p:sp>
+        <p:nvSpPr>
+          <p:cNvPr id="6" name="Text 3"/>
+          <p:cNvSpPr/>
+          <p:nvPr/>
+        </p:nvSpPr>
+        <p:spPr>
+          <a:xfrm>
+            <a:off x="4069080" y="2240280"/>
+            <a:ext cx="7802575" cy="4206240"/>
           </a:xfrm>
           <a:prstGeom prst="rect">
             <a:avLst/>
@@ -14397,7 +15255,7 @@
               <a:buNone/>
             </a:pPr>
             <a:r>
-              <a:rPr lang="en-US" sz="4000" dirty="0">
+              <a:rPr lang="en-US" sz="4000" b="1" dirty="0">
                 <a:solidFill>
                   <a:srgbClr val="111111"/>
                 </a:solidFill>
@@ -14405,7 +15263,61 @@
                 <a:ea typeface="Times New Roman" pitchFamily="34" charset="-122"/>
                 <a:cs typeface="Times New Roman" pitchFamily="34" charset="-120"/>
               </a:rPr>
-              <a:t>What is a volcano?</a:t>
+              <a:t>Composite cone: </a:t>
+            </a:r>
+            <a:pPr algn="l" indent="0" marL="0">
+              <a:spcAft>
+                <a:spcPts val="800"/>
+              </a:spcAft>
+              <a:buNone/>
+            </a:pPr>
+            <a:r>
+              <a:rPr lang="en-US" sz="4000" dirty="0">
+                <a:solidFill>
+                  <a:srgbClr val="111111"/>
+                </a:solidFill>
+                <a:latin typeface="Times New Roman" pitchFamily="34" charset="0"/>
+                <a:ea typeface="Times New Roman" pitchFamily="34" charset="-122"/>
+                <a:cs typeface="Times New Roman" pitchFamily="34" charset="-120"/>
+              </a:rPr>
+              <a:t>It is a high, steep cone built of layers of lava and ash, like Mount Cameroon.</a:t>
+            </a:r>
+            <a:endParaRPr lang="en-US" sz="4000" dirty="0"/>
+          </a:p>
+          <a:p>
+            <a:pPr algn="l" indent="0" marL="0">
+              <a:spcAft>
+                <a:spcPts val="800"/>
+              </a:spcAft>
+              <a:buNone/>
+            </a:pPr>
+            <a:r>
+              <a:rPr lang="en-US" sz="4000" b="1" dirty="0">
+                <a:solidFill>
+                  <a:srgbClr val="111111"/>
+                </a:solidFill>
+                <a:latin typeface="Times New Roman" pitchFamily="34" charset="0"/>
+                <a:ea typeface="Times New Roman" pitchFamily="34" charset="-122"/>
+                <a:cs typeface="Times New Roman" pitchFamily="34" charset="-120"/>
+              </a:rPr>
+              <a:t>Ash and cinder cone: </a:t>
+            </a:r>
+            <a:pPr algn="l" indent="0" marL="0">
+              <a:spcAft>
+                <a:spcPts val="800"/>
+              </a:spcAft>
+              <a:buNone/>
+            </a:pPr>
+            <a:r>
+              <a:rPr lang="en-US" sz="4000" dirty="0">
+                <a:solidFill>
+                  <a:srgbClr val="111111"/>
+                </a:solidFill>
+                <a:latin typeface="Times New Roman" pitchFamily="34" charset="0"/>
+                <a:ea typeface="Times New Roman" pitchFamily="34" charset="-122"/>
+                <a:cs typeface="Times New Roman" pitchFamily="34" charset="-120"/>
+              </a:rPr>
+              <a:t>It is a small, steep cone built of ash and cinders.</a:t>
             </a:r>
             <a:endParaRPr lang="en-US" sz="4000" dirty="0"/>
           </a:p>
@@ -14517,15 +15429,135 @@
                 <a:ea typeface="Calibri" pitchFamily="34" charset="-122"/>
                 <a:cs typeface="Calibri" pitchFamily="34" charset="-120"/>
               </a:rPr>
-              <a:t>FORMATIVE EVALUATION</a:t>
+              <a:t>BOARD SUMMARY</a:t>
             </a:r>
             <a:endParaRPr lang="en-US" sz="1400" dirty="0"/>
+          </a:p>
+        </p:txBody>
+      </p:sp>
+      <p:sp>
+        <p:nvSpPr>
+          <p:cNvPr id="3" name="Text 1"/>
+          <p:cNvSpPr/>
+          <p:nvPr/>
+        </p:nvSpPr>
+        <p:spPr>
+          <a:xfrm>
+            <a:off x="365760" y="1005840"/>
+            <a:ext cx="11460175" cy="731520"/>
+          </a:xfrm>
+          <a:prstGeom prst="rect">
+            <a:avLst/>
+          </a:prstGeom>
+          <a:noFill/>
+          <a:ln/>
+        </p:spPr>
+        <p:txBody>
+          <a:bodyPr wrap="square" lIns="0" tIns="0" rIns="0" bIns="0" rtlCol="0" anchor="ctr">
+            <a:normAutofit/>
+          </a:bodyPr>
+          <a:lstStyle/>
+          <a:p>
+            <a:pPr algn="ctr" indent="0" marL="0">
+              <a:buNone/>
+            </a:pPr>
+            <a:r>
+              <a:rPr lang="en-US" sz="3600" b="1" dirty="0">
+                <a:solidFill>
+                  <a:srgbClr val="990011"/>
+                </a:solidFill>
+                <a:latin typeface="Times New Roman" pitchFamily="34" charset="0"/>
+                <a:ea typeface="Times New Roman" pitchFamily="34" charset="-122"/>
+                <a:cs typeface="Times New Roman" pitchFamily="34" charset="-120"/>
+              </a:rPr>
+              <a:t>3. Processes of Volcanicity</a:t>
+            </a:r>
+            <a:endParaRPr lang="en-US" sz="3600" dirty="0"/>
+          </a:p>
+        </p:txBody>
+      </p:sp>
+      <p:sp>
+        <p:nvSpPr>
+          <p:cNvPr id="4" name="Text 2"/>
+          <p:cNvSpPr/>
+          <p:nvPr/>
+        </p:nvSpPr>
+        <p:spPr>
+          <a:xfrm>
+            <a:off x="365760" y="1783080"/>
+            <a:ext cx="4846320" cy="4617720"/>
+          </a:xfrm>
+          <a:prstGeom prst="rect">
+            <a:avLst/>
+          </a:prstGeom>
+          <a:noFill/>
+          <a:ln/>
+        </p:spPr>
+        <p:txBody>
+          <a:bodyPr wrap="square" lIns="0" tIns="0" rIns="0" bIns="0" rtlCol="0" anchor="t"/>
+          <a:lstStyle/>
+          <a:p>
+            <a:pPr algn="l" indent="0" marL="0">
+              <a:spcAft>
+                <a:spcPts val="800"/>
+              </a:spcAft>
+              <a:buNone/>
+            </a:pPr>
+            <a:r>
+              <a:rPr lang="en-US" sz="3600" i="1" dirty="0">
+                <a:solidFill>
+                  <a:srgbClr val="111111"/>
+                </a:solidFill>
+                <a:latin typeface="Times New Roman" pitchFamily="34" charset="0"/>
+                <a:ea typeface="Times New Roman" pitchFamily="34" charset="-122"/>
+                <a:cs typeface="Times New Roman" pitchFamily="34" charset="-120"/>
+              </a:rPr>
+              <a:t>Magma moves by two processes:</a:t>
+            </a:r>
+            <a:endParaRPr lang="en-US" sz="3600" dirty="0"/>
+          </a:p>
+          <a:p>
+            <a:pPr algn="l" indent="0" marL="0">
+              <a:spcAft>
+                <a:spcPts val="800"/>
+              </a:spcAft>
+              <a:buNone/>
+            </a:pPr>
+            <a:r>
+              <a:rPr lang="en-US" sz="3600" b="1" dirty="0">
+                <a:solidFill>
+                  <a:srgbClr val="111111"/>
+                </a:solidFill>
+                <a:latin typeface="Times New Roman" pitchFamily="34" charset="0"/>
+                <a:ea typeface="Times New Roman" pitchFamily="34" charset="-122"/>
+                <a:cs typeface="Times New Roman" pitchFamily="34" charset="-120"/>
+              </a:rPr>
+              <a:t>Intrusion: </a:t>
+            </a:r>
+            <a:pPr algn="l" indent="0" marL="0">
+              <a:spcAft>
+                <a:spcPts val="800"/>
+              </a:spcAft>
+              <a:buNone/>
+            </a:pPr>
+            <a:r>
+              <a:rPr lang="en-US" sz="3600" dirty="0">
+                <a:solidFill>
+                  <a:srgbClr val="111111"/>
+                </a:solidFill>
+                <a:latin typeface="Times New Roman" pitchFamily="34" charset="0"/>
+                <a:ea typeface="Times New Roman" pitchFamily="34" charset="-122"/>
+                <a:cs typeface="Times New Roman" pitchFamily="34" charset="-120"/>
+              </a:rPr>
+              <a:t>Magma cools inside the crust and forms dykes, sills, laccoliths and batholiths.</a:t>
+            </a:r>
+            <a:endParaRPr lang="en-US" sz="3600" dirty="0"/>
           </a:p>
         </p:txBody>
       </p:sp>
       <p:pic>
         <p:nvPicPr>
-          <p:cNvPr id="3" name="Image 0" descr="/home/claude/f4/img/minesec_sheet.png">    </p:cNvPr>
+          <p:cNvPr id="5" name="Image 0" descr="/home/claude/f4/img/v2/intrusive_extrusive_big.png">    </p:cNvPr>
           <p:cNvPicPr>
             <a:picLocks noChangeAspect="1"/>
           </p:cNvPicPr>
@@ -14539,8 +15571,8 @@
         </p:blipFill>
         <p:spPr>
           <a:xfrm>
-            <a:off x="0" y="658368"/>
-            <a:ext cx="5120640" cy="5833872"/>
+            <a:off x="5349240" y="2617506"/>
+            <a:ext cx="6659575" cy="2601397"/>
           </a:xfrm>
           <a:prstGeom prst="rect">
             <a:avLst/>
@@ -14549,14 +15581,14 @@
       </p:pic>
       <p:sp>
         <p:nvSpPr>
-          <p:cNvPr id="4" name="Text 1"/>
+          <p:cNvPr id="6" name="Text 3"/>
           <p:cNvSpPr/>
           <p:nvPr/>
         </p:nvSpPr>
         <p:spPr>
           <a:xfrm>
-            <a:off x="5349240" y="1005840"/>
-            <a:ext cx="6522415" cy="731520"/>
+            <a:off x="5349240" y="6089904"/>
+            <a:ext cx="6659575" cy="347472"/>
           </a:xfrm>
           <a:prstGeom prst="rect">
             <a:avLst/>
@@ -14565,68 +15597,24 @@
           <a:ln/>
         </p:spPr>
         <p:txBody>
-          <a:bodyPr wrap="square" lIns="0" tIns="0" rIns="0" bIns="0" rtlCol="0" anchor="ctr">
-            <a:normAutofit/>
-          </a:bodyPr>
+          <a:bodyPr wrap="square" lIns="0" tIns="0" rIns="0" bIns="0" rtlCol="0" anchor="ctr"/>
           <a:lstStyle/>
           <a:p>
             <a:pPr algn="ctr" indent="0" marL="0">
               <a:buNone/>
             </a:pPr>
             <a:r>
-              <a:rPr lang="en-US" sz="3600" b="1" dirty="0">
-                <a:solidFill>
-                  <a:srgbClr val="990011"/>
+              <a:rPr lang="en-US" sz="1600" i="1" dirty="0">
+                <a:solidFill>
+                  <a:srgbClr val="555555"/>
                 </a:solidFill>
                 <a:latin typeface="Times New Roman" pitchFamily="34" charset="0"/>
                 <a:ea typeface="Times New Roman" pitchFamily="34" charset="-122"/>
                 <a:cs typeface="Times New Roman" pitchFamily="34" charset="-120"/>
               </a:rPr>
-              <a:t>Expected Answer</a:t>
-            </a:r>
-            <a:endParaRPr lang="en-US" sz="3600" dirty="0"/>
-          </a:p>
-        </p:txBody>
-      </p:sp>
-      <p:sp>
-        <p:nvSpPr>
-          <p:cNvPr id="5" name="Text 2"/>
-          <p:cNvSpPr/>
-          <p:nvPr/>
-        </p:nvSpPr>
-        <p:spPr>
-          <a:xfrm>
-            <a:off x="5349240" y="1783080"/>
-            <a:ext cx="6522415" cy="4663440"/>
-          </a:xfrm>
-          <a:prstGeom prst="rect">
-            <a:avLst/>
-          </a:prstGeom>
-          <a:noFill/>
-          <a:ln/>
-        </p:spPr>
-        <p:txBody>
-          <a:bodyPr wrap="square" lIns="0" tIns="0" rIns="0" bIns="0" rtlCol="0" anchor="t"/>
-          <a:lstStyle/>
-          <a:p>
-            <a:pPr algn="l" indent="0" marL="0">
-              <a:spcAft>
-                <a:spcPts val="800"/>
-              </a:spcAft>
-              <a:buNone/>
-            </a:pPr>
-            <a:r>
-              <a:rPr lang="en-US" sz="4000" dirty="0">
-                <a:solidFill>
-                  <a:srgbClr val="111111"/>
-                </a:solidFill>
-                <a:latin typeface="Times New Roman" pitchFamily="34" charset="0"/>
-                <a:ea typeface="Times New Roman" pitchFamily="34" charset="-122"/>
-                <a:cs typeface="Times New Roman" pitchFamily="34" charset="-120"/>
-              </a:rPr>
-              <a:t>An opening in the crust where magma comes out.</a:t>
-            </a:r>
-            <a:endParaRPr lang="en-US" sz="4000" dirty="0"/>
+              <a:t>Illustration: intrusive and extrusive features</a:t>
+            </a:r>
+            <a:endParaRPr lang="en-US" sz="1600" dirty="0"/>
           </a:p>
         </p:txBody>
       </p:sp>
@@ -14975,7 +15963,7 @@
                 <a:ea typeface="Calibri" pitchFamily="34" charset="-122"/>
                 <a:cs typeface="Calibri" pitchFamily="34" charset="-120"/>
               </a:rPr>
-              <a:t>FORMATIVE EVALUATION</a:t>
+              <a:t>BOARD SUMMARY</a:t>
             </a:r>
             <a:endParaRPr lang="en-US" sz="1400" dirty="0"/>
           </a:p>
@@ -15040,7 +16028,7 @@
                 <a:ea typeface="Times New Roman" pitchFamily="34" charset="-122"/>
                 <a:cs typeface="Times New Roman" pitchFamily="34" charset="-120"/>
               </a:rPr>
-              <a:t>Evaluation 2</a:t>
+              <a:t>3. Processes of Volcanicity</a:t>
             </a:r>
             <a:endParaRPr lang="en-US" sz="3600" dirty="0"/>
           </a:p>
@@ -15074,7 +16062,7 @@
               <a:buNone/>
             </a:pPr>
             <a:r>
-              <a:rPr lang="en-US" sz="4000" dirty="0">
+              <a:rPr lang="en-US" sz="4000" b="1" dirty="0">
                 <a:solidFill>
                   <a:srgbClr val="111111"/>
                 </a:solidFill>
@@ -15082,7 +16070,24 @@
                 <a:ea typeface="Times New Roman" pitchFamily="34" charset="-122"/>
                 <a:cs typeface="Times New Roman" pitchFamily="34" charset="-120"/>
               </a:rPr>
-              <a:t>Is Mount Cameroon active, dormant or extinct?</a:t>
+              <a:t>Extrusion: </a:t>
+            </a:r>
+            <a:pPr algn="l" indent="0" marL="0">
+              <a:spcAft>
+                <a:spcPts val="800"/>
+              </a:spcAft>
+              <a:buNone/>
+            </a:pPr>
+            <a:r>
+              <a:rPr lang="en-US" sz="4000" dirty="0">
+                <a:solidFill>
+                  <a:srgbClr val="111111"/>
+                </a:solidFill>
+                <a:latin typeface="Times New Roman" pitchFamily="34" charset="0"/>
+                <a:ea typeface="Times New Roman" pitchFamily="34" charset="-122"/>
+                <a:cs typeface="Times New Roman" pitchFamily="34" charset="-120"/>
+              </a:rPr>
+              <a:t>Magma comes out as lava, ash and gases and builds cones and lava plateaux.</a:t>
             </a:r>
             <a:endParaRPr lang="en-US" sz="4000" dirty="0"/>
           </a:p>
@@ -15194,15 +16199,135 @@
                 <a:ea typeface="Calibri" pitchFamily="34" charset="-122"/>
                 <a:cs typeface="Calibri" pitchFamily="34" charset="-120"/>
               </a:rPr>
-              <a:t>FORMATIVE EVALUATION</a:t>
+              <a:t>BOARD SUMMARY</a:t>
             </a:r>
             <a:endParaRPr lang="en-US" sz="1400" dirty="0"/>
+          </a:p>
+        </p:txBody>
+      </p:sp>
+      <p:sp>
+        <p:nvSpPr>
+          <p:cNvPr id="3" name="Text 1"/>
+          <p:cNvSpPr/>
+          <p:nvPr/>
+        </p:nvSpPr>
+        <p:spPr>
+          <a:xfrm>
+            <a:off x="365760" y="1005840"/>
+            <a:ext cx="11460175" cy="731520"/>
+          </a:xfrm>
+          <a:prstGeom prst="rect">
+            <a:avLst/>
+          </a:prstGeom>
+          <a:noFill/>
+          <a:ln/>
+        </p:spPr>
+        <p:txBody>
+          <a:bodyPr wrap="square" lIns="0" tIns="0" rIns="0" bIns="0" rtlCol="0" anchor="ctr">
+            <a:normAutofit/>
+          </a:bodyPr>
+          <a:lstStyle/>
+          <a:p>
+            <a:pPr algn="ctr" indent="0" marL="0">
+              <a:buNone/>
+            </a:pPr>
+            <a:r>
+              <a:rPr lang="en-US" sz="3600" b="1" dirty="0">
+                <a:solidFill>
+                  <a:srgbClr val="990011"/>
+                </a:solidFill>
+                <a:latin typeface="Times New Roman" pitchFamily="34" charset="0"/>
+                <a:ea typeface="Times New Roman" pitchFamily="34" charset="-122"/>
+                <a:cs typeface="Times New Roman" pitchFamily="34" charset="-120"/>
+              </a:rPr>
+              <a:t>4. General Structure of a Volcano</a:t>
+            </a:r>
+            <a:endParaRPr lang="en-US" sz="3600" dirty="0"/>
+          </a:p>
+        </p:txBody>
+      </p:sp>
+      <p:sp>
+        <p:nvSpPr>
+          <p:cNvPr id="4" name="Text 2"/>
+          <p:cNvSpPr/>
+          <p:nvPr/>
+        </p:nvSpPr>
+        <p:spPr>
+          <a:xfrm>
+            <a:off x="365760" y="1783080"/>
+            <a:ext cx="4846320" cy="4617720"/>
+          </a:xfrm>
+          <a:prstGeom prst="rect">
+            <a:avLst/>
+          </a:prstGeom>
+          <a:noFill/>
+          <a:ln/>
+        </p:spPr>
+        <p:txBody>
+          <a:bodyPr wrap="square" lIns="0" tIns="0" rIns="0" bIns="0" rtlCol="0" anchor="t"/>
+          <a:lstStyle/>
+          <a:p>
+            <a:pPr algn="l" indent="0" marL="0">
+              <a:spcAft>
+                <a:spcPts val="800"/>
+              </a:spcAft>
+              <a:buNone/>
+            </a:pPr>
+            <a:r>
+              <a:rPr lang="en-US" sz="3600" i="1" dirty="0">
+                <a:solidFill>
+                  <a:srgbClr val="111111"/>
+                </a:solidFill>
+                <a:latin typeface="Times New Roman" pitchFamily="34" charset="0"/>
+                <a:ea typeface="Times New Roman" pitchFamily="34" charset="-122"/>
+                <a:cs typeface="Times New Roman" pitchFamily="34" charset="-120"/>
+              </a:rPr>
+              <a:t>A volcano has the following parts:</a:t>
+            </a:r>
+            <a:endParaRPr lang="en-US" sz="3600" dirty="0"/>
+          </a:p>
+          <a:p>
+            <a:pPr algn="l" indent="0" marL="0">
+              <a:spcAft>
+                <a:spcPts val="800"/>
+              </a:spcAft>
+              <a:buNone/>
+            </a:pPr>
+            <a:r>
+              <a:rPr lang="en-US" sz="3600" b="1" dirty="0">
+                <a:solidFill>
+                  <a:srgbClr val="111111"/>
+                </a:solidFill>
+                <a:latin typeface="Times New Roman" pitchFamily="34" charset="0"/>
+                <a:ea typeface="Times New Roman" pitchFamily="34" charset="-122"/>
+                <a:cs typeface="Times New Roman" pitchFamily="34" charset="-120"/>
+              </a:rPr>
+              <a:t>Magma chamber: </a:t>
+            </a:r>
+            <a:pPr algn="l" indent="0" marL="0">
+              <a:spcAft>
+                <a:spcPts val="800"/>
+              </a:spcAft>
+              <a:buNone/>
+            </a:pPr>
+            <a:r>
+              <a:rPr lang="en-US" sz="3600" dirty="0">
+                <a:solidFill>
+                  <a:srgbClr val="111111"/>
+                </a:solidFill>
+                <a:latin typeface="Times New Roman" pitchFamily="34" charset="0"/>
+                <a:ea typeface="Times New Roman" pitchFamily="34" charset="-122"/>
+                <a:cs typeface="Times New Roman" pitchFamily="34" charset="-120"/>
+              </a:rPr>
+              <a:t>It is the store of molten rock under the volcano.</a:t>
+            </a:r>
+            <a:endParaRPr lang="en-US" sz="3600" dirty="0"/>
           </a:p>
         </p:txBody>
       </p:sp>
       <p:pic>
         <p:nvPicPr>
-          <p:cNvPr id="3" name="Image 0" descr="/home/claude/f4/img/minesec_sheet.png">    </p:cNvPr>
+          <p:cNvPr id="5" name="Image 0" descr="/home/claude/f4/img/v2/volcano_big.png">    </p:cNvPr>
           <p:cNvPicPr>
             <a:picLocks noChangeAspect="1"/>
           </p:cNvPicPr>
@@ -15216,8 +16341,8 @@
         </p:blipFill>
         <p:spPr>
           <a:xfrm>
-            <a:off x="0" y="658368"/>
-            <a:ext cx="5120640" cy="5833872"/>
+            <a:off x="5349240" y="2617506"/>
+            <a:ext cx="6659575" cy="2601397"/>
           </a:xfrm>
           <a:prstGeom prst="rect">
             <a:avLst/>
@@ -15226,14 +16351,14 @@
       </p:pic>
       <p:sp>
         <p:nvSpPr>
-          <p:cNvPr id="4" name="Text 1"/>
+          <p:cNvPr id="6" name="Text 3"/>
           <p:cNvSpPr/>
           <p:nvPr/>
         </p:nvSpPr>
         <p:spPr>
           <a:xfrm>
-            <a:off x="5349240" y="1005840"/>
-            <a:ext cx="6522415" cy="731520"/>
+            <a:off x="5349240" y="6089904"/>
+            <a:ext cx="6659575" cy="347472"/>
           </a:xfrm>
           <a:prstGeom prst="rect">
             <a:avLst/>
@@ -15242,68 +16367,24 @@
           <a:ln/>
         </p:spPr>
         <p:txBody>
-          <a:bodyPr wrap="square" lIns="0" tIns="0" rIns="0" bIns="0" rtlCol="0" anchor="ctr">
-            <a:normAutofit/>
-          </a:bodyPr>
+          <a:bodyPr wrap="square" lIns="0" tIns="0" rIns="0" bIns="0" rtlCol="0" anchor="ctr"/>
           <a:lstStyle/>
           <a:p>
             <a:pPr algn="ctr" indent="0" marL="0">
               <a:buNone/>
             </a:pPr>
             <a:r>
-              <a:rPr lang="en-US" sz="3600" b="1" dirty="0">
-                <a:solidFill>
-                  <a:srgbClr val="990011"/>
+              <a:rPr lang="en-US" sz="1600" i="1" dirty="0">
+                <a:solidFill>
+                  <a:srgbClr val="555555"/>
                 </a:solidFill>
                 <a:latin typeface="Times New Roman" pitchFamily="34" charset="0"/>
                 <a:ea typeface="Times New Roman" pitchFamily="34" charset="-122"/>
                 <a:cs typeface="Times New Roman" pitchFamily="34" charset="-120"/>
               </a:rPr>
-              <a:t>Expected Answer</a:t>
-            </a:r>
-            <a:endParaRPr lang="en-US" sz="3600" dirty="0"/>
-          </a:p>
-        </p:txBody>
-      </p:sp>
-      <p:sp>
-        <p:nvSpPr>
-          <p:cNvPr id="5" name="Text 2"/>
-          <p:cNvSpPr/>
-          <p:nvPr/>
-        </p:nvSpPr>
-        <p:spPr>
-          <a:xfrm>
-            <a:off x="5349240" y="1783080"/>
-            <a:ext cx="6522415" cy="4663440"/>
-          </a:xfrm>
-          <a:prstGeom prst="rect">
-            <a:avLst/>
-          </a:prstGeom>
-          <a:noFill/>
-          <a:ln/>
-        </p:spPr>
-        <p:txBody>
-          <a:bodyPr wrap="square" lIns="0" tIns="0" rIns="0" bIns="0" rtlCol="0" anchor="t"/>
-          <a:lstStyle/>
-          <a:p>
-            <a:pPr algn="l" indent="0" marL="0">
-              <a:spcAft>
-                <a:spcPts val="800"/>
-              </a:spcAft>
-              <a:buNone/>
-            </a:pPr>
-            <a:r>
-              <a:rPr lang="en-US" sz="4000" dirty="0">
-                <a:solidFill>
-                  <a:srgbClr val="111111"/>
-                </a:solidFill>
-                <a:latin typeface="Times New Roman" pitchFamily="34" charset="0"/>
-                <a:ea typeface="Times New Roman" pitchFamily="34" charset="-122"/>
-                <a:cs typeface="Times New Roman" pitchFamily="34" charset="-120"/>
-              </a:rPr>
-              <a:t>Active: it erupted in 1999 and 2000.</a:t>
-            </a:r>
-            <a:endParaRPr lang="en-US" sz="4000" dirty="0"/>
+              <a:t>Illustration: the structure of a volcano</a:t>
+            </a:r>
+            <a:endParaRPr lang="en-US" sz="1600" dirty="0"/>
           </a:p>
         </p:txBody>
       </p:sp>
@@ -15413,7 +16494,7 @@
                 <a:ea typeface="Calibri" pitchFamily="34" charset="-122"/>
                 <a:cs typeface="Calibri" pitchFamily="34" charset="-120"/>
               </a:rPr>
-              <a:t>REMEDIATION</a:t>
+              <a:t>BOARD SUMMARY</a:t>
             </a:r>
             <a:endParaRPr lang="en-US" sz="1400" dirty="0"/>
           </a:p>
@@ -15436,7 +16517,7 @@
         <p:spPr>
           <a:xfrm>
             <a:off x="0" y="658368"/>
-            <a:ext cx="2468880" cy="5833872"/>
+            <a:ext cx="5120640" cy="5833872"/>
           </a:xfrm>
           <a:prstGeom prst="rect">
             <a:avLst/>
@@ -15451,8 +16532,8 @@
         </p:nvSpPr>
         <p:spPr>
           <a:xfrm>
-            <a:off x="2697480" y="1005840"/>
-            <a:ext cx="9174175" cy="731520"/>
+            <a:off x="5349240" y="1005840"/>
+            <a:ext cx="6522415" cy="731520"/>
           </a:xfrm>
           <a:prstGeom prst="rect">
             <a:avLst/>
@@ -15478,7 +16559,7 @@
                 <a:ea typeface="Times New Roman" pitchFamily="34" charset="-122"/>
                 <a:cs typeface="Times New Roman" pitchFamily="34" charset="-120"/>
               </a:rPr>
-              <a:t>Remediation</a:t>
+              <a:t>4. General Structure of a Volcano</a:t>
             </a:r>
             <a:endParaRPr lang="en-US" sz="3600" dirty="0"/>
           </a:p>
@@ -15492,8 +16573,8 @@
         </p:nvSpPr>
         <p:spPr>
           <a:xfrm>
-            <a:off x="2697480" y="1783080"/>
-            <a:ext cx="9174175" cy="4663440"/>
+            <a:off x="5349240" y="1783080"/>
+            <a:ext cx="6522415" cy="4663440"/>
           </a:xfrm>
           <a:prstGeom prst="rect">
             <a:avLst/>
@@ -15520,18 +16601,13 @@
                 <a:ea typeface="Times New Roman" pitchFamily="34" charset="-122"/>
                 <a:cs typeface="Times New Roman" pitchFamily="34" charset="-120"/>
               </a:rPr>
-              <a:t>Fill in the blanks:</a:t>
-            </a:r>
-            <a:endParaRPr lang="en-US" sz="4000" dirty="0"/>
-          </a:p>
-          <a:p>
-            <a:pPr algn="l" marL="342900" indent="-342900">
+              <a:t>Vent (pipe): </a:t>
+            </a:r>
+            <a:pPr algn="l" indent="0" marL="0">
               <a:spcAft>
                 <a:spcPts val="800"/>
               </a:spcAft>
-              <a:buSzPct val="100000"/>
-              <a:buFont typeface="+mj-lt"/>
-              <a:buAutoNum type="arabicPeriod" startAt="1"/>
+              <a:buNone/>
             </a:pPr>
             <a:r>
               <a:rPr lang="en-US" sz="4000" dirty="0">
@@ -15542,21 +16618,19 @@
                 <a:ea typeface="Times New Roman" pitchFamily="34" charset="-122"/>
                 <a:cs typeface="Times New Roman" pitchFamily="34" charset="-120"/>
               </a:rPr>
-              <a:t>Magma on the surface is called ______.</a:t>
+              <a:t>It is the channel through which magma rises.</a:t>
             </a:r>
             <a:endParaRPr lang="en-US" sz="4000" dirty="0"/>
           </a:p>
           <a:p>
-            <a:pPr algn="l" marL="342900" indent="-342900">
+            <a:pPr algn="l" indent="0" marL="0">
               <a:spcAft>
                 <a:spcPts val="800"/>
               </a:spcAft>
-              <a:buSzPct val="100000"/>
-              <a:buFont typeface="+mj-lt"/>
-              <a:buAutoNum type="arabicPeriod" startAt="1"/>
-            </a:pPr>
-            <a:r>
-              <a:rPr lang="en-US" sz="4000" dirty="0">
+              <a:buNone/>
+            </a:pPr>
+            <a:r>
+              <a:rPr lang="en-US" sz="4000" b="1" dirty="0">
                 <a:solidFill>
                   <a:srgbClr val="111111"/>
                 </a:solidFill>
@@ -15564,18 +16638,13 @@
                 <a:ea typeface="Times New Roman" pitchFamily="34" charset="-122"/>
                 <a:cs typeface="Times New Roman" pitchFamily="34" charset="-120"/>
               </a:rPr>
-              <a:t>The pipe of a volcano is the ______.</a:t>
-            </a:r>
-            <a:endParaRPr lang="en-US" sz="4000" dirty="0"/>
-          </a:p>
-          <a:p>
-            <a:pPr algn="l" marL="342900" indent="-342900">
+              <a:t>Cone: </a:t>
+            </a:r>
+            <a:pPr algn="l" indent="0" marL="0">
               <a:spcAft>
                 <a:spcPts val="800"/>
               </a:spcAft>
-              <a:buSzPct val="100000"/>
-              <a:buFont typeface="+mj-lt"/>
-              <a:buAutoNum type="arabicPeriod" startAt="1"/>
+              <a:buNone/>
             </a:pPr>
             <a:r>
               <a:rPr lang="en-US" sz="4000" dirty="0">
@@ -15586,7 +16655,7 @@
                 <a:ea typeface="Times New Roman" pitchFamily="34" charset="-122"/>
                 <a:cs typeface="Times New Roman" pitchFamily="34" charset="-120"/>
               </a:rPr>
-              <a:t>A volcano that erupts now is ______.</a:t>
+              <a:t>It is the mountain built by layers of lava and ash.</a:t>
             </a:r>
             <a:endParaRPr lang="en-US" sz="4000" dirty="0"/>
           </a:p>
@@ -15698,15 +16767,115 @@
                 <a:ea typeface="Calibri" pitchFamily="34" charset="-122"/>
                 <a:cs typeface="Calibri" pitchFamily="34" charset="-120"/>
               </a:rPr>
-              <a:t>HOMEWORK</a:t>
+              <a:t>BOARD SUMMARY</a:t>
             </a:r>
             <a:endParaRPr lang="en-US" sz="1400" dirty="0"/>
+          </a:p>
+        </p:txBody>
+      </p:sp>
+      <p:sp>
+        <p:nvSpPr>
+          <p:cNvPr id="3" name="Text 1"/>
+          <p:cNvSpPr/>
+          <p:nvPr/>
+        </p:nvSpPr>
+        <p:spPr>
+          <a:xfrm>
+            <a:off x="365760" y="1005840"/>
+            <a:ext cx="11460175" cy="731520"/>
+          </a:xfrm>
+          <a:prstGeom prst="rect">
+            <a:avLst/>
+          </a:prstGeom>
+          <a:noFill/>
+          <a:ln/>
+        </p:spPr>
+        <p:txBody>
+          <a:bodyPr wrap="square" lIns="0" tIns="0" rIns="0" bIns="0" rtlCol="0" anchor="ctr">
+            <a:normAutofit/>
+          </a:bodyPr>
+          <a:lstStyle/>
+          <a:p>
+            <a:pPr algn="ctr" indent="0" marL="0">
+              <a:buNone/>
+            </a:pPr>
+            <a:r>
+              <a:rPr lang="en-US" sz="3600" b="1" dirty="0">
+                <a:solidFill>
+                  <a:srgbClr val="990011"/>
+                </a:solidFill>
+                <a:latin typeface="Times New Roman" pitchFamily="34" charset="0"/>
+                <a:ea typeface="Times New Roman" pitchFamily="34" charset="-122"/>
+                <a:cs typeface="Times New Roman" pitchFamily="34" charset="-120"/>
+              </a:rPr>
+              <a:t>4. General Structure of a Volcano</a:t>
+            </a:r>
+            <a:endParaRPr lang="en-US" sz="3600" dirty="0"/>
+          </a:p>
+        </p:txBody>
+      </p:sp>
+      <p:sp>
+        <p:nvSpPr>
+          <p:cNvPr id="4" name="Text 2"/>
+          <p:cNvSpPr/>
+          <p:nvPr/>
+        </p:nvSpPr>
+        <p:spPr>
+          <a:xfrm>
+            <a:off x="365760" y="1783080"/>
+            <a:ext cx="4846320" cy="4617720"/>
+          </a:xfrm>
+          <a:prstGeom prst="rect">
+            <a:avLst/>
+          </a:prstGeom>
+          <a:noFill/>
+          <a:ln/>
+        </p:spPr>
+        <p:txBody>
+          <a:bodyPr wrap="square" lIns="0" tIns="0" rIns="0" bIns="0" rtlCol="0" anchor="t"/>
+          <a:lstStyle/>
+          <a:p>
+            <a:pPr algn="l" indent="0" marL="0">
+              <a:spcAft>
+                <a:spcPts val="800"/>
+              </a:spcAft>
+              <a:buNone/>
+            </a:pPr>
+            <a:r>
+              <a:rPr lang="en-US" sz="3600" b="1" dirty="0">
+                <a:solidFill>
+                  <a:srgbClr val="111111"/>
+                </a:solidFill>
+                <a:latin typeface="Times New Roman" pitchFamily="34" charset="0"/>
+                <a:ea typeface="Times New Roman" pitchFamily="34" charset="-122"/>
+                <a:cs typeface="Times New Roman" pitchFamily="34" charset="-120"/>
+              </a:rPr>
+              <a:t>Crater: </a:t>
+            </a:r>
+            <a:pPr algn="l" indent="0" marL="0">
+              <a:spcAft>
+                <a:spcPts val="800"/>
+              </a:spcAft>
+              <a:buNone/>
+            </a:pPr>
+            <a:r>
+              <a:rPr lang="en-US" sz="3600" dirty="0">
+                <a:solidFill>
+                  <a:srgbClr val="111111"/>
+                </a:solidFill>
+                <a:latin typeface="Times New Roman" pitchFamily="34" charset="0"/>
+                <a:ea typeface="Times New Roman" pitchFamily="34" charset="-122"/>
+                <a:cs typeface="Times New Roman" pitchFamily="34" charset="-120"/>
+              </a:rPr>
+              <a:t>It is the round hollow at the top of the vent.</a:t>
+            </a:r>
+            <a:endParaRPr lang="en-US" sz="3600" dirty="0"/>
           </a:p>
         </p:txBody>
       </p:sp>
       <p:pic>
         <p:nvPicPr>
-          <p:cNvPr id="3" name="Image 0" descr="/home/claude/f4/img/minesec_sheet.png">    </p:cNvPr>
+          <p:cNvPr id="5" name="Image 0" descr="/home/claude/f4/img/v2/f4_crater.jpg">    </p:cNvPr>
           <p:cNvPicPr>
             <a:picLocks noChangeAspect="1"/>
           </p:cNvPicPr>
@@ -15720,8 +16889,8 @@
         </p:blipFill>
         <p:spPr>
           <a:xfrm>
-            <a:off x="0" y="658368"/>
-            <a:ext cx="5120640" cy="5833872"/>
+            <a:off x="5349240" y="2071212"/>
+            <a:ext cx="6659575" cy="3693983"/>
           </a:xfrm>
           <a:prstGeom prst="rect">
             <a:avLst/>
@@ -15730,14 +16899,14 @@
       </p:pic>
       <p:sp>
         <p:nvSpPr>
-          <p:cNvPr id="4" name="Text 1"/>
+          <p:cNvPr id="6" name="Text 3"/>
           <p:cNvSpPr/>
           <p:nvPr/>
         </p:nvSpPr>
         <p:spPr>
           <a:xfrm>
-            <a:off x="5349240" y="1005840"/>
-            <a:ext cx="6522415" cy="731520"/>
+            <a:off x="5349240" y="6089904"/>
+            <a:ext cx="6659575" cy="347472"/>
           </a:xfrm>
           <a:prstGeom prst="rect">
             <a:avLst/>
@@ -15746,68 +16915,24 @@
           <a:ln/>
         </p:spPr>
         <p:txBody>
-          <a:bodyPr wrap="square" lIns="0" tIns="0" rIns="0" bIns="0" rtlCol="0" anchor="ctr">
-            <a:normAutofit/>
-          </a:bodyPr>
+          <a:bodyPr wrap="square" lIns="0" tIns="0" rIns="0" bIns="0" rtlCol="0" anchor="ctr"/>
           <a:lstStyle/>
           <a:p>
             <a:pPr algn="ctr" indent="0" marL="0">
               <a:buNone/>
             </a:pPr>
             <a:r>
-              <a:rPr lang="en-US" sz="3600" b="1" dirty="0">
-                <a:solidFill>
-                  <a:srgbClr val="990011"/>
+              <a:rPr lang="en-US" sz="1600" i="1" dirty="0">
+                <a:solidFill>
+                  <a:srgbClr val="555555"/>
                 </a:solidFill>
                 <a:latin typeface="Times New Roman" pitchFamily="34" charset="0"/>
                 <a:ea typeface="Times New Roman" pitchFamily="34" charset="-122"/>
                 <a:cs typeface="Times New Roman" pitchFamily="34" charset="-120"/>
               </a:rPr>
-              <a:t>Homework</a:t>
-            </a:r>
-            <a:endParaRPr lang="en-US" sz="3600" dirty="0"/>
-          </a:p>
-        </p:txBody>
-      </p:sp>
-      <p:sp>
-        <p:nvSpPr>
-          <p:cNvPr id="5" name="Text 2"/>
-          <p:cNvSpPr/>
-          <p:nvPr/>
-        </p:nvSpPr>
-        <p:spPr>
-          <a:xfrm>
-            <a:off x="5349240" y="1783080"/>
-            <a:ext cx="6522415" cy="4663440"/>
-          </a:xfrm>
-          <a:prstGeom prst="rect">
-            <a:avLst/>
-          </a:prstGeom>
-          <a:noFill/>
-          <a:ln/>
-        </p:spPr>
-        <p:txBody>
-          <a:bodyPr wrap="square" lIns="0" tIns="0" rIns="0" bIns="0" rtlCol="0" anchor="t"/>
-          <a:lstStyle/>
-          <a:p>
-            <a:pPr algn="l" indent="0" marL="0">
-              <a:spcAft>
-                <a:spcPts val="800"/>
-              </a:spcAft>
-              <a:buNone/>
-            </a:pPr>
-            <a:r>
-              <a:rPr lang="en-US" sz="4000" dirty="0">
-                <a:solidFill>
-                  <a:srgbClr val="111111"/>
-                </a:solidFill>
-                <a:latin typeface="Times New Roman" pitchFamily="34" charset="0"/>
-                <a:ea typeface="Times New Roman" pitchFamily="34" charset="-122"/>
-                <a:cs typeface="Times New Roman" pitchFamily="34" charset="-120"/>
-              </a:rPr>
-              <a:t>Imagine a friend wants to farm near Buea, on Mount Cameroon. Write two good reasons to go and two dangers.</a:t>
-            </a:r>
-            <a:endParaRPr lang="en-US" sz="4000" dirty="0"/>
+              <a:t>Illustration: a crater</a:t>
+            </a:r>
+            <a:endParaRPr lang="en-US" sz="1600" dirty="0"/>
           </a:p>
         </p:txBody>
       </p:sp>
@@ -15917,7 +17042,7 @@
                 <a:ea typeface="Calibri" pitchFamily="34" charset="-122"/>
                 <a:cs typeface="Calibri" pitchFamily="34" charset="-120"/>
               </a:rPr>
-              <a:t>NEXT LESSON</a:t>
+              <a:t>BOARD SUMMARY</a:t>
             </a:r>
             <a:endParaRPr lang="en-US" sz="1400" dirty="0"/>
           </a:p>
@@ -15982,7 +17107,7 @@
                 <a:ea typeface="Times New Roman" pitchFamily="34" charset="-122"/>
                 <a:cs typeface="Times New Roman" pitchFamily="34" charset="-120"/>
               </a:rPr>
-              <a:t>Next Lesson</a:t>
+              <a:t>4. General Structure of a Volcano</a:t>
             </a:r>
             <a:endParaRPr lang="en-US" sz="3600" dirty="0"/>
           </a:p>
@@ -16006,10 +17131,10 @@
           <a:ln/>
         </p:spPr>
         <p:txBody>
-          <a:bodyPr wrap="square" lIns="0" tIns="0" rIns="0" bIns="0" rtlCol="0" anchor="ctr"/>
-          <a:lstStyle/>
-          <a:p>
-            <a:pPr algn="ctr" indent="0" marL="0">
+          <a:bodyPr wrap="square" lIns="0" tIns="0" rIns="0" bIns="0" rtlCol="0" anchor="t"/>
+          <a:lstStyle/>
+          <a:p>
+            <a:pPr algn="l" indent="0" marL="0">
               <a:spcAft>
                 <a:spcPts val="800"/>
               </a:spcAft>
@@ -16024,27 +17149,24 @@
                 <a:ea typeface="Times New Roman" pitchFamily="34" charset="-122"/>
                 <a:cs typeface="Times New Roman" pitchFamily="34" charset="-120"/>
               </a:rPr>
-              <a:t>Our next lesson will be on:</a:t>
-            </a:r>
-            <a:endParaRPr lang="en-US" sz="4000" dirty="0"/>
-          </a:p>
-          <a:p>
-            <a:pPr algn="ctr" indent="0" marL="0">
+              <a:t>Secondary cone: </a:t>
+            </a:r>
+            <a:pPr algn="l" indent="0" marL="0">
               <a:spcAft>
                 <a:spcPts val="800"/>
               </a:spcAft>
               <a:buNone/>
             </a:pPr>
             <a:r>
-              <a:rPr lang="en-US" sz="4000" b="1" dirty="0">
-                <a:solidFill>
-                  <a:srgbClr val="990011"/>
+              <a:rPr lang="en-US" sz="4000" dirty="0">
+                <a:solidFill>
+                  <a:srgbClr val="111111"/>
                 </a:solidFill>
                 <a:latin typeface="Times New Roman" pitchFamily="34" charset="0"/>
                 <a:ea typeface="Times New Roman" pitchFamily="34" charset="-122"/>
                 <a:cs typeface="Times New Roman" pitchFamily="34" charset="-120"/>
               </a:rPr>
-              <a:t>Lesson 12: The Impact of Volcanicity on Man</a:t>
+              <a:t>It is a small cone on the side of the volcano, fed by a side vent.</a:t>
             </a:r>
             <a:endParaRPr lang="en-US" sz="4000" dirty="0"/>
           </a:p>
@@ -16156,6 +17278,1844 @@
                 <a:ea typeface="Calibri" pitchFamily="34" charset="-122"/>
                 <a:cs typeface="Calibri" pitchFamily="34" charset="-120"/>
               </a:rPr>
+              <a:t>FORMATIVE EVALUATION</a:t>
+            </a:r>
+            <a:endParaRPr lang="en-US" sz="1400" dirty="0"/>
+          </a:p>
+        </p:txBody>
+      </p:sp>
+      <p:pic>
+        <p:nvPicPr>
+          <p:cNvPr id="3" name="Image 0" descr="/home/claude/f4/img/minesec_sheet.png">    </p:cNvPr>
+          <p:cNvPicPr>
+            <a:picLocks noChangeAspect="1"/>
+          </p:cNvPicPr>
+          <p:nvPr/>
+        </p:nvPicPr>
+        <p:blipFill>
+          <a:blip r:embed="rId1"/>
+          <a:stretch>
+            <a:fillRect/>
+          </a:stretch>
+        </p:blipFill>
+        <p:spPr>
+          <a:xfrm>
+            <a:off x="0" y="658368"/>
+            <a:ext cx="5120640" cy="5833872"/>
+          </a:xfrm>
+          <a:prstGeom prst="rect">
+            <a:avLst/>
+          </a:prstGeom>
+        </p:spPr>
+      </p:pic>
+      <p:sp>
+        <p:nvSpPr>
+          <p:cNvPr id="4" name="Text 1"/>
+          <p:cNvSpPr/>
+          <p:nvPr/>
+        </p:nvSpPr>
+        <p:spPr>
+          <a:xfrm>
+            <a:off x="5349240" y="1005840"/>
+            <a:ext cx="6522415" cy="731520"/>
+          </a:xfrm>
+          <a:prstGeom prst="rect">
+            <a:avLst/>
+          </a:prstGeom>
+          <a:noFill/>
+          <a:ln/>
+        </p:spPr>
+        <p:txBody>
+          <a:bodyPr wrap="square" lIns="0" tIns="0" rIns="0" bIns="0" rtlCol="0" anchor="ctr">
+            <a:normAutofit/>
+          </a:bodyPr>
+          <a:lstStyle/>
+          <a:p>
+            <a:pPr algn="ctr" indent="0" marL="0">
+              <a:buNone/>
+            </a:pPr>
+            <a:r>
+              <a:rPr lang="en-US" sz="3600" b="1" dirty="0">
+                <a:solidFill>
+                  <a:srgbClr val="990011"/>
+                </a:solidFill>
+                <a:latin typeface="Times New Roman" pitchFamily="34" charset="0"/>
+                <a:ea typeface="Times New Roman" pitchFamily="34" charset="-122"/>
+                <a:cs typeface="Times New Roman" pitchFamily="34" charset="-120"/>
+              </a:rPr>
+              <a:t>Evaluation 1</a:t>
+            </a:r>
+            <a:endParaRPr lang="en-US" sz="3600" dirty="0"/>
+          </a:p>
+        </p:txBody>
+      </p:sp>
+      <p:sp>
+        <p:nvSpPr>
+          <p:cNvPr id="5" name="Text 2"/>
+          <p:cNvSpPr/>
+          <p:nvPr/>
+        </p:nvSpPr>
+        <p:spPr>
+          <a:xfrm>
+            <a:off x="5349240" y="1783080"/>
+            <a:ext cx="6522415" cy="4663440"/>
+          </a:xfrm>
+          <a:prstGeom prst="rect">
+            <a:avLst/>
+          </a:prstGeom>
+          <a:noFill/>
+          <a:ln/>
+        </p:spPr>
+        <p:txBody>
+          <a:bodyPr wrap="square" lIns="0" tIns="0" rIns="0" bIns="0" rtlCol="0" anchor="t"/>
+          <a:lstStyle/>
+          <a:p>
+            <a:pPr algn="l" indent="0" marL="0">
+              <a:spcAft>
+                <a:spcPts val="800"/>
+              </a:spcAft>
+              <a:buNone/>
+            </a:pPr>
+            <a:r>
+              <a:rPr lang="en-US" sz="4000" dirty="0">
+                <a:solidFill>
+                  <a:srgbClr val="111111"/>
+                </a:solidFill>
+                <a:latin typeface="Times New Roman" pitchFamily="34" charset="0"/>
+                <a:ea typeface="Times New Roman" pitchFamily="34" charset="-122"/>
+                <a:cs typeface="Times New Roman" pitchFamily="34" charset="-120"/>
+              </a:rPr>
+              <a:t>What is a volcano?</a:t>
+            </a:r>
+            <a:endParaRPr lang="en-US" sz="4000" dirty="0"/>
+          </a:p>
+        </p:txBody>
+      </p:sp>
+      <p:sp>
+        <p:nvSpPr>
+          <p:cNvPr id="25" name="Slide Number Placeholder 0"/>
+          <p:cNvSpPr>
+            <a:spLocks noGrp="1"/>
+          </p:cNvSpPr>
+          <p:nvPr>
+            <p:ph type="sldNum" sz="quarter" idx="4294967295"/>
+          </p:nvPr>
+        </p:nvSpPr>
+        <p:spPr>
+          <a:xfrm>
+            <a:off x="27432" y="91440"/>
+            <a:ext cx="585216" cy="475488"/>
+          </a:xfrm>
+          <a:prstGeom prst="rect">
+            <a:avLst/>
+          </a:prstGeom>
+          <a:extLst>
+            <a:ext uri="{C572A759-6A51-4108-AA02-DFA0A04FC94B}">
+              <ma14:wrappingTextBoxFlag xmlns:ma14="http://schemas.microsoft.com/office/mac/drawingml/2011/main" val="0"/>
+            </a:ext>
+          </a:extLst>
+        </p:spPr>
+        <p:txBody>
+          <a:bodyPr/>
+          <a:lstStyle>
+            <a:lvl1pPr>
+              <a:defRPr sz="2000">
+                <a:solidFill>
+                  <a:srgbClr val="FFFFFF"/>
+                </a:solidFill>
+                <a:latin typeface="Calibri"/>
+                <a:ea typeface="Calibri"/>
+                <a:cs typeface="Calibri"/>
+              </a:defRPr>
+            </a:lvl1pPr>
+          </a:lstStyle>
+          <a:p>
+            <a:pPr algn="ctr"/>
+            <a:fld id="{F7021451-1387-4CA6-816F-3879F97B5CBC}" type="slidenum">
+              <a:rPr b="1" lang="en-US"/>
+              <a:t>45</a:t>
+            </a:fld>
+            <a:endParaRPr lang="en-US"/>
+          </a:p>
+        </p:txBody>
+      </p:sp>
+    </p:spTree>
+  </p:cSld>
+  <p:clrMapOvr>
+    <a:masterClrMapping/>
+  </p:clrMapOvr>
+</p:sld>
+</file>
+
+<file path=ppt/slides/slide46.xml><?xml version="1.0" encoding="utf-8"?>
+<p:sld xmlns:a="http://schemas.openxmlformats.org/drawingml/2006/main" xmlns:r="http://schemas.openxmlformats.org/officeDocument/2006/relationships" xmlns:p="http://schemas.openxmlformats.org/presentationml/2006/main">
+  <p:cSld name="Slide 46">
+    <p:spTree>
+      <p:nvGrpSpPr>
+        <p:cNvPr id="1" name=""/>
+        <p:cNvGrpSpPr/>
+        <p:nvPr/>
+      </p:nvGrpSpPr>
+      <p:grpSpPr>
+        <a:xfrm>
+          <a:off x="0" y="0"/>
+          <a:ext cx="0" cy="0"/>
+          <a:chOff x="0" y="0"/>
+          <a:chExt cx="0" cy="0"/>
+        </a:xfrm>
+      </p:grpSpPr>
+      <p:sp>
+        <p:nvSpPr>
+          <p:cNvPr id="2" name="Text 0"/>
+          <p:cNvSpPr/>
+          <p:nvPr/>
+        </p:nvSpPr>
+        <p:spPr>
+          <a:xfrm>
+            <a:off x="457200" y="713232"/>
+            <a:ext cx="11368735" cy="274320"/>
+          </a:xfrm>
+          <a:prstGeom prst="rect">
+            <a:avLst/>
+          </a:prstGeom>
+          <a:noFill/>
+          <a:ln/>
+        </p:spPr>
+        <p:txBody>
+          <a:bodyPr wrap="square" lIns="0" tIns="0" rIns="0" bIns="0" rtlCol="0" anchor="ctr"/>
+          <a:lstStyle/>
+          <a:p>
+            <a:pPr algn="r" indent="0" marL="0">
+              <a:buNone/>
+            </a:pPr>
+            <a:r>
+              <a:rPr lang="en-US" sz="1400" b="1" dirty="0">
+                <a:solidFill>
+                  <a:srgbClr val="1C3F6E"/>
+                </a:solidFill>
+                <a:latin typeface="Calibri" pitchFamily="34" charset="0"/>
+                <a:ea typeface="Calibri" pitchFamily="34" charset="-122"/>
+                <a:cs typeface="Calibri" pitchFamily="34" charset="-120"/>
+              </a:rPr>
+              <a:t>FORMATIVE EVALUATION</a:t>
+            </a:r>
+            <a:endParaRPr lang="en-US" sz="1400" dirty="0"/>
+          </a:p>
+        </p:txBody>
+      </p:sp>
+      <p:pic>
+        <p:nvPicPr>
+          <p:cNvPr id="3" name="Image 0" descr="/home/claude/f4/img/minesec_sheet.png">    </p:cNvPr>
+          <p:cNvPicPr>
+            <a:picLocks noChangeAspect="1"/>
+          </p:cNvPicPr>
+          <p:nvPr/>
+        </p:nvPicPr>
+        <p:blipFill>
+          <a:blip r:embed="rId1"/>
+          <a:stretch>
+            <a:fillRect/>
+          </a:stretch>
+        </p:blipFill>
+        <p:spPr>
+          <a:xfrm>
+            <a:off x="0" y="658368"/>
+            <a:ext cx="5120640" cy="5833872"/>
+          </a:xfrm>
+          <a:prstGeom prst="rect">
+            <a:avLst/>
+          </a:prstGeom>
+        </p:spPr>
+      </p:pic>
+      <p:sp>
+        <p:nvSpPr>
+          <p:cNvPr id="4" name="Text 1"/>
+          <p:cNvSpPr/>
+          <p:nvPr/>
+        </p:nvSpPr>
+        <p:spPr>
+          <a:xfrm>
+            <a:off x="5349240" y="1005840"/>
+            <a:ext cx="6522415" cy="731520"/>
+          </a:xfrm>
+          <a:prstGeom prst="rect">
+            <a:avLst/>
+          </a:prstGeom>
+          <a:noFill/>
+          <a:ln/>
+        </p:spPr>
+        <p:txBody>
+          <a:bodyPr wrap="square" lIns="0" tIns="0" rIns="0" bIns="0" rtlCol="0" anchor="ctr">
+            <a:normAutofit/>
+          </a:bodyPr>
+          <a:lstStyle/>
+          <a:p>
+            <a:pPr algn="ctr" indent="0" marL="0">
+              <a:buNone/>
+            </a:pPr>
+            <a:r>
+              <a:rPr lang="en-US" sz="3600" b="1" dirty="0">
+                <a:solidFill>
+                  <a:srgbClr val="990011"/>
+                </a:solidFill>
+                <a:latin typeface="Times New Roman" pitchFamily="34" charset="0"/>
+                <a:ea typeface="Times New Roman" pitchFamily="34" charset="-122"/>
+                <a:cs typeface="Times New Roman" pitchFamily="34" charset="-120"/>
+              </a:rPr>
+              <a:t>Expected Answer</a:t>
+            </a:r>
+            <a:endParaRPr lang="en-US" sz="3600" dirty="0"/>
+          </a:p>
+        </p:txBody>
+      </p:sp>
+      <p:sp>
+        <p:nvSpPr>
+          <p:cNvPr id="5" name="Text 2"/>
+          <p:cNvSpPr/>
+          <p:nvPr/>
+        </p:nvSpPr>
+        <p:spPr>
+          <a:xfrm>
+            <a:off x="5349240" y="1783080"/>
+            <a:ext cx="6522415" cy="4663440"/>
+          </a:xfrm>
+          <a:prstGeom prst="rect">
+            <a:avLst/>
+          </a:prstGeom>
+          <a:noFill/>
+          <a:ln/>
+        </p:spPr>
+        <p:txBody>
+          <a:bodyPr wrap="square" lIns="0" tIns="0" rIns="0" bIns="0" rtlCol="0" anchor="t"/>
+          <a:lstStyle/>
+          <a:p>
+            <a:pPr algn="l" indent="0" marL="0">
+              <a:spcAft>
+                <a:spcPts val="800"/>
+              </a:spcAft>
+              <a:buNone/>
+            </a:pPr>
+            <a:r>
+              <a:rPr lang="en-US" sz="4000" dirty="0">
+                <a:solidFill>
+                  <a:srgbClr val="111111"/>
+                </a:solidFill>
+                <a:latin typeface="Times New Roman" pitchFamily="34" charset="0"/>
+                <a:ea typeface="Times New Roman" pitchFamily="34" charset="-122"/>
+                <a:cs typeface="Times New Roman" pitchFamily="34" charset="-120"/>
+              </a:rPr>
+              <a:t>An opening in the crust where magma comes out.</a:t>
+            </a:r>
+            <a:endParaRPr lang="en-US" sz="4000" dirty="0"/>
+          </a:p>
+        </p:txBody>
+      </p:sp>
+      <p:sp>
+        <p:nvSpPr>
+          <p:cNvPr id="25" name="Slide Number Placeholder 0"/>
+          <p:cNvSpPr>
+            <a:spLocks noGrp="1"/>
+          </p:cNvSpPr>
+          <p:nvPr>
+            <p:ph type="sldNum" sz="quarter" idx="4294967295"/>
+          </p:nvPr>
+        </p:nvSpPr>
+        <p:spPr>
+          <a:xfrm>
+            <a:off x="27432" y="91440"/>
+            <a:ext cx="585216" cy="475488"/>
+          </a:xfrm>
+          <a:prstGeom prst="rect">
+            <a:avLst/>
+          </a:prstGeom>
+          <a:extLst>
+            <a:ext uri="{C572A759-6A51-4108-AA02-DFA0A04FC94B}">
+              <ma14:wrappingTextBoxFlag xmlns:ma14="http://schemas.microsoft.com/office/mac/drawingml/2011/main" val="0"/>
+            </a:ext>
+          </a:extLst>
+        </p:spPr>
+        <p:txBody>
+          <a:bodyPr/>
+          <a:lstStyle>
+            <a:lvl1pPr>
+              <a:defRPr sz="2000">
+                <a:solidFill>
+                  <a:srgbClr val="FFFFFF"/>
+                </a:solidFill>
+                <a:latin typeface="Calibri"/>
+                <a:ea typeface="Calibri"/>
+                <a:cs typeface="Calibri"/>
+              </a:defRPr>
+            </a:lvl1pPr>
+          </a:lstStyle>
+          <a:p>
+            <a:pPr algn="ctr"/>
+            <a:fld id="{F7021451-1387-4CA6-816F-3879F97B5CBC}" type="slidenum">
+              <a:rPr b="1" lang="en-US"/>
+              <a:t>46</a:t>
+            </a:fld>
+            <a:endParaRPr lang="en-US"/>
+          </a:p>
+        </p:txBody>
+      </p:sp>
+    </p:spTree>
+  </p:cSld>
+  <p:clrMapOvr>
+    <a:masterClrMapping/>
+  </p:clrMapOvr>
+</p:sld>
+</file>
+
+<file path=ppt/slides/slide47.xml><?xml version="1.0" encoding="utf-8"?>
+<p:sld xmlns:a="http://schemas.openxmlformats.org/drawingml/2006/main" xmlns:r="http://schemas.openxmlformats.org/officeDocument/2006/relationships" xmlns:p="http://schemas.openxmlformats.org/presentationml/2006/main">
+  <p:cSld name="Slide 47">
+    <p:spTree>
+      <p:nvGrpSpPr>
+        <p:cNvPr id="1" name=""/>
+        <p:cNvGrpSpPr/>
+        <p:nvPr/>
+      </p:nvGrpSpPr>
+      <p:grpSpPr>
+        <a:xfrm>
+          <a:off x="0" y="0"/>
+          <a:ext cx="0" cy="0"/>
+          <a:chOff x="0" y="0"/>
+          <a:chExt cx="0" cy="0"/>
+        </a:xfrm>
+      </p:grpSpPr>
+      <p:sp>
+        <p:nvSpPr>
+          <p:cNvPr id="2" name="Text 0"/>
+          <p:cNvSpPr/>
+          <p:nvPr/>
+        </p:nvSpPr>
+        <p:spPr>
+          <a:xfrm>
+            <a:off x="457200" y="713232"/>
+            <a:ext cx="11368735" cy="274320"/>
+          </a:xfrm>
+          <a:prstGeom prst="rect">
+            <a:avLst/>
+          </a:prstGeom>
+          <a:noFill/>
+          <a:ln/>
+        </p:spPr>
+        <p:txBody>
+          <a:bodyPr wrap="square" lIns="0" tIns="0" rIns="0" bIns="0" rtlCol="0" anchor="ctr"/>
+          <a:lstStyle/>
+          <a:p>
+            <a:pPr algn="r" indent="0" marL="0">
+              <a:buNone/>
+            </a:pPr>
+            <a:r>
+              <a:rPr lang="en-US" sz="1400" b="1" dirty="0">
+                <a:solidFill>
+                  <a:srgbClr val="1C3F6E"/>
+                </a:solidFill>
+                <a:latin typeface="Calibri" pitchFamily="34" charset="0"/>
+                <a:ea typeface="Calibri" pitchFamily="34" charset="-122"/>
+                <a:cs typeface="Calibri" pitchFamily="34" charset="-120"/>
+              </a:rPr>
+              <a:t>FORMATIVE EVALUATION</a:t>
+            </a:r>
+            <a:endParaRPr lang="en-US" sz="1400" dirty="0"/>
+          </a:p>
+        </p:txBody>
+      </p:sp>
+      <p:pic>
+        <p:nvPicPr>
+          <p:cNvPr id="3" name="Image 0" descr="/home/claude/f4/img/minesec_sheet.png">    </p:cNvPr>
+          <p:cNvPicPr>
+            <a:picLocks noChangeAspect="1"/>
+          </p:cNvPicPr>
+          <p:nvPr/>
+        </p:nvPicPr>
+        <p:blipFill>
+          <a:blip r:embed="rId1"/>
+          <a:stretch>
+            <a:fillRect/>
+          </a:stretch>
+        </p:blipFill>
+        <p:spPr>
+          <a:xfrm>
+            <a:off x="0" y="658368"/>
+            <a:ext cx="5120640" cy="5833872"/>
+          </a:xfrm>
+          <a:prstGeom prst="rect">
+            <a:avLst/>
+          </a:prstGeom>
+        </p:spPr>
+      </p:pic>
+      <p:sp>
+        <p:nvSpPr>
+          <p:cNvPr id="4" name="Text 1"/>
+          <p:cNvSpPr/>
+          <p:nvPr/>
+        </p:nvSpPr>
+        <p:spPr>
+          <a:xfrm>
+            <a:off x="5349240" y="1005840"/>
+            <a:ext cx="6522415" cy="731520"/>
+          </a:xfrm>
+          <a:prstGeom prst="rect">
+            <a:avLst/>
+          </a:prstGeom>
+          <a:noFill/>
+          <a:ln/>
+        </p:spPr>
+        <p:txBody>
+          <a:bodyPr wrap="square" lIns="0" tIns="0" rIns="0" bIns="0" rtlCol="0" anchor="ctr">
+            <a:normAutofit/>
+          </a:bodyPr>
+          <a:lstStyle/>
+          <a:p>
+            <a:pPr algn="ctr" indent="0" marL="0">
+              <a:buNone/>
+            </a:pPr>
+            <a:r>
+              <a:rPr lang="en-US" sz="3600" b="1" dirty="0">
+                <a:solidFill>
+                  <a:srgbClr val="990011"/>
+                </a:solidFill>
+                <a:latin typeface="Times New Roman" pitchFamily="34" charset="0"/>
+                <a:ea typeface="Times New Roman" pitchFamily="34" charset="-122"/>
+                <a:cs typeface="Times New Roman" pitchFamily="34" charset="-120"/>
+              </a:rPr>
+              <a:t>Evaluation 2</a:t>
+            </a:r>
+            <a:endParaRPr lang="en-US" sz="3600" dirty="0"/>
+          </a:p>
+        </p:txBody>
+      </p:sp>
+      <p:sp>
+        <p:nvSpPr>
+          <p:cNvPr id="5" name="Text 2"/>
+          <p:cNvSpPr/>
+          <p:nvPr/>
+        </p:nvSpPr>
+        <p:spPr>
+          <a:xfrm>
+            <a:off x="5349240" y="1783080"/>
+            <a:ext cx="6522415" cy="4663440"/>
+          </a:xfrm>
+          <a:prstGeom prst="rect">
+            <a:avLst/>
+          </a:prstGeom>
+          <a:noFill/>
+          <a:ln/>
+        </p:spPr>
+        <p:txBody>
+          <a:bodyPr wrap="square" lIns="0" tIns="0" rIns="0" bIns="0" rtlCol="0" anchor="t"/>
+          <a:lstStyle/>
+          <a:p>
+            <a:pPr algn="l" indent="0" marL="0">
+              <a:spcAft>
+                <a:spcPts val="800"/>
+              </a:spcAft>
+              <a:buNone/>
+            </a:pPr>
+            <a:r>
+              <a:rPr lang="en-US" sz="4000" dirty="0">
+                <a:solidFill>
+                  <a:srgbClr val="111111"/>
+                </a:solidFill>
+                <a:latin typeface="Times New Roman" pitchFamily="34" charset="0"/>
+                <a:ea typeface="Times New Roman" pitchFamily="34" charset="-122"/>
+                <a:cs typeface="Times New Roman" pitchFamily="34" charset="-120"/>
+              </a:rPr>
+              <a:t>Is Mount Cameroon active, dormant or extinct?</a:t>
+            </a:r>
+            <a:endParaRPr lang="en-US" sz="4000" dirty="0"/>
+          </a:p>
+        </p:txBody>
+      </p:sp>
+      <p:sp>
+        <p:nvSpPr>
+          <p:cNvPr id="25" name="Slide Number Placeholder 0"/>
+          <p:cNvSpPr>
+            <a:spLocks noGrp="1"/>
+          </p:cNvSpPr>
+          <p:nvPr>
+            <p:ph type="sldNum" sz="quarter" idx="4294967295"/>
+          </p:nvPr>
+        </p:nvSpPr>
+        <p:spPr>
+          <a:xfrm>
+            <a:off x="27432" y="91440"/>
+            <a:ext cx="585216" cy="475488"/>
+          </a:xfrm>
+          <a:prstGeom prst="rect">
+            <a:avLst/>
+          </a:prstGeom>
+          <a:extLst>
+            <a:ext uri="{C572A759-6A51-4108-AA02-DFA0A04FC94B}">
+              <ma14:wrappingTextBoxFlag xmlns:ma14="http://schemas.microsoft.com/office/mac/drawingml/2011/main" val="0"/>
+            </a:ext>
+          </a:extLst>
+        </p:spPr>
+        <p:txBody>
+          <a:bodyPr/>
+          <a:lstStyle>
+            <a:lvl1pPr>
+              <a:defRPr sz="2000">
+                <a:solidFill>
+                  <a:srgbClr val="FFFFFF"/>
+                </a:solidFill>
+                <a:latin typeface="Calibri"/>
+                <a:ea typeface="Calibri"/>
+                <a:cs typeface="Calibri"/>
+              </a:defRPr>
+            </a:lvl1pPr>
+          </a:lstStyle>
+          <a:p>
+            <a:pPr algn="ctr"/>
+            <a:fld id="{F7021451-1387-4CA6-816F-3879F97B5CBC}" type="slidenum">
+              <a:rPr b="1" lang="en-US"/>
+              <a:t>47</a:t>
+            </a:fld>
+            <a:endParaRPr lang="en-US"/>
+          </a:p>
+        </p:txBody>
+      </p:sp>
+    </p:spTree>
+  </p:cSld>
+  <p:clrMapOvr>
+    <a:masterClrMapping/>
+  </p:clrMapOvr>
+</p:sld>
+</file>
+
+<file path=ppt/slides/slide48.xml><?xml version="1.0" encoding="utf-8"?>
+<p:sld xmlns:a="http://schemas.openxmlformats.org/drawingml/2006/main" xmlns:r="http://schemas.openxmlformats.org/officeDocument/2006/relationships" xmlns:p="http://schemas.openxmlformats.org/presentationml/2006/main">
+  <p:cSld name="Slide 48">
+    <p:spTree>
+      <p:nvGrpSpPr>
+        <p:cNvPr id="1" name=""/>
+        <p:cNvGrpSpPr/>
+        <p:nvPr/>
+      </p:nvGrpSpPr>
+      <p:grpSpPr>
+        <a:xfrm>
+          <a:off x="0" y="0"/>
+          <a:ext cx="0" cy="0"/>
+          <a:chOff x="0" y="0"/>
+          <a:chExt cx="0" cy="0"/>
+        </a:xfrm>
+      </p:grpSpPr>
+      <p:sp>
+        <p:nvSpPr>
+          <p:cNvPr id="2" name="Text 0"/>
+          <p:cNvSpPr/>
+          <p:nvPr/>
+        </p:nvSpPr>
+        <p:spPr>
+          <a:xfrm>
+            <a:off x="457200" y="713232"/>
+            <a:ext cx="11368735" cy="274320"/>
+          </a:xfrm>
+          <a:prstGeom prst="rect">
+            <a:avLst/>
+          </a:prstGeom>
+          <a:noFill/>
+          <a:ln/>
+        </p:spPr>
+        <p:txBody>
+          <a:bodyPr wrap="square" lIns="0" tIns="0" rIns="0" bIns="0" rtlCol="0" anchor="ctr"/>
+          <a:lstStyle/>
+          <a:p>
+            <a:pPr algn="r" indent="0" marL="0">
+              <a:buNone/>
+            </a:pPr>
+            <a:r>
+              <a:rPr lang="en-US" sz="1400" b="1" dirty="0">
+                <a:solidFill>
+                  <a:srgbClr val="1C3F6E"/>
+                </a:solidFill>
+                <a:latin typeface="Calibri" pitchFamily="34" charset="0"/>
+                <a:ea typeface="Calibri" pitchFamily="34" charset="-122"/>
+                <a:cs typeface="Calibri" pitchFamily="34" charset="-120"/>
+              </a:rPr>
+              <a:t>FORMATIVE EVALUATION</a:t>
+            </a:r>
+            <a:endParaRPr lang="en-US" sz="1400" dirty="0"/>
+          </a:p>
+        </p:txBody>
+      </p:sp>
+      <p:pic>
+        <p:nvPicPr>
+          <p:cNvPr id="3" name="Image 0" descr="/home/claude/f4/img/minesec_sheet.png">    </p:cNvPr>
+          <p:cNvPicPr>
+            <a:picLocks noChangeAspect="1"/>
+          </p:cNvPicPr>
+          <p:nvPr/>
+        </p:nvPicPr>
+        <p:blipFill>
+          <a:blip r:embed="rId1"/>
+          <a:stretch>
+            <a:fillRect/>
+          </a:stretch>
+        </p:blipFill>
+        <p:spPr>
+          <a:xfrm>
+            <a:off x="0" y="658368"/>
+            <a:ext cx="5120640" cy="5833872"/>
+          </a:xfrm>
+          <a:prstGeom prst="rect">
+            <a:avLst/>
+          </a:prstGeom>
+        </p:spPr>
+      </p:pic>
+      <p:sp>
+        <p:nvSpPr>
+          <p:cNvPr id="4" name="Text 1"/>
+          <p:cNvSpPr/>
+          <p:nvPr/>
+        </p:nvSpPr>
+        <p:spPr>
+          <a:xfrm>
+            <a:off x="5349240" y="1005840"/>
+            <a:ext cx="6522415" cy="731520"/>
+          </a:xfrm>
+          <a:prstGeom prst="rect">
+            <a:avLst/>
+          </a:prstGeom>
+          <a:noFill/>
+          <a:ln/>
+        </p:spPr>
+        <p:txBody>
+          <a:bodyPr wrap="square" lIns="0" tIns="0" rIns="0" bIns="0" rtlCol="0" anchor="ctr">
+            <a:normAutofit/>
+          </a:bodyPr>
+          <a:lstStyle/>
+          <a:p>
+            <a:pPr algn="ctr" indent="0" marL="0">
+              <a:buNone/>
+            </a:pPr>
+            <a:r>
+              <a:rPr lang="en-US" sz="3600" b="1" dirty="0">
+                <a:solidFill>
+                  <a:srgbClr val="990011"/>
+                </a:solidFill>
+                <a:latin typeface="Times New Roman" pitchFamily="34" charset="0"/>
+                <a:ea typeface="Times New Roman" pitchFamily="34" charset="-122"/>
+                <a:cs typeface="Times New Roman" pitchFamily="34" charset="-120"/>
+              </a:rPr>
+              <a:t>Expected Answer</a:t>
+            </a:r>
+            <a:endParaRPr lang="en-US" sz="3600" dirty="0"/>
+          </a:p>
+        </p:txBody>
+      </p:sp>
+      <p:sp>
+        <p:nvSpPr>
+          <p:cNvPr id="5" name="Text 2"/>
+          <p:cNvSpPr/>
+          <p:nvPr/>
+        </p:nvSpPr>
+        <p:spPr>
+          <a:xfrm>
+            <a:off x="5349240" y="1783080"/>
+            <a:ext cx="6522415" cy="4663440"/>
+          </a:xfrm>
+          <a:prstGeom prst="rect">
+            <a:avLst/>
+          </a:prstGeom>
+          <a:noFill/>
+          <a:ln/>
+        </p:spPr>
+        <p:txBody>
+          <a:bodyPr wrap="square" lIns="0" tIns="0" rIns="0" bIns="0" rtlCol="0" anchor="t"/>
+          <a:lstStyle/>
+          <a:p>
+            <a:pPr algn="l" indent="0" marL="0">
+              <a:spcAft>
+                <a:spcPts val="800"/>
+              </a:spcAft>
+              <a:buNone/>
+            </a:pPr>
+            <a:r>
+              <a:rPr lang="en-US" sz="4000" dirty="0">
+                <a:solidFill>
+                  <a:srgbClr val="111111"/>
+                </a:solidFill>
+                <a:latin typeface="Times New Roman" pitchFamily="34" charset="0"/>
+                <a:ea typeface="Times New Roman" pitchFamily="34" charset="-122"/>
+                <a:cs typeface="Times New Roman" pitchFamily="34" charset="-120"/>
+              </a:rPr>
+              <a:t>Active: it erupted in 1999 and 2000.</a:t>
+            </a:r>
+            <a:endParaRPr lang="en-US" sz="4000" dirty="0"/>
+          </a:p>
+        </p:txBody>
+      </p:sp>
+      <p:sp>
+        <p:nvSpPr>
+          <p:cNvPr id="25" name="Slide Number Placeholder 0"/>
+          <p:cNvSpPr>
+            <a:spLocks noGrp="1"/>
+          </p:cNvSpPr>
+          <p:nvPr>
+            <p:ph type="sldNum" sz="quarter" idx="4294967295"/>
+          </p:nvPr>
+        </p:nvSpPr>
+        <p:spPr>
+          <a:xfrm>
+            <a:off x="27432" y="91440"/>
+            <a:ext cx="585216" cy="475488"/>
+          </a:xfrm>
+          <a:prstGeom prst="rect">
+            <a:avLst/>
+          </a:prstGeom>
+          <a:extLst>
+            <a:ext uri="{C572A759-6A51-4108-AA02-DFA0A04FC94B}">
+              <ma14:wrappingTextBoxFlag xmlns:ma14="http://schemas.microsoft.com/office/mac/drawingml/2011/main" val="0"/>
+            </a:ext>
+          </a:extLst>
+        </p:spPr>
+        <p:txBody>
+          <a:bodyPr/>
+          <a:lstStyle>
+            <a:lvl1pPr>
+              <a:defRPr sz="2000">
+                <a:solidFill>
+                  <a:srgbClr val="FFFFFF"/>
+                </a:solidFill>
+                <a:latin typeface="Calibri"/>
+                <a:ea typeface="Calibri"/>
+                <a:cs typeface="Calibri"/>
+              </a:defRPr>
+            </a:lvl1pPr>
+          </a:lstStyle>
+          <a:p>
+            <a:pPr algn="ctr"/>
+            <a:fld id="{F7021451-1387-4CA6-816F-3879F97B5CBC}" type="slidenum">
+              <a:rPr b="1" lang="en-US"/>
+              <a:t>48</a:t>
+            </a:fld>
+            <a:endParaRPr lang="en-US"/>
+          </a:p>
+        </p:txBody>
+      </p:sp>
+    </p:spTree>
+  </p:cSld>
+  <p:clrMapOvr>
+    <a:masterClrMapping/>
+  </p:clrMapOvr>
+</p:sld>
+</file>
+
+<file path=ppt/slides/slide49.xml><?xml version="1.0" encoding="utf-8"?>
+<p:sld xmlns:a="http://schemas.openxmlformats.org/drawingml/2006/main" xmlns:r="http://schemas.openxmlformats.org/officeDocument/2006/relationships" xmlns:p="http://schemas.openxmlformats.org/presentationml/2006/main">
+  <p:cSld name="Slide 49">
+    <p:spTree>
+      <p:nvGrpSpPr>
+        <p:cNvPr id="1" name=""/>
+        <p:cNvGrpSpPr/>
+        <p:nvPr/>
+      </p:nvGrpSpPr>
+      <p:grpSpPr>
+        <a:xfrm>
+          <a:off x="0" y="0"/>
+          <a:ext cx="0" cy="0"/>
+          <a:chOff x="0" y="0"/>
+          <a:chExt cx="0" cy="0"/>
+        </a:xfrm>
+      </p:grpSpPr>
+      <p:sp>
+        <p:nvSpPr>
+          <p:cNvPr id="2" name="Text 0"/>
+          <p:cNvSpPr/>
+          <p:nvPr/>
+        </p:nvSpPr>
+        <p:spPr>
+          <a:xfrm>
+            <a:off x="457200" y="713232"/>
+            <a:ext cx="11368735" cy="274320"/>
+          </a:xfrm>
+          <a:prstGeom prst="rect">
+            <a:avLst/>
+          </a:prstGeom>
+          <a:noFill/>
+          <a:ln/>
+        </p:spPr>
+        <p:txBody>
+          <a:bodyPr wrap="square" lIns="0" tIns="0" rIns="0" bIns="0" rtlCol="0" anchor="ctr"/>
+          <a:lstStyle/>
+          <a:p>
+            <a:pPr algn="r" indent="0" marL="0">
+              <a:buNone/>
+            </a:pPr>
+            <a:r>
+              <a:rPr lang="en-US" sz="1400" b="1" dirty="0">
+                <a:solidFill>
+                  <a:srgbClr val="1C3F6E"/>
+                </a:solidFill>
+                <a:latin typeface="Calibri" pitchFamily="34" charset="0"/>
+                <a:ea typeface="Calibri" pitchFamily="34" charset="-122"/>
+                <a:cs typeface="Calibri" pitchFamily="34" charset="-120"/>
+              </a:rPr>
+              <a:t>REMEDIATION</a:t>
+            </a:r>
+            <a:endParaRPr lang="en-US" sz="1400" dirty="0"/>
+          </a:p>
+        </p:txBody>
+      </p:sp>
+      <p:pic>
+        <p:nvPicPr>
+          <p:cNvPr id="3" name="Image 0" descr="/home/claude/f4/img/minesec_sheet.png">    </p:cNvPr>
+          <p:cNvPicPr>
+            <a:picLocks noChangeAspect="1"/>
+          </p:cNvPicPr>
+          <p:nvPr/>
+        </p:nvPicPr>
+        <p:blipFill>
+          <a:blip r:embed="rId1"/>
+          <a:stretch>
+            <a:fillRect/>
+          </a:stretch>
+        </p:blipFill>
+        <p:spPr>
+          <a:xfrm>
+            <a:off x="0" y="658368"/>
+            <a:ext cx="2468880" cy="5833872"/>
+          </a:xfrm>
+          <a:prstGeom prst="rect">
+            <a:avLst/>
+          </a:prstGeom>
+        </p:spPr>
+      </p:pic>
+      <p:sp>
+        <p:nvSpPr>
+          <p:cNvPr id="4" name="Text 1"/>
+          <p:cNvSpPr/>
+          <p:nvPr/>
+        </p:nvSpPr>
+        <p:spPr>
+          <a:xfrm>
+            <a:off x="2697480" y="1005840"/>
+            <a:ext cx="9174175" cy="731520"/>
+          </a:xfrm>
+          <a:prstGeom prst="rect">
+            <a:avLst/>
+          </a:prstGeom>
+          <a:noFill/>
+          <a:ln/>
+        </p:spPr>
+        <p:txBody>
+          <a:bodyPr wrap="square" lIns="0" tIns="0" rIns="0" bIns="0" rtlCol="0" anchor="ctr">
+            <a:normAutofit/>
+          </a:bodyPr>
+          <a:lstStyle/>
+          <a:p>
+            <a:pPr algn="ctr" indent="0" marL="0">
+              <a:buNone/>
+            </a:pPr>
+            <a:r>
+              <a:rPr lang="en-US" sz="3600" b="1" dirty="0">
+                <a:solidFill>
+                  <a:srgbClr val="990011"/>
+                </a:solidFill>
+                <a:latin typeface="Times New Roman" pitchFamily="34" charset="0"/>
+                <a:ea typeface="Times New Roman" pitchFamily="34" charset="-122"/>
+                <a:cs typeface="Times New Roman" pitchFamily="34" charset="-120"/>
+              </a:rPr>
+              <a:t>Remediation</a:t>
+            </a:r>
+            <a:endParaRPr lang="en-US" sz="3600" dirty="0"/>
+          </a:p>
+        </p:txBody>
+      </p:sp>
+      <p:sp>
+        <p:nvSpPr>
+          <p:cNvPr id="5" name="Text 2"/>
+          <p:cNvSpPr/>
+          <p:nvPr/>
+        </p:nvSpPr>
+        <p:spPr>
+          <a:xfrm>
+            <a:off x="2697480" y="1783080"/>
+            <a:ext cx="9174175" cy="4663440"/>
+          </a:xfrm>
+          <a:prstGeom prst="rect">
+            <a:avLst/>
+          </a:prstGeom>
+          <a:noFill/>
+          <a:ln/>
+        </p:spPr>
+        <p:txBody>
+          <a:bodyPr wrap="square" lIns="0" tIns="0" rIns="0" bIns="0" rtlCol="0" anchor="t"/>
+          <a:lstStyle/>
+          <a:p>
+            <a:pPr algn="l" indent="0" marL="0">
+              <a:spcAft>
+                <a:spcPts val="800"/>
+              </a:spcAft>
+              <a:buNone/>
+            </a:pPr>
+            <a:r>
+              <a:rPr lang="en-US" sz="4000" b="1" dirty="0">
+                <a:solidFill>
+                  <a:srgbClr val="111111"/>
+                </a:solidFill>
+                <a:latin typeface="Times New Roman" pitchFamily="34" charset="0"/>
+                <a:ea typeface="Times New Roman" pitchFamily="34" charset="-122"/>
+                <a:cs typeface="Times New Roman" pitchFamily="34" charset="-120"/>
+              </a:rPr>
+              <a:t>Fill in the blanks:</a:t>
+            </a:r>
+            <a:endParaRPr lang="en-US" sz="4000" dirty="0"/>
+          </a:p>
+          <a:p>
+            <a:pPr algn="l" marL="342900" indent="-342900">
+              <a:spcAft>
+                <a:spcPts val="800"/>
+              </a:spcAft>
+              <a:buSzPct val="100000"/>
+              <a:buFont typeface="+mj-lt"/>
+              <a:buAutoNum type="arabicPeriod" startAt="1"/>
+            </a:pPr>
+            <a:r>
+              <a:rPr lang="en-US" sz="4000" dirty="0">
+                <a:solidFill>
+                  <a:srgbClr val="111111"/>
+                </a:solidFill>
+                <a:latin typeface="Times New Roman" pitchFamily="34" charset="0"/>
+                <a:ea typeface="Times New Roman" pitchFamily="34" charset="-122"/>
+                <a:cs typeface="Times New Roman" pitchFamily="34" charset="-120"/>
+              </a:rPr>
+              <a:t>Magma on the surface is called ______.</a:t>
+            </a:r>
+            <a:endParaRPr lang="en-US" sz="4000" dirty="0"/>
+          </a:p>
+          <a:p>
+            <a:pPr algn="l" marL="342900" indent="-342900">
+              <a:spcAft>
+                <a:spcPts val="800"/>
+              </a:spcAft>
+              <a:buSzPct val="100000"/>
+              <a:buFont typeface="+mj-lt"/>
+              <a:buAutoNum type="arabicPeriod" startAt="1"/>
+            </a:pPr>
+            <a:r>
+              <a:rPr lang="en-US" sz="4000" dirty="0">
+                <a:solidFill>
+                  <a:srgbClr val="111111"/>
+                </a:solidFill>
+                <a:latin typeface="Times New Roman" pitchFamily="34" charset="0"/>
+                <a:ea typeface="Times New Roman" pitchFamily="34" charset="-122"/>
+                <a:cs typeface="Times New Roman" pitchFamily="34" charset="-120"/>
+              </a:rPr>
+              <a:t>The pipe of a volcano is the ______.</a:t>
+            </a:r>
+            <a:endParaRPr lang="en-US" sz="4000" dirty="0"/>
+          </a:p>
+          <a:p>
+            <a:pPr algn="l" marL="342900" indent="-342900">
+              <a:spcAft>
+                <a:spcPts val="800"/>
+              </a:spcAft>
+              <a:buSzPct val="100000"/>
+              <a:buFont typeface="+mj-lt"/>
+              <a:buAutoNum type="arabicPeriod" startAt="1"/>
+            </a:pPr>
+            <a:r>
+              <a:rPr lang="en-US" sz="4000" dirty="0">
+                <a:solidFill>
+                  <a:srgbClr val="111111"/>
+                </a:solidFill>
+                <a:latin typeface="Times New Roman" pitchFamily="34" charset="0"/>
+                <a:ea typeface="Times New Roman" pitchFamily="34" charset="-122"/>
+                <a:cs typeface="Times New Roman" pitchFamily="34" charset="-120"/>
+              </a:rPr>
+              <a:t>A volcano that erupts now is ______.</a:t>
+            </a:r>
+            <a:endParaRPr lang="en-US" sz="4000" dirty="0"/>
+          </a:p>
+        </p:txBody>
+      </p:sp>
+      <p:sp>
+        <p:nvSpPr>
+          <p:cNvPr id="25" name="Slide Number Placeholder 0"/>
+          <p:cNvSpPr>
+            <a:spLocks noGrp="1"/>
+          </p:cNvSpPr>
+          <p:nvPr>
+            <p:ph type="sldNum" sz="quarter" idx="4294967295"/>
+          </p:nvPr>
+        </p:nvSpPr>
+        <p:spPr>
+          <a:xfrm>
+            <a:off x="27432" y="91440"/>
+            <a:ext cx="585216" cy="475488"/>
+          </a:xfrm>
+          <a:prstGeom prst="rect">
+            <a:avLst/>
+          </a:prstGeom>
+          <a:extLst>
+            <a:ext uri="{C572A759-6A51-4108-AA02-DFA0A04FC94B}">
+              <ma14:wrappingTextBoxFlag xmlns:ma14="http://schemas.microsoft.com/office/mac/drawingml/2011/main" val="0"/>
+            </a:ext>
+          </a:extLst>
+        </p:spPr>
+        <p:txBody>
+          <a:bodyPr/>
+          <a:lstStyle>
+            <a:lvl1pPr>
+              <a:defRPr sz="2000">
+                <a:solidFill>
+                  <a:srgbClr val="FFFFFF"/>
+                </a:solidFill>
+                <a:latin typeface="Calibri"/>
+                <a:ea typeface="Calibri"/>
+                <a:cs typeface="Calibri"/>
+              </a:defRPr>
+            </a:lvl1pPr>
+          </a:lstStyle>
+          <a:p>
+            <a:pPr algn="ctr"/>
+            <a:fld id="{F7021451-1387-4CA6-816F-3879F97B5CBC}" type="slidenum">
+              <a:rPr b="1" lang="en-US"/>
+              <a:t>49</a:t>
+            </a:fld>
+            <a:endParaRPr lang="en-US"/>
+          </a:p>
+        </p:txBody>
+      </p:sp>
+    </p:spTree>
+  </p:cSld>
+  <p:clrMapOvr>
+    <a:masterClrMapping/>
+  </p:clrMapOvr>
+</p:sld>
+</file>
+
+<file path=ppt/slides/slide5.xml><?xml version="1.0" encoding="utf-8"?>
+<p:sld xmlns:a="http://schemas.openxmlformats.org/drawingml/2006/main" xmlns:r="http://schemas.openxmlformats.org/officeDocument/2006/relationships" xmlns:p="http://schemas.openxmlformats.org/presentationml/2006/main">
+  <p:cSld name="Slide 5">
+    <p:spTree>
+      <p:nvGrpSpPr>
+        <p:cNvPr id="1" name=""/>
+        <p:cNvGrpSpPr/>
+        <p:nvPr/>
+      </p:nvGrpSpPr>
+      <p:grpSpPr>
+        <a:xfrm>
+          <a:off x="0" y="0"/>
+          <a:ext cx="0" cy="0"/>
+          <a:chOff x="0" y="0"/>
+          <a:chExt cx="0" cy="0"/>
+        </a:xfrm>
+      </p:grpSpPr>
+      <p:sp>
+        <p:nvSpPr>
+          <p:cNvPr id="2" name="Text 0"/>
+          <p:cNvSpPr/>
+          <p:nvPr/>
+        </p:nvSpPr>
+        <p:spPr>
+          <a:xfrm>
+            <a:off x="457200" y="713232"/>
+            <a:ext cx="11368735" cy="274320"/>
+          </a:xfrm>
+          <a:prstGeom prst="rect">
+            <a:avLst/>
+          </a:prstGeom>
+          <a:noFill/>
+          <a:ln/>
+        </p:spPr>
+        <p:txBody>
+          <a:bodyPr wrap="square" lIns="0" tIns="0" rIns="0" bIns="0" rtlCol="0" anchor="ctr"/>
+          <a:lstStyle/>
+          <a:p>
+            <a:pPr algn="r" indent="0" marL="0">
+              <a:buNone/>
+            </a:pPr>
+            <a:r>
+              <a:rPr lang="en-US" sz="1400" b="1" dirty="0">
+                <a:solidFill>
+                  <a:srgbClr val="1C3F6E"/>
+                </a:solidFill>
+                <a:latin typeface="Calibri" pitchFamily="34" charset="0"/>
+                <a:ea typeface="Calibri" pitchFamily="34" charset="-122"/>
+                <a:cs typeface="Calibri" pitchFamily="34" charset="-120"/>
+              </a:rPr>
+              <a:t>HOMEWORK CORRECTION</a:t>
+            </a:r>
+            <a:endParaRPr lang="en-US" sz="1400" dirty="0"/>
+          </a:p>
+        </p:txBody>
+      </p:sp>
+      <p:pic>
+        <p:nvPicPr>
+          <p:cNvPr id="3" name="Image 0" descr="/home/claude/f4/img/minesec_sheet.png">    </p:cNvPr>
+          <p:cNvPicPr>
+            <a:picLocks noChangeAspect="1"/>
+          </p:cNvPicPr>
+          <p:nvPr/>
+        </p:nvPicPr>
+        <p:blipFill>
+          <a:blip r:embed="rId1"/>
+          <a:stretch>
+            <a:fillRect/>
+          </a:stretch>
+        </p:blipFill>
+        <p:spPr>
+          <a:xfrm>
+            <a:off x="0" y="658368"/>
+            <a:ext cx="5120640" cy="5833872"/>
+          </a:xfrm>
+          <a:prstGeom prst="rect">
+            <a:avLst/>
+          </a:prstGeom>
+        </p:spPr>
+      </p:pic>
+      <p:sp>
+        <p:nvSpPr>
+          <p:cNvPr id="4" name="Text 1"/>
+          <p:cNvSpPr/>
+          <p:nvPr/>
+        </p:nvSpPr>
+        <p:spPr>
+          <a:xfrm>
+            <a:off x="5349240" y="1005840"/>
+            <a:ext cx="6522415" cy="731520"/>
+          </a:xfrm>
+          <a:prstGeom prst="rect">
+            <a:avLst/>
+          </a:prstGeom>
+          <a:noFill/>
+          <a:ln/>
+        </p:spPr>
+        <p:txBody>
+          <a:bodyPr wrap="square" lIns="0" tIns="0" rIns="0" bIns="0" rtlCol="0" anchor="ctr">
+            <a:normAutofit/>
+          </a:bodyPr>
+          <a:lstStyle/>
+          <a:p>
+            <a:pPr algn="ctr" indent="0" marL="0">
+              <a:buNone/>
+            </a:pPr>
+            <a:r>
+              <a:rPr lang="en-US" sz="3600" b="1" dirty="0">
+                <a:solidFill>
+                  <a:srgbClr val="990011"/>
+                </a:solidFill>
+                <a:latin typeface="Times New Roman" pitchFamily="34" charset="0"/>
+                <a:ea typeface="Times New Roman" pitchFamily="34" charset="-122"/>
+                <a:cs typeface="Times New Roman" pitchFamily="34" charset="-120"/>
+              </a:rPr>
+              <a:t>Correction: Possible Answer</a:t>
+            </a:r>
+            <a:endParaRPr lang="en-US" sz="3600" dirty="0"/>
+          </a:p>
+        </p:txBody>
+      </p:sp>
+      <p:sp>
+        <p:nvSpPr>
+          <p:cNvPr id="5" name="Text 2"/>
+          <p:cNvSpPr/>
+          <p:nvPr/>
+        </p:nvSpPr>
+        <p:spPr>
+          <a:xfrm>
+            <a:off x="5349240" y="1783080"/>
+            <a:ext cx="6522415" cy="4663440"/>
+          </a:xfrm>
+          <a:prstGeom prst="rect">
+            <a:avLst/>
+          </a:prstGeom>
+          <a:noFill/>
+          <a:ln/>
+        </p:spPr>
+        <p:txBody>
+          <a:bodyPr wrap="square" lIns="0" tIns="0" rIns="0" bIns="0" rtlCol="0" anchor="t"/>
+          <a:lstStyle/>
+          <a:p>
+            <a:pPr algn="l" indent="0" marL="0">
+              <a:spcAft>
+                <a:spcPts val="800"/>
+              </a:spcAft>
+              <a:buNone/>
+            </a:pPr>
+            <a:r>
+              <a:rPr lang="en-US" sz="4000" dirty="0">
+                <a:solidFill>
+                  <a:srgbClr val="111111"/>
+                </a:solidFill>
+                <a:latin typeface="Times New Roman" pitchFamily="34" charset="0"/>
+                <a:ea typeface="Times New Roman" pitchFamily="34" charset="-122"/>
+                <a:cs typeface="Times New Roman" pitchFamily="34" charset="-120"/>
+              </a:rPr>
+              <a:t>Mount Cameroon last erupted in 2012 (and in 1999 and 2000). In 1999 lava flowed towards the sea near Bakingili and destroyed roads and farms.</a:t>
+            </a:r>
+            <a:endParaRPr lang="en-US" sz="4000" dirty="0"/>
+          </a:p>
+        </p:txBody>
+      </p:sp>
+      <p:sp>
+        <p:nvSpPr>
+          <p:cNvPr id="25" name="Slide Number Placeholder 0"/>
+          <p:cNvSpPr>
+            <a:spLocks noGrp="1"/>
+          </p:cNvSpPr>
+          <p:nvPr>
+            <p:ph type="sldNum" sz="quarter" idx="4294967295"/>
+          </p:nvPr>
+        </p:nvSpPr>
+        <p:spPr>
+          <a:xfrm>
+            <a:off x="27432" y="91440"/>
+            <a:ext cx="585216" cy="475488"/>
+          </a:xfrm>
+          <a:prstGeom prst="rect">
+            <a:avLst/>
+          </a:prstGeom>
+          <a:extLst>
+            <a:ext uri="{C572A759-6A51-4108-AA02-DFA0A04FC94B}">
+              <ma14:wrappingTextBoxFlag xmlns:ma14="http://schemas.microsoft.com/office/mac/drawingml/2011/main" val="0"/>
+            </a:ext>
+          </a:extLst>
+        </p:spPr>
+        <p:txBody>
+          <a:bodyPr/>
+          <a:lstStyle>
+            <a:lvl1pPr>
+              <a:defRPr sz="2000">
+                <a:solidFill>
+                  <a:srgbClr val="FFFFFF"/>
+                </a:solidFill>
+                <a:latin typeface="Calibri"/>
+                <a:ea typeface="Calibri"/>
+                <a:cs typeface="Calibri"/>
+              </a:defRPr>
+            </a:lvl1pPr>
+          </a:lstStyle>
+          <a:p>
+            <a:pPr algn="ctr"/>
+            <a:fld id="{F7021451-1387-4CA6-816F-3879F97B5CBC}" type="slidenum">
+              <a:rPr b="1" lang="en-US"/>
+              <a:t>5</a:t>
+            </a:fld>
+            <a:endParaRPr lang="en-US"/>
+          </a:p>
+        </p:txBody>
+      </p:sp>
+    </p:spTree>
+  </p:cSld>
+  <p:clrMapOvr>
+    <a:masterClrMapping/>
+  </p:clrMapOvr>
+</p:sld>
+</file>
+
+<file path=ppt/slides/slide50.xml><?xml version="1.0" encoding="utf-8"?>
+<p:sld xmlns:a="http://schemas.openxmlformats.org/drawingml/2006/main" xmlns:r="http://schemas.openxmlformats.org/officeDocument/2006/relationships" xmlns:p="http://schemas.openxmlformats.org/presentationml/2006/main">
+  <p:cSld name="Slide 50">
+    <p:spTree>
+      <p:nvGrpSpPr>
+        <p:cNvPr id="1" name=""/>
+        <p:cNvGrpSpPr/>
+        <p:nvPr/>
+      </p:nvGrpSpPr>
+      <p:grpSpPr>
+        <a:xfrm>
+          <a:off x="0" y="0"/>
+          <a:ext cx="0" cy="0"/>
+          <a:chOff x="0" y="0"/>
+          <a:chExt cx="0" cy="0"/>
+        </a:xfrm>
+      </p:grpSpPr>
+      <p:sp>
+        <p:nvSpPr>
+          <p:cNvPr id="2" name="Text 0"/>
+          <p:cNvSpPr/>
+          <p:nvPr/>
+        </p:nvSpPr>
+        <p:spPr>
+          <a:xfrm>
+            <a:off x="457200" y="713232"/>
+            <a:ext cx="11368735" cy="274320"/>
+          </a:xfrm>
+          <a:prstGeom prst="rect">
+            <a:avLst/>
+          </a:prstGeom>
+          <a:noFill/>
+          <a:ln/>
+        </p:spPr>
+        <p:txBody>
+          <a:bodyPr wrap="square" lIns="0" tIns="0" rIns="0" bIns="0" rtlCol="0" anchor="ctr"/>
+          <a:lstStyle/>
+          <a:p>
+            <a:pPr algn="r" indent="0" marL="0">
+              <a:buNone/>
+            </a:pPr>
+            <a:r>
+              <a:rPr lang="en-US" sz="1400" b="1" dirty="0">
+                <a:solidFill>
+                  <a:srgbClr val="1C3F6E"/>
+                </a:solidFill>
+                <a:latin typeface="Calibri" pitchFamily="34" charset="0"/>
+                <a:ea typeface="Calibri" pitchFamily="34" charset="-122"/>
+                <a:cs typeface="Calibri" pitchFamily="34" charset="-120"/>
+              </a:rPr>
+              <a:t>HOMEWORK</a:t>
+            </a:r>
+            <a:endParaRPr lang="en-US" sz="1400" dirty="0"/>
+          </a:p>
+        </p:txBody>
+      </p:sp>
+      <p:pic>
+        <p:nvPicPr>
+          <p:cNvPr id="3" name="Image 0" descr="/home/claude/f4/img/minesec_sheet.png">    </p:cNvPr>
+          <p:cNvPicPr>
+            <a:picLocks noChangeAspect="1"/>
+          </p:cNvPicPr>
+          <p:nvPr/>
+        </p:nvPicPr>
+        <p:blipFill>
+          <a:blip r:embed="rId1"/>
+          <a:stretch>
+            <a:fillRect/>
+          </a:stretch>
+        </p:blipFill>
+        <p:spPr>
+          <a:xfrm>
+            <a:off x="0" y="658368"/>
+            <a:ext cx="5120640" cy="5833872"/>
+          </a:xfrm>
+          <a:prstGeom prst="rect">
+            <a:avLst/>
+          </a:prstGeom>
+        </p:spPr>
+      </p:pic>
+      <p:sp>
+        <p:nvSpPr>
+          <p:cNvPr id="4" name="Text 1"/>
+          <p:cNvSpPr/>
+          <p:nvPr/>
+        </p:nvSpPr>
+        <p:spPr>
+          <a:xfrm>
+            <a:off x="5349240" y="1005840"/>
+            <a:ext cx="6522415" cy="731520"/>
+          </a:xfrm>
+          <a:prstGeom prst="rect">
+            <a:avLst/>
+          </a:prstGeom>
+          <a:noFill/>
+          <a:ln/>
+        </p:spPr>
+        <p:txBody>
+          <a:bodyPr wrap="square" lIns="0" tIns="0" rIns="0" bIns="0" rtlCol="0" anchor="ctr">
+            <a:normAutofit/>
+          </a:bodyPr>
+          <a:lstStyle/>
+          <a:p>
+            <a:pPr algn="ctr" indent="0" marL="0">
+              <a:buNone/>
+            </a:pPr>
+            <a:r>
+              <a:rPr lang="en-US" sz="3600" b="1" dirty="0">
+                <a:solidFill>
+                  <a:srgbClr val="990011"/>
+                </a:solidFill>
+                <a:latin typeface="Times New Roman" pitchFamily="34" charset="0"/>
+                <a:ea typeface="Times New Roman" pitchFamily="34" charset="-122"/>
+                <a:cs typeface="Times New Roman" pitchFamily="34" charset="-120"/>
+              </a:rPr>
+              <a:t>Homework</a:t>
+            </a:r>
+            <a:endParaRPr lang="en-US" sz="3600" dirty="0"/>
+          </a:p>
+        </p:txBody>
+      </p:sp>
+      <p:sp>
+        <p:nvSpPr>
+          <p:cNvPr id="5" name="Text 2"/>
+          <p:cNvSpPr/>
+          <p:nvPr/>
+        </p:nvSpPr>
+        <p:spPr>
+          <a:xfrm>
+            <a:off x="5349240" y="1783080"/>
+            <a:ext cx="6522415" cy="4663440"/>
+          </a:xfrm>
+          <a:prstGeom prst="rect">
+            <a:avLst/>
+          </a:prstGeom>
+          <a:noFill/>
+          <a:ln/>
+        </p:spPr>
+        <p:txBody>
+          <a:bodyPr wrap="square" lIns="0" tIns="0" rIns="0" bIns="0" rtlCol="0" anchor="t"/>
+          <a:lstStyle/>
+          <a:p>
+            <a:pPr algn="l" indent="0" marL="0">
+              <a:spcAft>
+                <a:spcPts val="800"/>
+              </a:spcAft>
+              <a:buNone/>
+            </a:pPr>
+            <a:r>
+              <a:rPr lang="en-US" sz="4000" dirty="0">
+                <a:solidFill>
+                  <a:srgbClr val="111111"/>
+                </a:solidFill>
+                <a:latin typeface="Times New Roman" pitchFamily="34" charset="0"/>
+                <a:ea typeface="Times New Roman" pitchFamily="34" charset="-122"/>
+                <a:cs typeface="Times New Roman" pitchFamily="34" charset="-120"/>
+              </a:rPr>
+              <a:t>Imagine a friend wants to farm near Buea, on Mount Cameroon. Write two good reasons to go and two dangers.</a:t>
+            </a:r>
+            <a:endParaRPr lang="en-US" sz="4000" dirty="0"/>
+          </a:p>
+        </p:txBody>
+      </p:sp>
+      <p:sp>
+        <p:nvSpPr>
+          <p:cNvPr id="25" name="Slide Number Placeholder 0"/>
+          <p:cNvSpPr>
+            <a:spLocks noGrp="1"/>
+          </p:cNvSpPr>
+          <p:nvPr>
+            <p:ph type="sldNum" sz="quarter" idx="4294967295"/>
+          </p:nvPr>
+        </p:nvSpPr>
+        <p:spPr>
+          <a:xfrm>
+            <a:off x="27432" y="91440"/>
+            <a:ext cx="585216" cy="475488"/>
+          </a:xfrm>
+          <a:prstGeom prst="rect">
+            <a:avLst/>
+          </a:prstGeom>
+          <a:extLst>
+            <a:ext uri="{C572A759-6A51-4108-AA02-DFA0A04FC94B}">
+              <ma14:wrappingTextBoxFlag xmlns:ma14="http://schemas.microsoft.com/office/mac/drawingml/2011/main" val="0"/>
+            </a:ext>
+          </a:extLst>
+        </p:spPr>
+        <p:txBody>
+          <a:bodyPr/>
+          <a:lstStyle>
+            <a:lvl1pPr>
+              <a:defRPr sz="2000">
+                <a:solidFill>
+                  <a:srgbClr val="FFFFFF"/>
+                </a:solidFill>
+                <a:latin typeface="Calibri"/>
+                <a:ea typeface="Calibri"/>
+                <a:cs typeface="Calibri"/>
+              </a:defRPr>
+            </a:lvl1pPr>
+          </a:lstStyle>
+          <a:p>
+            <a:pPr algn="ctr"/>
+            <a:fld id="{F7021451-1387-4CA6-816F-3879F97B5CBC}" type="slidenum">
+              <a:rPr b="1" lang="en-US"/>
+              <a:t>50</a:t>
+            </a:fld>
+            <a:endParaRPr lang="en-US"/>
+          </a:p>
+        </p:txBody>
+      </p:sp>
+    </p:spTree>
+  </p:cSld>
+  <p:clrMapOvr>
+    <a:masterClrMapping/>
+  </p:clrMapOvr>
+</p:sld>
+</file>
+
+<file path=ppt/slides/slide51.xml><?xml version="1.0" encoding="utf-8"?>
+<p:sld xmlns:a="http://schemas.openxmlformats.org/drawingml/2006/main" xmlns:r="http://schemas.openxmlformats.org/officeDocument/2006/relationships" xmlns:p="http://schemas.openxmlformats.org/presentationml/2006/main">
+  <p:cSld name="Slide 51">
+    <p:spTree>
+      <p:nvGrpSpPr>
+        <p:cNvPr id="1" name=""/>
+        <p:cNvGrpSpPr/>
+        <p:nvPr/>
+      </p:nvGrpSpPr>
+      <p:grpSpPr>
+        <a:xfrm>
+          <a:off x="0" y="0"/>
+          <a:ext cx="0" cy="0"/>
+          <a:chOff x="0" y="0"/>
+          <a:chExt cx="0" cy="0"/>
+        </a:xfrm>
+      </p:grpSpPr>
+      <p:sp>
+        <p:nvSpPr>
+          <p:cNvPr id="2" name="Text 0"/>
+          <p:cNvSpPr/>
+          <p:nvPr/>
+        </p:nvSpPr>
+        <p:spPr>
+          <a:xfrm>
+            <a:off x="457200" y="713232"/>
+            <a:ext cx="11368735" cy="274320"/>
+          </a:xfrm>
+          <a:prstGeom prst="rect">
+            <a:avLst/>
+          </a:prstGeom>
+          <a:noFill/>
+          <a:ln/>
+        </p:spPr>
+        <p:txBody>
+          <a:bodyPr wrap="square" lIns="0" tIns="0" rIns="0" bIns="0" rtlCol="0" anchor="ctr"/>
+          <a:lstStyle/>
+          <a:p>
+            <a:pPr algn="r" indent="0" marL="0">
+              <a:buNone/>
+            </a:pPr>
+            <a:r>
+              <a:rPr lang="en-US" sz="1400" b="1" dirty="0">
+                <a:solidFill>
+                  <a:srgbClr val="1C3F6E"/>
+                </a:solidFill>
+                <a:latin typeface="Calibri" pitchFamily="34" charset="0"/>
+                <a:ea typeface="Calibri" pitchFamily="34" charset="-122"/>
+                <a:cs typeface="Calibri" pitchFamily="34" charset="-120"/>
+              </a:rPr>
+              <a:t>NEXT LESSON</a:t>
+            </a:r>
+            <a:endParaRPr lang="en-US" sz="1400" dirty="0"/>
+          </a:p>
+        </p:txBody>
+      </p:sp>
+      <p:pic>
+        <p:nvPicPr>
+          <p:cNvPr id="3" name="Image 0" descr="/home/claude/f4/img/minesec_sheet.png">    </p:cNvPr>
+          <p:cNvPicPr>
+            <a:picLocks noChangeAspect="1"/>
+          </p:cNvPicPr>
+          <p:nvPr/>
+        </p:nvPicPr>
+        <p:blipFill>
+          <a:blip r:embed="rId1"/>
+          <a:stretch>
+            <a:fillRect/>
+          </a:stretch>
+        </p:blipFill>
+        <p:spPr>
+          <a:xfrm>
+            <a:off x="0" y="658368"/>
+            <a:ext cx="5120640" cy="5833872"/>
+          </a:xfrm>
+          <a:prstGeom prst="rect">
+            <a:avLst/>
+          </a:prstGeom>
+        </p:spPr>
+      </p:pic>
+      <p:sp>
+        <p:nvSpPr>
+          <p:cNvPr id="4" name="Text 1"/>
+          <p:cNvSpPr/>
+          <p:nvPr/>
+        </p:nvSpPr>
+        <p:spPr>
+          <a:xfrm>
+            <a:off x="5349240" y="1005840"/>
+            <a:ext cx="6522415" cy="731520"/>
+          </a:xfrm>
+          <a:prstGeom prst="rect">
+            <a:avLst/>
+          </a:prstGeom>
+          <a:noFill/>
+          <a:ln/>
+        </p:spPr>
+        <p:txBody>
+          <a:bodyPr wrap="square" lIns="0" tIns="0" rIns="0" bIns="0" rtlCol="0" anchor="ctr">
+            <a:normAutofit/>
+          </a:bodyPr>
+          <a:lstStyle/>
+          <a:p>
+            <a:pPr algn="ctr" indent="0" marL="0">
+              <a:buNone/>
+            </a:pPr>
+            <a:r>
+              <a:rPr lang="en-US" sz="3600" b="1" dirty="0">
+                <a:solidFill>
+                  <a:srgbClr val="990011"/>
+                </a:solidFill>
+                <a:latin typeface="Times New Roman" pitchFamily="34" charset="0"/>
+                <a:ea typeface="Times New Roman" pitchFamily="34" charset="-122"/>
+                <a:cs typeface="Times New Roman" pitchFamily="34" charset="-120"/>
+              </a:rPr>
+              <a:t>Next Lesson</a:t>
+            </a:r>
+            <a:endParaRPr lang="en-US" sz="3600" dirty="0"/>
+          </a:p>
+        </p:txBody>
+      </p:sp>
+      <p:sp>
+        <p:nvSpPr>
+          <p:cNvPr id="5" name="Text 2"/>
+          <p:cNvSpPr/>
+          <p:nvPr/>
+        </p:nvSpPr>
+        <p:spPr>
+          <a:xfrm>
+            <a:off x="5349240" y="1783080"/>
+            <a:ext cx="6522415" cy="4663440"/>
+          </a:xfrm>
+          <a:prstGeom prst="rect">
+            <a:avLst/>
+          </a:prstGeom>
+          <a:noFill/>
+          <a:ln/>
+        </p:spPr>
+        <p:txBody>
+          <a:bodyPr wrap="square" lIns="0" tIns="0" rIns="0" bIns="0" rtlCol="0" anchor="ctr"/>
+          <a:lstStyle/>
+          <a:p>
+            <a:pPr algn="ctr" indent="0" marL="0">
+              <a:spcAft>
+                <a:spcPts val="800"/>
+              </a:spcAft>
+              <a:buNone/>
+            </a:pPr>
+            <a:r>
+              <a:rPr lang="en-US" sz="4000" b="1" dirty="0">
+                <a:solidFill>
+                  <a:srgbClr val="111111"/>
+                </a:solidFill>
+                <a:latin typeface="Times New Roman" pitchFamily="34" charset="0"/>
+                <a:ea typeface="Times New Roman" pitchFamily="34" charset="-122"/>
+                <a:cs typeface="Times New Roman" pitchFamily="34" charset="-120"/>
+              </a:rPr>
+              <a:t>Our next lesson will be on:</a:t>
+            </a:r>
+            <a:endParaRPr lang="en-US" sz="4000" dirty="0"/>
+          </a:p>
+          <a:p>
+            <a:pPr algn="ctr" indent="0" marL="0">
+              <a:spcAft>
+                <a:spcPts val="800"/>
+              </a:spcAft>
+              <a:buNone/>
+            </a:pPr>
+            <a:r>
+              <a:rPr lang="en-US" sz="4000" b="1" dirty="0">
+                <a:solidFill>
+                  <a:srgbClr val="990011"/>
+                </a:solidFill>
+                <a:latin typeface="Times New Roman" pitchFamily="34" charset="0"/>
+                <a:ea typeface="Times New Roman" pitchFamily="34" charset="-122"/>
+                <a:cs typeface="Times New Roman" pitchFamily="34" charset="-120"/>
+              </a:rPr>
+              <a:t>Lesson 12: The Impact of Volcanicity on Man</a:t>
+            </a:r>
+            <a:endParaRPr lang="en-US" sz="4000" dirty="0"/>
+          </a:p>
+        </p:txBody>
+      </p:sp>
+      <p:sp>
+        <p:nvSpPr>
+          <p:cNvPr id="25" name="Slide Number Placeholder 0"/>
+          <p:cNvSpPr>
+            <a:spLocks noGrp="1"/>
+          </p:cNvSpPr>
+          <p:nvPr>
+            <p:ph type="sldNum" sz="quarter" idx="4294967295"/>
+          </p:nvPr>
+        </p:nvSpPr>
+        <p:spPr>
+          <a:xfrm>
+            <a:off x="27432" y="91440"/>
+            <a:ext cx="585216" cy="475488"/>
+          </a:xfrm>
+          <a:prstGeom prst="rect">
+            <a:avLst/>
+          </a:prstGeom>
+          <a:extLst>
+            <a:ext uri="{C572A759-6A51-4108-AA02-DFA0A04FC94B}">
+              <ma14:wrappingTextBoxFlag xmlns:ma14="http://schemas.microsoft.com/office/mac/drawingml/2011/main" val="0"/>
+            </a:ext>
+          </a:extLst>
+        </p:spPr>
+        <p:txBody>
+          <a:bodyPr/>
+          <a:lstStyle>
+            <a:lvl1pPr>
+              <a:defRPr sz="2000">
+                <a:solidFill>
+                  <a:srgbClr val="FFFFFF"/>
+                </a:solidFill>
+                <a:latin typeface="Calibri"/>
+                <a:ea typeface="Calibri"/>
+                <a:cs typeface="Calibri"/>
+              </a:defRPr>
+            </a:lvl1pPr>
+          </a:lstStyle>
+          <a:p>
+            <a:pPr algn="ctr"/>
+            <a:fld id="{F7021451-1387-4CA6-816F-3879F97B5CBC}" type="slidenum">
+              <a:rPr b="1" lang="en-US"/>
+              <a:t>51</a:t>
+            </a:fld>
+            <a:endParaRPr lang="en-US"/>
+          </a:p>
+        </p:txBody>
+      </p:sp>
+    </p:spTree>
+  </p:cSld>
+  <p:clrMapOvr>
+    <a:masterClrMapping/>
+  </p:clrMapOvr>
+</p:sld>
+</file>
+
+<file path=ppt/slides/slide52.xml><?xml version="1.0" encoding="utf-8"?>
+<p:sld xmlns:a="http://schemas.openxmlformats.org/drawingml/2006/main" xmlns:r="http://schemas.openxmlformats.org/officeDocument/2006/relationships" xmlns:p="http://schemas.openxmlformats.org/presentationml/2006/main">
+  <p:cSld name="Slide 52">
+    <p:spTree>
+      <p:nvGrpSpPr>
+        <p:cNvPr id="1" name=""/>
+        <p:cNvGrpSpPr/>
+        <p:nvPr/>
+      </p:nvGrpSpPr>
+      <p:grpSpPr>
+        <a:xfrm>
+          <a:off x="0" y="0"/>
+          <a:ext cx="0" cy="0"/>
+          <a:chOff x="0" y="0"/>
+          <a:chExt cx="0" cy="0"/>
+        </a:xfrm>
+      </p:grpSpPr>
+      <p:sp>
+        <p:nvSpPr>
+          <p:cNvPr id="2" name="Text 0"/>
+          <p:cNvSpPr/>
+          <p:nvPr/>
+        </p:nvSpPr>
+        <p:spPr>
+          <a:xfrm>
+            <a:off x="457200" y="713232"/>
+            <a:ext cx="11368735" cy="274320"/>
+          </a:xfrm>
+          <a:prstGeom prst="rect">
+            <a:avLst/>
+          </a:prstGeom>
+          <a:noFill/>
+          <a:ln/>
+        </p:spPr>
+        <p:txBody>
+          <a:bodyPr wrap="square" lIns="0" tIns="0" rIns="0" bIns="0" rtlCol="0" anchor="ctr"/>
+          <a:lstStyle/>
+          <a:p>
+            <a:pPr algn="r" indent="0" marL="0">
+              <a:buNone/>
+            </a:pPr>
+            <a:r>
+              <a:rPr lang="en-US" sz="1400" b="1" dirty="0">
+                <a:solidFill>
+                  <a:srgbClr val="1C3F6E"/>
+                </a:solidFill>
+                <a:latin typeface="Calibri" pitchFamily="34" charset="0"/>
+                <a:ea typeface="Calibri" pitchFamily="34" charset="-122"/>
+                <a:cs typeface="Calibri" pitchFamily="34" charset="-120"/>
+              </a:rPr>
               <a:t>BILINGUAL GAME</a:t>
             </a:r>
             <a:endParaRPr lang="en-US" sz="1400" dirty="0"/>
@@ -16203,7 +19163,7 @@
       </p:sp>
       <p:graphicFrame>
         <p:nvGraphicFramePr>
-          <p:cNvPr id="46" name="Table 0"/>
+          <p:cNvPr id="53" name="Table 0"/>
           <p:cNvGraphicFramePr>
             <a:graphicFrameLocks noGrp="1"/>
           </p:cNvGraphicFramePr>
@@ -17515,7 +20475,7 @@
             <a:pPr algn="ctr"/>
             <a:fld id="{F7021451-1387-4CA6-816F-3879F97B5CBC}" type="slidenum">
               <a:rPr b="1" lang="en-US"/>
-              <a:t>45</a:t>
+              <a:t>52</a:t>
             </a:fld>
             <a:endParaRPr lang="en-US"/>
           </a:p>
@@ -17529,9 +20489,9 @@
 </p:sld>
 </file>
 
-<file path=ppt/slides/slide46.xml><?xml version="1.0" encoding="utf-8"?>
+<file path=ppt/slides/slide53.xml><?xml version="1.0" encoding="utf-8"?>
 <p:sld xmlns:a="http://schemas.openxmlformats.org/drawingml/2006/main" xmlns:r="http://schemas.openxmlformats.org/officeDocument/2006/relationships" xmlns:p="http://schemas.openxmlformats.org/presentationml/2006/main">
-  <p:cSld name="Slide 46">
+  <p:cSld name="Slide 53">
     <p:spTree>
       <p:nvGrpSpPr>
         <p:cNvPr id="1" name=""/>
@@ -17626,7 +20586,7 @@
       </p:sp>
       <p:graphicFrame>
         <p:nvGraphicFramePr>
-          <p:cNvPr id="47" name="Table 0"/>
+          <p:cNvPr id="54" name="Table 0"/>
           <p:cNvGraphicFramePr>
             <a:graphicFrameLocks noGrp="1"/>
           </p:cNvGraphicFramePr>
@@ -18248,7 +21208,7 @@
             <a:pPr algn="ctr"/>
             <a:fld id="{F7021451-1387-4CA6-816F-3879F97B5CBC}" type="slidenum">
               <a:rPr b="1" lang="en-US"/>
-              <a:t>46</a:t>
+              <a:t>53</a:t>
             </a:fld>
             <a:endParaRPr lang="en-US"/>
           </a:p>
@@ -18262,9 +21222,9 @@
 </p:sld>
 </file>
 
-<file path=ppt/slides/slide47.xml><?xml version="1.0" encoding="utf-8"?>
+<file path=ppt/slides/slide54.xml><?xml version="1.0" encoding="utf-8"?>
 <p:sld xmlns:a="http://schemas.openxmlformats.org/drawingml/2006/main" xmlns:r="http://schemas.openxmlformats.org/officeDocument/2006/relationships" xmlns:p="http://schemas.openxmlformats.org/presentationml/2006/main">
-  <p:cSld name="Slide 47">
+  <p:cSld name="Slide 54">
     <p:spTree>
       <p:nvGrpSpPr>
         <p:cNvPr id="1" name=""/>
@@ -18359,7 +21319,7 @@
       </p:sp>
       <p:graphicFrame>
         <p:nvGraphicFramePr>
-          <p:cNvPr id="48" name="Table 0"/>
+          <p:cNvPr id="55" name="Table 0"/>
           <p:cNvGraphicFramePr>
             <a:graphicFrameLocks noGrp="1"/>
           </p:cNvGraphicFramePr>
@@ -18469,7 +21429,7 @@
                           <a:ea typeface="Calibri" pitchFamily="34" charset="-122"/>
                           <a:cs typeface="Calibri" pitchFamily="34" charset="-120"/>
                         </a:rPr>
-                        <a:t>Definition and Origin; Types of Volcanoes; Processes of Volcanicity; General Structure of a Volcano.</a:t>
+                        <a:t>DEFINITIONS; Origin of Volcanoes; According to Activity; According to Shape; Processes of Volcanicity; General Structure of a Volcano.</a:t>
                       </a:r>
                       <a:endParaRPr lang="en-US" sz="1600" dirty="0">
                         <a:latin typeface="Calibri" charset="0"/>
@@ -19119,7 +22079,7 @@
             <a:pPr algn="ctr"/>
             <a:fld id="{F7021451-1387-4CA6-816F-3879F97B5CBC}" type="slidenum">
               <a:rPr b="1" lang="en-US"/>
-              <a:t>47</a:t>
+              <a:t>54</a:t>
             </a:fld>
             <a:endParaRPr lang="en-US"/>
           </a:p>
@@ -19133,9 +22093,9 @@
 </p:sld>
 </file>
 
-<file path=ppt/slides/slide48.xml><?xml version="1.0" encoding="utf-8"?>
+<file path=ppt/slides/slide55.xml><?xml version="1.0" encoding="utf-8"?>
 <p:sld xmlns:a="http://schemas.openxmlformats.org/drawingml/2006/main" xmlns:r="http://schemas.openxmlformats.org/officeDocument/2006/relationships" xmlns:p="http://schemas.openxmlformats.org/presentationml/2006/main">
-  <p:cSld name="Slide 48">
+  <p:cSld name="Slide 55">
     <p:spTree>
       <p:nvGrpSpPr>
         <p:cNvPr id="1" name=""/>
@@ -19402,7 +22362,7 @@
             <a:pPr algn="ctr"/>
             <a:fld id="{F7021451-1387-4CA6-816F-3879F97B5CBC}" type="slidenum">
               <a:rPr b="1" lang="en-US"/>
-              <a:t>48</a:t>
+              <a:t>55</a:t>
             </a:fld>
             <a:endParaRPr lang="en-US"/>
           </a:p>
@@ -19416,9 +22376,9 @@
 </p:sld>
 </file>
 
-<file path=ppt/slides/slide49.xml><?xml version="1.0" encoding="utf-8"?>
+<file path=ppt/slides/slide56.xml><?xml version="1.0" encoding="utf-8"?>
 <p:sld xmlns:a="http://schemas.openxmlformats.org/drawingml/2006/main" xmlns:r="http://schemas.openxmlformats.org/officeDocument/2006/relationships" xmlns:p="http://schemas.openxmlformats.org/presentationml/2006/main">
-  <p:cSld name="Slide 49">
+  <p:cSld name="Slide 56">
     <p:spTree>
       <p:nvGrpSpPr>
         <p:cNvPr id="1" name=""/>
@@ -19489,7 +22449,7 @@
         <p:spPr>
           <a:xfrm>
             <a:off x="0" y="658368"/>
-            <a:ext cx="5120640" cy="5833872"/>
+            <a:ext cx="3840480" cy="5833872"/>
           </a:xfrm>
           <a:prstGeom prst="rect">
             <a:avLst/>
@@ -19504,8 +22464,8 @@
         </p:nvSpPr>
         <p:spPr>
           <a:xfrm>
-            <a:off x="5349240" y="1005840"/>
-            <a:ext cx="6522415" cy="731520"/>
+            <a:off x="4069080" y="1005840"/>
+            <a:ext cx="7802575" cy="731520"/>
           </a:xfrm>
           <a:prstGeom prst="rect">
             <a:avLst/>
@@ -19545,8 +22505,8 @@
         </p:nvSpPr>
         <p:spPr>
           <a:xfrm>
-            <a:off x="5349240" y="1783080"/>
-            <a:ext cx="6522415" cy="4663440"/>
+            <a:off x="4069080" y="1783080"/>
+            <a:ext cx="7802575" cy="4663440"/>
           </a:xfrm>
           <a:prstGeom prst="rect">
             <a:avLst/>
@@ -19638,6 +22598,48 @@
                 <a:cs typeface="Calibri" pitchFamily="34" charset="-120"/>
               </a:rPr>
               <a:t>Photo, Activity 1: “Happy Anniversary Hawaii” by U.S. Geological Survey, CC0 1.0, via Flickr (https://www.flickr.com/photos/27784370@N05/14802198589)</a:t>
+            </a:r>
+            <a:endParaRPr lang="en-US" sz="1800" dirty="0"/>
+          </a:p>
+          <a:p>
+            <a:pPr algn="l" marL="342900" indent="-342900">
+              <a:spcAft>
+                <a:spcPts val="800"/>
+              </a:spcAft>
+              <a:buSzPct val="100000"/>
+              <a:buChar char="•"/>
+            </a:pPr>
+            <a:r>
+              <a:rPr lang="en-US" sz="1800" dirty="0">
+                <a:solidFill>
+                  <a:srgbClr val="111111"/>
+                </a:solidFill>
+                <a:latin typeface="Calibri" pitchFamily="34" charset="0"/>
+                <a:ea typeface="Calibri" pitchFamily="34" charset="-122"/>
+                <a:cs typeface="Calibri" pitchFamily="34" charset="-120"/>
+              </a:rPr>
+              <a:t>Photo, board summary (Active volcano): “Mount Cameroon” by John &amp; Mel Kots, CC BY-NC-ND 2.0, via Flickr (https://www.flickr.com/photos/26745817@N00/2347261849)</a:t>
+            </a:r>
+            <a:endParaRPr lang="en-US" sz="1800" dirty="0"/>
+          </a:p>
+          <a:p>
+            <a:pPr algn="l" marL="342900" indent="-342900">
+              <a:spcAft>
+                <a:spcPts val="800"/>
+              </a:spcAft>
+              <a:buSzPct val="100000"/>
+              <a:buChar char="•"/>
+            </a:pPr>
+            <a:r>
+              <a:rPr lang="en-US" sz="1800" dirty="0">
+                <a:solidFill>
+                  <a:srgbClr val="111111"/>
+                </a:solidFill>
+                <a:latin typeface="Calibri" pitchFamily="34" charset="0"/>
+                <a:ea typeface="Calibri" pitchFamily="34" charset="-122"/>
+                <a:cs typeface="Calibri" pitchFamily="34" charset="-120"/>
+              </a:rPr>
+              <a:t>Photo, board summary (Crater): “Taal Lake and Volcano, Tagaytay, Philippines” by Ray in Manila, CC BY 2.0, via Flickr (https://www.flickr.com/photos/21186555@N07/28260012661)</a:t>
             </a:r>
             <a:endParaRPr lang="en-US" sz="1800" dirty="0"/>
           </a:p>
@@ -19706,226 +22708,7 @@
             <a:pPr algn="ctr"/>
             <a:fld id="{F7021451-1387-4CA6-816F-3879F97B5CBC}" type="slidenum">
               <a:rPr b="1" lang="en-US"/>
-              <a:t>49</a:t>
-            </a:fld>
-            <a:endParaRPr lang="en-US"/>
-          </a:p>
-        </p:txBody>
-      </p:sp>
-    </p:spTree>
-  </p:cSld>
-  <p:clrMapOvr>
-    <a:masterClrMapping/>
-  </p:clrMapOvr>
-</p:sld>
-</file>
-
-<file path=ppt/slides/slide5.xml><?xml version="1.0" encoding="utf-8"?>
-<p:sld xmlns:a="http://schemas.openxmlformats.org/drawingml/2006/main" xmlns:r="http://schemas.openxmlformats.org/officeDocument/2006/relationships" xmlns:p="http://schemas.openxmlformats.org/presentationml/2006/main">
-  <p:cSld name="Slide 5">
-    <p:spTree>
-      <p:nvGrpSpPr>
-        <p:cNvPr id="1" name=""/>
-        <p:cNvGrpSpPr/>
-        <p:nvPr/>
-      </p:nvGrpSpPr>
-      <p:grpSpPr>
-        <a:xfrm>
-          <a:off x="0" y="0"/>
-          <a:ext cx="0" cy="0"/>
-          <a:chOff x="0" y="0"/>
-          <a:chExt cx="0" cy="0"/>
-        </a:xfrm>
-      </p:grpSpPr>
-      <p:sp>
-        <p:nvSpPr>
-          <p:cNvPr id="2" name="Text 0"/>
-          <p:cNvSpPr/>
-          <p:nvPr/>
-        </p:nvSpPr>
-        <p:spPr>
-          <a:xfrm>
-            <a:off x="457200" y="713232"/>
-            <a:ext cx="11368735" cy="274320"/>
-          </a:xfrm>
-          <a:prstGeom prst="rect">
-            <a:avLst/>
-          </a:prstGeom>
-          <a:noFill/>
-          <a:ln/>
-        </p:spPr>
-        <p:txBody>
-          <a:bodyPr wrap="square" lIns="0" tIns="0" rIns="0" bIns="0" rtlCol="0" anchor="ctr"/>
-          <a:lstStyle/>
-          <a:p>
-            <a:pPr algn="r" indent="0" marL="0">
-              <a:buNone/>
-            </a:pPr>
-            <a:r>
-              <a:rPr lang="en-US" sz="1400" b="1" dirty="0">
-                <a:solidFill>
-                  <a:srgbClr val="1C3F6E"/>
-                </a:solidFill>
-                <a:latin typeface="Calibri" pitchFamily="34" charset="0"/>
-                <a:ea typeface="Calibri" pitchFamily="34" charset="-122"/>
-                <a:cs typeface="Calibri" pitchFamily="34" charset="-120"/>
-              </a:rPr>
-              <a:t>HOMEWORK CORRECTION</a:t>
-            </a:r>
-            <a:endParaRPr lang="en-US" sz="1400" dirty="0"/>
-          </a:p>
-        </p:txBody>
-      </p:sp>
-      <p:pic>
-        <p:nvPicPr>
-          <p:cNvPr id="3" name="Image 0" descr="/home/claude/f4/img/minesec_sheet.png">    </p:cNvPr>
-          <p:cNvPicPr>
-            <a:picLocks noChangeAspect="1"/>
-          </p:cNvPicPr>
-          <p:nvPr/>
-        </p:nvPicPr>
-        <p:blipFill>
-          <a:blip r:embed="rId1"/>
-          <a:stretch>
-            <a:fillRect/>
-          </a:stretch>
-        </p:blipFill>
-        <p:spPr>
-          <a:xfrm>
-            <a:off x="0" y="658368"/>
-            <a:ext cx="5120640" cy="5833872"/>
-          </a:xfrm>
-          <a:prstGeom prst="rect">
-            <a:avLst/>
-          </a:prstGeom>
-        </p:spPr>
-      </p:pic>
-      <p:sp>
-        <p:nvSpPr>
-          <p:cNvPr id="4" name="Text 1"/>
-          <p:cNvSpPr/>
-          <p:nvPr/>
-        </p:nvSpPr>
-        <p:spPr>
-          <a:xfrm>
-            <a:off x="5349240" y="1005840"/>
-            <a:ext cx="6522415" cy="731520"/>
-          </a:xfrm>
-          <a:prstGeom prst="rect">
-            <a:avLst/>
-          </a:prstGeom>
-          <a:noFill/>
-          <a:ln/>
-        </p:spPr>
-        <p:txBody>
-          <a:bodyPr wrap="square" lIns="0" tIns="0" rIns="0" bIns="0" rtlCol="0" anchor="ctr">
-            <a:normAutofit/>
-          </a:bodyPr>
-          <a:lstStyle/>
-          <a:p>
-            <a:pPr algn="ctr" indent="0" marL="0">
-              <a:buNone/>
-            </a:pPr>
-            <a:r>
-              <a:rPr lang="en-US" sz="3600" b="1" dirty="0">
-                <a:solidFill>
-                  <a:srgbClr val="990011"/>
-                </a:solidFill>
-                <a:latin typeface="Times New Roman" pitchFamily="34" charset="0"/>
-                <a:ea typeface="Times New Roman" pitchFamily="34" charset="-122"/>
-                <a:cs typeface="Times New Roman" pitchFamily="34" charset="-120"/>
-              </a:rPr>
-              <a:t>Correction: Possible Answer</a:t>
-            </a:r>
-            <a:endParaRPr lang="en-US" sz="3600" dirty="0"/>
-          </a:p>
-        </p:txBody>
-      </p:sp>
-      <p:sp>
-        <p:nvSpPr>
-          <p:cNvPr id="5" name="Text 2"/>
-          <p:cNvSpPr/>
-          <p:nvPr/>
-        </p:nvSpPr>
-        <p:spPr>
-          <a:xfrm>
-            <a:off x="5349240" y="1783080"/>
-            <a:ext cx="6522415" cy="4663440"/>
-          </a:xfrm>
-          <a:prstGeom prst="rect">
-            <a:avLst/>
-          </a:prstGeom>
-          <a:noFill/>
-          <a:ln/>
-        </p:spPr>
-        <p:txBody>
-          <a:bodyPr wrap="square" lIns="0" tIns="0" rIns="0" bIns="0" rtlCol="0" anchor="t"/>
-          <a:lstStyle/>
-          <a:p>
-            <a:pPr algn="l" indent="0" marL="0">
-              <a:spcAft>
-                <a:spcPts val="800"/>
-              </a:spcAft>
-              <a:buNone/>
-            </a:pPr>
-            <a:r>
-              <a:rPr lang="en-US" sz="4000" dirty="0">
-                <a:solidFill>
-                  <a:srgbClr val="111111"/>
-                </a:solidFill>
-                <a:latin typeface="Times New Roman" pitchFamily="34" charset="0"/>
-                <a:ea typeface="Times New Roman" pitchFamily="34" charset="-122"/>
-                <a:cs typeface="Times New Roman" pitchFamily="34" charset="-120"/>
-              </a:rPr>
-              <a:t>Mount Cameroon last erupted in 2012 (and in 1999 and 2000). In 1999 lava flowed towards the sea near Bakingili and destroyed roads and farms.</a:t>
-            </a:r>
-            <a:endParaRPr lang="en-US" sz="4000" dirty="0"/>
-          </a:p>
-        </p:txBody>
-      </p:sp>
-      <p:sp>
-        <p:nvSpPr>
-          <p:cNvPr id="25" name="Slide Number Placeholder 0"/>
-          <p:cNvSpPr>
-            <a:spLocks noGrp="1"/>
-          </p:cNvSpPr>
-          <p:nvPr>
-            <p:ph type="sldNum" sz="quarter" idx="4294967295"/>
-          </p:nvPr>
-        </p:nvSpPr>
-        <p:spPr>
-          <a:xfrm>
-            <a:off x="27432" y="91440"/>
-            <a:ext cx="585216" cy="475488"/>
-          </a:xfrm>
-          <a:prstGeom prst="rect">
-            <a:avLst/>
-          </a:prstGeom>
-          <a:extLst>
-            <a:ext uri="{C572A759-6A51-4108-AA02-DFA0A04FC94B}">
-              <ma14:wrappingTextBoxFlag xmlns:ma14="http://schemas.microsoft.com/office/mac/drawingml/2011/main" val="0"/>
-            </a:ext>
-          </a:extLst>
-        </p:spPr>
-        <p:txBody>
-          <a:bodyPr/>
-          <a:lstStyle>
-            <a:lvl1pPr>
-              <a:defRPr sz="2000">
-                <a:solidFill>
-                  <a:srgbClr val="FFFFFF"/>
-                </a:solidFill>
-                <a:latin typeface="Calibri"/>
-                <a:ea typeface="Calibri"/>
-                <a:cs typeface="Calibri"/>
-              </a:defRPr>
-            </a:lvl1pPr>
-          </a:lstStyle>
-          <a:p>
-            <a:pPr algn="ctr"/>
-            <a:fld id="{F7021451-1387-4CA6-816F-3879F97B5CBC}" type="slidenum">
-              <a:rPr b="1" lang="en-US"/>
-              <a:t>5</a:t>
+              <a:t>56</a:t>
             </a:fld>
             <a:endParaRPr lang="en-US"/>
           </a:p>
@@ -20890,7 +23673,7 @@
         <p:spPr>
           <a:xfrm>
             <a:off x="0" y="658368"/>
-            <a:ext cx="5120640" cy="5833872"/>
+            <a:ext cx="2468880" cy="5833872"/>
           </a:xfrm>
           <a:prstGeom prst="rect">
             <a:avLst/>
@@ -20905,8 +23688,8 @@
         </p:nvSpPr>
         <p:spPr>
           <a:xfrm>
-            <a:off x="5349240" y="1005840"/>
-            <a:ext cx="6522415" cy="731520"/>
+            <a:off x="2697480" y="1005840"/>
+            <a:ext cx="9174175" cy="731520"/>
           </a:xfrm>
           <a:prstGeom prst="rect">
             <a:avLst/>
@@ -20946,8 +23729,8 @@
         </p:nvSpPr>
         <p:spPr>
           <a:xfrm>
-            <a:off x="5349240" y="1783080"/>
-            <a:ext cx="6522415" cy="4663440"/>
+            <a:off x="2697480" y="1783080"/>
+            <a:ext cx="9174175" cy="4663440"/>
           </a:xfrm>
           <a:prstGeom prst="rect">
             <a:avLst/>
@@ -20974,7 +23757,7 @@
                 <a:ea typeface="Times New Roman" pitchFamily="34" charset="-122"/>
                 <a:cs typeface="Times New Roman" pitchFamily="34" charset="-120"/>
               </a:rPr>
-              <a:t>Mount Cameroon, near Buea, is a very high mountain and an active volcano. In 1999 and 2000, lava flowed down its sides. The soils around it are dark and very fertile.</a:t>
+              <a:t>Mount Cameroon, near Buea, is a high mountain and an active volcano: in 1999 and 2000, lava flowed down its sides. Yet the dark soils around it are very fertile, and many people live there. Pupils from Buea ask: "What exactly is a volcano, and how is it built?"</a:t>
             </a:r>
             <a:endParaRPr lang="en-US" sz="4000" dirty="0"/>
           </a:p>

--- a/lecons/F3/14_FORM4_LESSON11_Volcanoes.pptx
+++ b/lecons/F3/14_FORM4_LESSON11_Volcanoes.pptx
@@ -3461,7 +3461,7 @@
           <a:p>
             <a:r>
               <a:rPr lang="en-US" dirty="0"/>
-              <a:t>Before we start the new lesson, let us correct the homework I gave you at the end of Lesson 10: Plate Tectonics. The question was: Ask your parents or read about Mount Cameroon: when did it last erupt, and what did the lava do? Take out your exercise books.</a:t>
+              <a:t>Before we start the new lesson, let us correct the homework I gave you at the end of Lesson 10: Plate Tectonics. The question was: Name one active volcano of Cameroon. Take out your exercise books.</a:t>
             </a:r>
             <a:endParaRPr lang="en-US" dirty="0"/>
           </a:p>
@@ -4429,7 +4429,7 @@
           <a:p>
             <a:r>
               <a:rPr lang="en-US" dirty="0"/>
-              <a:t>Here is a good answer. Mount Cameroon last erupted in 2012 (and in 1999 and 2000). In 1999 lava flowed towards the sea near Bakingili and destroyed roads and farms. Compare it with your own answer and correct your work in red.</a:t>
+              <a:t>Here is a good answer. Mount Cameroon. Compare it with your own answer and correct your work in red.</a:t>
             </a:r>
             <a:endParaRPr lang="en-US" dirty="0"/>
           </a:p>
@@ -4517,7 +4517,7 @@
           <a:p>
             <a:r>
               <a:rPr lang="en-US" dirty="0"/>
-              <a:t>For your homework: Imagine a friend wants to farm near Buea, on Mount Cameroon. Write two good reasons to go and two dangers. We shall correct it at the beginning of our next lesson.</a:t>
+              <a:t>For your homework: Give one danger and one advantage of volcanoes. We shall correct it at the beginning of our next lesson.</a:t>
             </a:r>
             <a:endParaRPr lang="en-US" dirty="0"/>
           </a:p>
@@ -15851,7 +15851,7 @@
                 <a:ea typeface="Times New Roman" pitchFamily="34" charset="-122"/>
                 <a:cs typeface="Times New Roman" pitchFamily="34" charset="-120"/>
               </a:rPr>
-              <a:t>Ask your parents or read about Mount Cameroon: when did it last erupt, and what did the lava do?</a:t>
+              <a:t>Name one active volcano of Cameroon.</a:t>
             </a:r>
             <a:endParaRPr lang="en-US" sz="4000" dirty="0"/>
           </a:p>
@@ -18546,7 +18546,7 @@
                 <a:ea typeface="Times New Roman" pitchFamily="34" charset="-122"/>
                 <a:cs typeface="Times New Roman" pitchFamily="34" charset="-120"/>
               </a:rPr>
-              <a:t>Mount Cameroon last erupted in 2012 (and in 1999 and 2000). In 1999 lava flowed towards the sea near Bakingili and destroyed roads and farms.</a:t>
+              <a:t>Mount Cameroon.</a:t>
             </a:r>
             <a:endParaRPr lang="en-US" sz="4000" dirty="0"/>
           </a:p>
@@ -18765,7 +18765,7 @@
                 <a:ea typeface="Times New Roman" pitchFamily="34" charset="-122"/>
                 <a:cs typeface="Times New Roman" pitchFamily="34" charset="-120"/>
               </a:rPr>
-              <a:t>Imagine a friend wants to farm near Buea, on Mount Cameroon. Write two good reasons to go and two dangers.</a:t>
+              <a:t>Give one danger and one advantage of volcanoes.</a:t>
             </a:r>
             <a:endParaRPr lang="en-US" sz="4000" dirty="0"/>
           </a:p>
@@ -21705,7 +21705,7 @@
                           <a:ea typeface="Calibri" pitchFamily="34" charset="-122"/>
                           <a:cs typeface="Calibri" pitchFamily="34" charset="-120"/>
                         </a:rPr>
-                        <a:t>Imagine a friend wants to farm near Buea, on Mount Cameroon. Write two good reasons to go and two dangers.</a:t>
+                        <a:t>Give one danger and one advantage of volcanoes.</a:t>
                       </a:r>
                       <a:endParaRPr lang="en-US" sz="1600" dirty="0">
                         <a:latin typeface="Calibri" charset="0"/>
